--- a/_sources/발표포스터양식.pptx
+++ b/_sources/발표포스터양식.pptx
@@ -1,19 +1,19 @@
 
 <file path=ppt/presentation.xml><?xml version="1.0" encoding="utf-8"?>
-<p:presentation xmlns:a="http://schemas.openxmlformats.org/drawingml/2006/main" xmlns:r="http://schemas.openxmlformats.org/officeDocument/2006/relationships" xmlns:mc="http://schemas.openxmlformats.org/markup-compatibility/2006" xmlns:mv="urn:schemas-microsoft-com:mac:vml" xmlns:p="http://schemas.openxmlformats.org/presentationml/2006/main" xmlns:c="http://schemas.openxmlformats.org/drawingml/2006/chart" xmlns:dgm="http://schemas.openxmlformats.org/drawingml/2006/diagram" xmlns:o="urn:schemas-microsoft-com:office:office" xmlns:v="urn:schemas-microsoft-com:vml" xmlns:pvml="urn:schemas-microsoft-com:office:powerpoint" xmlns:com="http://schemas.openxmlformats.org/drawingml/2006/compatibility" xmlns:p14="http://schemas.microsoft.com/office/powerpoint/2010/main" xmlns:p15="http://schemas.microsoft.com/office/powerpoint/2012/main" xmlns:ahyp="http://schemas.microsoft.com/office/drawing/2018/hyperlinkcolor" autoCompressPictures="0" strictFirstAndLastChars="0" saveSubsetFonts="1">
+<p:presentation xmlns:a="http://schemas.openxmlformats.org/drawingml/2006/main" xmlns:r="http://schemas.openxmlformats.org/officeDocument/2006/relationships" xmlns:p="http://schemas.openxmlformats.org/presentationml/2006/main" strictFirstAndLastChars="0" saveSubsetFonts="1" autoCompressPictures="0">
   <p:sldMasterIdLst>
-    <p:sldMasterId id="2147483648" r:id="rId4"/>
+    <p:sldMasterId id="2147483648" r:id="rId1"/>
   </p:sldMasterIdLst>
   <p:notesMasterIdLst>
-    <p:notesMasterId r:id="rId5"/>
+    <p:notesMasterId r:id="rId3"/>
   </p:notesMasterIdLst>
   <p:sldIdLst>
-    <p:sldId id="256" r:id="rId6"/>
+    <p:sldId id="256" r:id="rId2"/>
   </p:sldIdLst>
-  <p:sldSz cy="42808525" cx="30279975"/>
+  <p:sldSz cx="30279975" cy="42808525"/>
   <p:notesSz cx="6858000" cy="9144000"/>
   <p:defaultTextStyle>
-    <a:defPPr lvl="0" marR="0" rtl="0" algn="l">
+    <a:defPPr marR="0" lvl="0" algn="l" rtl="0">
       <a:lnSpc>
         <a:spcPct val="100000"/>
       </a:lnSpc>
@@ -24,7 +24,7 @@
         <a:spcPts val="0"/>
       </a:spcAft>
     </a:defPPr>
-    <a:lvl1pPr lvl="0" marR="0" rtl="0" algn="l">
+    <a:lvl1pPr marR="0" lvl="0" algn="l" rtl="0">
       <a:lnSpc>
         <a:spcPct val="100000"/>
       </a:lnSpc>
@@ -38,7 +38,7 @@
         <a:srgbClr val="000000"/>
       </a:buClr>
       <a:buFont typeface="Arial"/>
-      <a:defRPr b="0" i="0" sz="1400" u="none" cap="none" strike="noStrike">
+      <a:defRPr sz="1400" b="0" i="0" u="none" strike="noStrike" cap="none">
         <a:solidFill>
           <a:srgbClr val="000000"/>
         </a:solidFill>
@@ -48,7 +48,7 @@
         <a:sym typeface="Arial"/>
       </a:defRPr>
     </a:lvl1pPr>
-    <a:lvl2pPr lvl="1" marR="0" rtl="0" algn="l">
+    <a:lvl2pPr marR="0" lvl="1" algn="l" rtl="0">
       <a:lnSpc>
         <a:spcPct val="100000"/>
       </a:lnSpc>
@@ -62,7 +62,7 @@
         <a:srgbClr val="000000"/>
       </a:buClr>
       <a:buFont typeface="Arial"/>
-      <a:defRPr b="0" i="0" sz="1400" u="none" cap="none" strike="noStrike">
+      <a:defRPr sz="1400" b="0" i="0" u="none" strike="noStrike" cap="none">
         <a:solidFill>
           <a:srgbClr val="000000"/>
         </a:solidFill>
@@ -72,7 +72,7 @@
         <a:sym typeface="Arial"/>
       </a:defRPr>
     </a:lvl2pPr>
-    <a:lvl3pPr lvl="2" marR="0" rtl="0" algn="l">
+    <a:lvl3pPr marR="0" lvl="2" algn="l" rtl="0">
       <a:lnSpc>
         <a:spcPct val="100000"/>
       </a:lnSpc>
@@ -86,7 +86,7 @@
         <a:srgbClr val="000000"/>
       </a:buClr>
       <a:buFont typeface="Arial"/>
-      <a:defRPr b="0" i="0" sz="1400" u="none" cap="none" strike="noStrike">
+      <a:defRPr sz="1400" b="0" i="0" u="none" strike="noStrike" cap="none">
         <a:solidFill>
           <a:srgbClr val="000000"/>
         </a:solidFill>
@@ -96,7 +96,7 @@
         <a:sym typeface="Arial"/>
       </a:defRPr>
     </a:lvl3pPr>
-    <a:lvl4pPr lvl="3" marR="0" rtl="0" algn="l">
+    <a:lvl4pPr marR="0" lvl="3" algn="l" rtl="0">
       <a:lnSpc>
         <a:spcPct val="100000"/>
       </a:lnSpc>
@@ -110,7 +110,7 @@
         <a:srgbClr val="000000"/>
       </a:buClr>
       <a:buFont typeface="Arial"/>
-      <a:defRPr b="0" i="0" sz="1400" u="none" cap="none" strike="noStrike">
+      <a:defRPr sz="1400" b="0" i="0" u="none" strike="noStrike" cap="none">
         <a:solidFill>
           <a:srgbClr val="000000"/>
         </a:solidFill>
@@ -120,7 +120,7 @@
         <a:sym typeface="Arial"/>
       </a:defRPr>
     </a:lvl4pPr>
-    <a:lvl5pPr lvl="4" marR="0" rtl="0" algn="l">
+    <a:lvl5pPr marR="0" lvl="4" algn="l" rtl="0">
       <a:lnSpc>
         <a:spcPct val="100000"/>
       </a:lnSpc>
@@ -134,7 +134,7 @@
         <a:srgbClr val="000000"/>
       </a:buClr>
       <a:buFont typeface="Arial"/>
-      <a:defRPr b="0" i="0" sz="1400" u="none" cap="none" strike="noStrike">
+      <a:defRPr sz="1400" b="0" i="0" u="none" strike="noStrike" cap="none">
         <a:solidFill>
           <a:srgbClr val="000000"/>
         </a:solidFill>
@@ -144,7 +144,7 @@
         <a:sym typeface="Arial"/>
       </a:defRPr>
     </a:lvl5pPr>
-    <a:lvl6pPr lvl="5" marR="0" rtl="0" algn="l">
+    <a:lvl6pPr marR="0" lvl="5" algn="l" rtl="0">
       <a:lnSpc>
         <a:spcPct val="100000"/>
       </a:lnSpc>
@@ -158,7 +158,7 @@
         <a:srgbClr val="000000"/>
       </a:buClr>
       <a:buFont typeface="Arial"/>
-      <a:defRPr b="0" i="0" sz="1400" u="none" cap="none" strike="noStrike">
+      <a:defRPr sz="1400" b="0" i="0" u="none" strike="noStrike" cap="none">
         <a:solidFill>
           <a:srgbClr val="000000"/>
         </a:solidFill>
@@ -168,7 +168,7 @@
         <a:sym typeface="Arial"/>
       </a:defRPr>
     </a:lvl6pPr>
-    <a:lvl7pPr lvl="6" marR="0" rtl="0" algn="l">
+    <a:lvl7pPr marR="0" lvl="6" algn="l" rtl="0">
       <a:lnSpc>
         <a:spcPct val="100000"/>
       </a:lnSpc>
@@ -182,7 +182,7 @@
         <a:srgbClr val="000000"/>
       </a:buClr>
       <a:buFont typeface="Arial"/>
-      <a:defRPr b="0" i="0" sz="1400" u="none" cap="none" strike="noStrike">
+      <a:defRPr sz="1400" b="0" i="0" u="none" strike="noStrike" cap="none">
         <a:solidFill>
           <a:srgbClr val="000000"/>
         </a:solidFill>
@@ -192,7 +192,7 @@
         <a:sym typeface="Arial"/>
       </a:defRPr>
     </a:lvl7pPr>
-    <a:lvl8pPr lvl="7" marR="0" rtl="0" algn="l">
+    <a:lvl8pPr marR="0" lvl="7" algn="l" rtl="0">
       <a:lnSpc>
         <a:spcPct val="100000"/>
       </a:lnSpc>
@@ -206,7 +206,7 @@
         <a:srgbClr val="000000"/>
       </a:buClr>
       <a:buFont typeface="Arial"/>
-      <a:defRPr b="0" i="0" sz="1400" u="none" cap="none" strike="noStrike">
+      <a:defRPr sz="1400" b="0" i="0" u="none" strike="noStrike" cap="none">
         <a:solidFill>
           <a:srgbClr val="000000"/>
         </a:solidFill>
@@ -216,7 +216,7 @@
         <a:sym typeface="Arial"/>
       </a:defRPr>
     </a:lvl8pPr>
-    <a:lvl9pPr lvl="8" marR="0" rtl="0" algn="l">
+    <a:lvl9pPr marR="0" lvl="8" algn="l" rtl="0">
       <a:lnSpc>
         <a:spcPct val="100000"/>
       </a:lnSpc>
@@ -230,7 +230,7 @@
         <a:srgbClr val="000000"/>
       </a:buClr>
       <a:buFont typeface="Arial"/>
-      <a:defRPr b="0" i="0" sz="1400" u="none" cap="none" strike="noStrike">
+      <a:defRPr sz="1400" b="0" i="0" u="none" strike="noStrike" cap="none">
         <a:solidFill>
           <a:srgbClr val="000000"/>
         </a:solidFill>
@@ -243,7 +243,7 @@
   </p:defaultTextStyle>
   <p:extLst>
     <p:ext uri="{EFAFB233-063F-42B5-8137-9DF3F51BA10A}">
-      <p15:sldGuideLst>
+      <p15:sldGuideLst xmlns:ahyp="http://schemas.microsoft.com/office/drawing/2018/hyperlinkcolor" xmlns:p15="http://schemas.microsoft.com/office/powerpoint/2012/main" xmlns:p14="http://schemas.microsoft.com/office/powerpoint/2010/main" xmlns:com="http://schemas.openxmlformats.org/drawingml/2006/compatibility" xmlns:pvml="urn:schemas-microsoft-com:office:powerpoint" xmlns:v="urn:schemas-microsoft-com:vml" xmlns:o="urn:schemas-microsoft-com:office:office" xmlns:dgm="http://schemas.openxmlformats.org/drawingml/2006/diagram" xmlns:c="http://schemas.openxmlformats.org/drawingml/2006/chart" xmlns:mv="urn:schemas-microsoft-com:mac:vml" xmlns:mc="http://schemas.openxmlformats.org/markup-compatibility/2006" xmlns="">
         <p15:guide id="1" orient="horz" pos="13481">
           <p15:clr>
             <a:srgbClr val="A4A3A4"/>
@@ -257,18 +257,23 @@
       </p15:sldGuideLst>
     </p:ext>
     <p:ext uri="GoogleSlidesCustomDataVersion2">
-      <go:slidesCustomData xmlns:go="http://customooxmlschemas.google.com/" r:id="rId7" roundtripDataSignature="AMtx7mijgEuDw13MyALY9B6PDbMHPCRTZQ=="/>
+      <go:slidesCustomData xmlns:go="http://customooxmlschemas.google.com/" xmlns:ahyp="http://schemas.microsoft.com/office/drawing/2018/hyperlinkcolor" xmlns:p15="http://schemas.microsoft.com/office/powerpoint/2012/main" xmlns:p14="http://schemas.microsoft.com/office/powerpoint/2010/main" xmlns:com="http://schemas.openxmlformats.org/drawingml/2006/compatibility" xmlns:pvml="urn:schemas-microsoft-com:office:powerpoint" xmlns:v="urn:schemas-microsoft-com:vml" xmlns:o="urn:schemas-microsoft-com:office:office" xmlns:dgm="http://schemas.openxmlformats.org/drawingml/2006/diagram" xmlns:c="http://schemas.openxmlformats.org/drawingml/2006/chart" xmlns:mv="urn:schemas-microsoft-com:mac:vml" xmlns:mc="http://schemas.openxmlformats.org/markup-compatibility/2006" xmlns="" r:id="rId7" roundtripDataSignature="AMtx7mijgEuDw13MyALY9B6PDbMHPCRTZQ=="/>
     </p:ext>
   </p:extLst>
 </p:presentation>
 </file>
 
 <file path=ppt/notesMasters/notesMaster1.xml><?xml version="1.0" encoding="utf-8"?>
-<p:notesMaster xmlns:a="http://schemas.openxmlformats.org/drawingml/2006/main" xmlns:r="http://schemas.openxmlformats.org/officeDocument/2006/relationships" xmlns:mc="http://schemas.openxmlformats.org/markup-compatibility/2006" xmlns:mv="urn:schemas-microsoft-com:mac:vml" xmlns:p="http://schemas.openxmlformats.org/presentationml/2006/main" xmlns:c="http://schemas.openxmlformats.org/drawingml/2006/chart" xmlns:dgm="http://schemas.openxmlformats.org/drawingml/2006/diagram" xmlns:o="urn:schemas-microsoft-com:office:office" xmlns:v="urn:schemas-microsoft-com:vml" xmlns:pvml="urn:schemas-microsoft-com:office:powerpoint" xmlns:com="http://schemas.openxmlformats.org/drawingml/2006/compatibility" xmlns:p14="http://schemas.microsoft.com/office/powerpoint/2010/main" xmlns:p15="http://schemas.microsoft.com/office/powerpoint/2012/main" xmlns:ahyp="http://schemas.microsoft.com/office/drawing/2018/hyperlinkcolor">
+<p:notesMaster xmlns:a="http://schemas.openxmlformats.org/drawingml/2006/main" xmlns:r="http://schemas.openxmlformats.org/officeDocument/2006/relationships" xmlns:p="http://schemas.openxmlformats.org/presentationml/2006/main">
   <p:cSld>
+    <p:bg>
+      <p:bgRef idx="1001">
+        <a:schemeClr val="bg1"/>
+      </p:bgRef>
+    </p:bg>
     <p:spTree>
       <p:nvGrpSpPr>
-        <p:cNvPr id="2" name="Shape 2"/>
+        <p:cNvPr id="1" name="Shape 2"/>
         <p:cNvGrpSpPr/>
         <p:nvPr/>
       </p:nvGrpSpPr>
@@ -283,9 +288,11 @@
       <p:sp>
         <p:nvSpPr>
           <p:cNvPr id="3" name="Google Shape;3;n"/>
-          <p:cNvSpPr/>
+          <p:cNvSpPr>
+            <a:spLocks noGrp="1" noRot="1" noChangeAspect="1"/>
+          </p:cNvSpPr>
           <p:nvPr>
-            <p:ph idx="2" type="sldImg"/>
+            <p:ph type="sldImg" idx="2"/>
           </p:nvPr>
         </p:nvSpPr>
         <p:spPr>
@@ -294,9 +301,13 @@
             <a:ext cx="4572225" cy="3429000"/>
           </a:xfrm>
           <a:custGeom>
-            <a:rect b="b" l="l" r="r" t="t"/>
+            <a:avLst/>
+            <a:gdLst/>
+            <a:ahLst/>
+            <a:cxnLst/>
+            <a:rect l="l" t="t" r="r" b="b"/>
             <a:pathLst>
-              <a:path extrusionOk="0" h="120000" w="120000">
+              <a:path w="120000" h="120000" extrusionOk="0">
                 <a:moveTo>
                   <a:pt x="0" y="0"/>
                 </a:moveTo>
@@ -314,23 +325,25 @@
             </a:pathLst>
           </a:custGeom>
           <a:noFill/>
-          <a:ln cap="flat" cmpd="sng" w="9525">
+          <a:ln w="9525" cap="flat" cmpd="sng">
             <a:solidFill>
               <a:srgbClr val="000000"/>
             </a:solidFill>
             <a:prstDash val="solid"/>
             <a:round/>
-            <a:headEnd len="sm" w="sm" type="none"/>
-            <a:tailEnd len="sm" w="sm" type="none"/>
+            <a:headEnd type="none" w="sm" len="sm"/>
+            <a:tailEnd type="none" w="sm" len="sm"/>
           </a:ln>
         </p:spPr>
       </p:sp>
       <p:sp>
         <p:nvSpPr>
           <p:cNvPr id="4" name="Google Shape;4;n"/>
-          <p:cNvSpPr txBox="1"/>
+          <p:cNvSpPr txBox="1">
+            <a:spLocks noGrp="1"/>
+          </p:cNvSpPr>
           <p:nvPr>
-            <p:ph idx="1" type="body"/>
+            <p:ph type="body" idx="1"/>
           </p:nvPr>
         </p:nvSpPr>
         <p:spPr>
@@ -347,11 +360,11 @@
           </a:ln>
         </p:spPr>
         <p:txBody>
-          <a:bodyPr anchorCtr="0" anchor="t" bIns="91425" lIns="91425" spcFirstLastPara="1" rIns="91425" wrap="square" tIns="91425">
+          <a:bodyPr spcFirstLastPara="1" wrap="square" lIns="91425" tIns="91425" rIns="91425" bIns="91425" anchor="t" anchorCtr="0">
             <a:noAutofit/>
           </a:bodyPr>
           <a:lstStyle>
-            <a:lvl1pPr indent="-298450" lvl="0" marL="457200">
+            <a:lvl1pPr marL="457200" lvl="0" indent="-298450">
               <a:spcBef>
                 <a:spcPts val="0"/>
               </a:spcBef>
@@ -362,7 +375,7 @@
               <a:buChar char="●"/>
               <a:defRPr sz="1100"/>
             </a:lvl1pPr>
-            <a:lvl2pPr indent="-298450" lvl="1" marL="914400">
+            <a:lvl2pPr marL="914400" lvl="1" indent="-298450">
               <a:spcBef>
                 <a:spcPts val="0"/>
               </a:spcBef>
@@ -373,7 +386,7 @@
               <a:buChar char="○"/>
               <a:defRPr sz="1100"/>
             </a:lvl2pPr>
-            <a:lvl3pPr indent="-298450" lvl="2" marL="1371600">
+            <a:lvl3pPr marL="1371600" lvl="2" indent="-298450">
               <a:spcBef>
                 <a:spcPts val="0"/>
               </a:spcBef>
@@ -384,7 +397,7 @@
               <a:buChar char="■"/>
               <a:defRPr sz="1100"/>
             </a:lvl3pPr>
-            <a:lvl4pPr indent="-298450" lvl="3" marL="1828800">
+            <a:lvl4pPr marL="1828800" lvl="3" indent="-298450">
               <a:spcBef>
                 <a:spcPts val="0"/>
               </a:spcBef>
@@ -395,7 +408,7 @@
               <a:buChar char="●"/>
               <a:defRPr sz="1100"/>
             </a:lvl4pPr>
-            <a:lvl5pPr indent="-298450" lvl="4" marL="2286000">
+            <a:lvl5pPr marL="2286000" lvl="4" indent="-298450">
               <a:spcBef>
                 <a:spcPts val="0"/>
               </a:spcBef>
@@ -406,7 +419,7 @@
               <a:buChar char="○"/>
               <a:defRPr sz="1100"/>
             </a:lvl5pPr>
-            <a:lvl6pPr indent="-298450" lvl="5" marL="2743200">
+            <a:lvl6pPr marL="2743200" lvl="5" indent="-298450">
               <a:spcBef>
                 <a:spcPts val="0"/>
               </a:spcBef>
@@ -417,7 +430,7 @@
               <a:buChar char="■"/>
               <a:defRPr sz="1100"/>
             </a:lvl6pPr>
-            <a:lvl7pPr indent="-298450" lvl="6" marL="3200400">
+            <a:lvl7pPr marL="3200400" lvl="6" indent="-298450">
               <a:spcBef>
                 <a:spcPts val="0"/>
               </a:spcBef>
@@ -428,7 +441,7 @@
               <a:buChar char="●"/>
               <a:defRPr sz="1100"/>
             </a:lvl7pPr>
-            <a:lvl8pPr indent="-298450" lvl="7" marL="3657600">
+            <a:lvl8pPr marL="3657600" lvl="7" indent="-298450">
               <a:spcBef>
                 <a:spcPts val="0"/>
               </a:spcBef>
@@ -439,7 +452,7 @@
               <a:buChar char="○"/>
               <a:defRPr sz="1100"/>
             </a:lvl8pPr>
-            <a:lvl9pPr indent="-298450" lvl="8" marL="4114800">
+            <a:lvl9pPr marL="4114800" lvl="8" indent="-298450">
               <a:spcBef>
                 <a:spcPts val="0"/>
               </a:spcBef>
@@ -451,14 +464,21 @@
               <a:defRPr sz="1100"/>
             </a:lvl9pPr>
           </a:lstStyle>
-          <a:p/>
+          <a:p>
+            <a:endParaRPr/>
+          </a:p>
         </p:txBody>
       </p:sp>
     </p:spTree>
+    <p:extLst>
+      <p:ext uri="{BB962C8B-B14F-4D97-AF65-F5344CB8AC3E}">
+        <p14:creationId xmlns:p14="http://schemas.microsoft.com/office/powerpoint/2010/main" val="2596202856"/>
+      </p:ext>
+    </p:extLst>
   </p:cSld>
-  <p:clrMap accent1="accent1" accent2="accent2" accent3="accent3" accent4="accent4" accent5="accent5" accent6="accent6" bg1="lt1" bg2="dk2" tx1="dk1" tx2="lt2" folHlink="folHlink" hlink="hlink"/>
+  <p:clrMap bg1="lt1" tx1="dk1" bg2="dk2" tx2="lt2" accent1="accent1" accent2="accent2" accent3="accent3" accent4="accent4" accent5="accent5" accent6="accent6" hlink="hlink" folHlink="folHlink"/>
   <p:notesStyle>
-    <a:defPPr lvl="0" marR="0" rtl="0" algn="l">
+    <a:defPPr marR="0" lvl="0" algn="l" rtl="0">
       <a:lnSpc>
         <a:spcPct val="100000"/>
       </a:lnSpc>
@@ -469,7 +489,7 @@
         <a:spcPts val="0"/>
       </a:spcAft>
     </a:defPPr>
-    <a:lvl1pPr lvl="0" marR="0" rtl="0" algn="l">
+    <a:lvl1pPr marR="0" lvl="0" algn="l" rtl="0">
       <a:lnSpc>
         <a:spcPct val="100000"/>
       </a:lnSpc>
@@ -483,7 +503,7 @@
         <a:srgbClr val="000000"/>
       </a:buClr>
       <a:buFont typeface="Arial"/>
-      <a:defRPr b="0" i="0" sz="1400" u="none" cap="none" strike="noStrike">
+      <a:defRPr sz="1400" b="0" i="0" u="none" strike="noStrike" cap="none">
         <a:solidFill>
           <a:srgbClr val="000000"/>
         </a:solidFill>
@@ -493,7 +513,7 @@
         <a:sym typeface="Arial"/>
       </a:defRPr>
     </a:lvl1pPr>
-    <a:lvl2pPr lvl="1" marR="0" rtl="0" algn="l">
+    <a:lvl2pPr marR="0" lvl="1" algn="l" rtl="0">
       <a:lnSpc>
         <a:spcPct val="100000"/>
       </a:lnSpc>
@@ -507,7 +527,7 @@
         <a:srgbClr val="000000"/>
       </a:buClr>
       <a:buFont typeface="Arial"/>
-      <a:defRPr b="0" i="0" sz="1400" u="none" cap="none" strike="noStrike">
+      <a:defRPr sz="1400" b="0" i="0" u="none" strike="noStrike" cap="none">
         <a:solidFill>
           <a:srgbClr val="000000"/>
         </a:solidFill>
@@ -517,7 +537,7 @@
         <a:sym typeface="Arial"/>
       </a:defRPr>
     </a:lvl2pPr>
-    <a:lvl3pPr lvl="2" marR="0" rtl="0" algn="l">
+    <a:lvl3pPr marR="0" lvl="2" algn="l" rtl="0">
       <a:lnSpc>
         <a:spcPct val="100000"/>
       </a:lnSpc>
@@ -531,7 +551,7 @@
         <a:srgbClr val="000000"/>
       </a:buClr>
       <a:buFont typeface="Arial"/>
-      <a:defRPr b="0" i="0" sz="1400" u="none" cap="none" strike="noStrike">
+      <a:defRPr sz="1400" b="0" i="0" u="none" strike="noStrike" cap="none">
         <a:solidFill>
           <a:srgbClr val="000000"/>
         </a:solidFill>
@@ -541,7 +561,7 @@
         <a:sym typeface="Arial"/>
       </a:defRPr>
     </a:lvl3pPr>
-    <a:lvl4pPr lvl="3" marR="0" rtl="0" algn="l">
+    <a:lvl4pPr marR="0" lvl="3" algn="l" rtl="0">
       <a:lnSpc>
         <a:spcPct val="100000"/>
       </a:lnSpc>
@@ -555,7 +575,7 @@
         <a:srgbClr val="000000"/>
       </a:buClr>
       <a:buFont typeface="Arial"/>
-      <a:defRPr b="0" i="0" sz="1400" u="none" cap="none" strike="noStrike">
+      <a:defRPr sz="1400" b="0" i="0" u="none" strike="noStrike" cap="none">
         <a:solidFill>
           <a:srgbClr val="000000"/>
         </a:solidFill>
@@ -565,7 +585,7 @@
         <a:sym typeface="Arial"/>
       </a:defRPr>
     </a:lvl4pPr>
-    <a:lvl5pPr lvl="4" marR="0" rtl="0" algn="l">
+    <a:lvl5pPr marR="0" lvl="4" algn="l" rtl="0">
       <a:lnSpc>
         <a:spcPct val="100000"/>
       </a:lnSpc>
@@ -579,7 +599,7 @@
         <a:srgbClr val="000000"/>
       </a:buClr>
       <a:buFont typeface="Arial"/>
-      <a:defRPr b="0" i="0" sz="1400" u="none" cap="none" strike="noStrike">
+      <a:defRPr sz="1400" b="0" i="0" u="none" strike="noStrike" cap="none">
         <a:solidFill>
           <a:srgbClr val="000000"/>
         </a:solidFill>
@@ -589,7 +609,7 @@
         <a:sym typeface="Arial"/>
       </a:defRPr>
     </a:lvl5pPr>
-    <a:lvl6pPr lvl="5" marR="0" rtl="0" algn="l">
+    <a:lvl6pPr marR="0" lvl="5" algn="l" rtl="0">
       <a:lnSpc>
         <a:spcPct val="100000"/>
       </a:lnSpc>
@@ -603,7 +623,7 @@
         <a:srgbClr val="000000"/>
       </a:buClr>
       <a:buFont typeface="Arial"/>
-      <a:defRPr b="0" i="0" sz="1400" u="none" cap="none" strike="noStrike">
+      <a:defRPr sz="1400" b="0" i="0" u="none" strike="noStrike" cap="none">
         <a:solidFill>
           <a:srgbClr val="000000"/>
         </a:solidFill>
@@ -613,7 +633,7 @@
         <a:sym typeface="Arial"/>
       </a:defRPr>
     </a:lvl6pPr>
-    <a:lvl7pPr lvl="6" marR="0" rtl="0" algn="l">
+    <a:lvl7pPr marR="0" lvl="6" algn="l" rtl="0">
       <a:lnSpc>
         <a:spcPct val="100000"/>
       </a:lnSpc>
@@ -627,7 +647,7 @@
         <a:srgbClr val="000000"/>
       </a:buClr>
       <a:buFont typeface="Arial"/>
-      <a:defRPr b="0" i="0" sz="1400" u="none" cap="none" strike="noStrike">
+      <a:defRPr sz="1400" b="0" i="0" u="none" strike="noStrike" cap="none">
         <a:solidFill>
           <a:srgbClr val="000000"/>
         </a:solidFill>
@@ -637,7 +657,7 @@
         <a:sym typeface="Arial"/>
       </a:defRPr>
     </a:lvl7pPr>
-    <a:lvl8pPr lvl="7" marR="0" rtl="0" algn="l">
+    <a:lvl8pPr marR="0" lvl="7" algn="l" rtl="0">
       <a:lnSpc>
         <a:spcPct val="100000"/>
       </a:lnSpc>
@@ -651,7 +671,7 @@
         <a:srgbClr val="000000"/>
       </a:buClr>
       <a:buFont typeface="Arial"/>
-      <a:defRPr b="0" i="0" sz="1400" u="none" cap="none" strike="noStrike">
+      <a:defRPr sz="1400" b="0" i="0" u="none" strike="noStrike" cap="none">
         <a:solidFill>
           <a:srgbClr val="000000"/>
         </a:solidFill>
@@ -661,7 +681,7 @@
         <a:sym typeface="Arial"/>
       </a:defRPr>
     </a:lvl8pPr>
-    <a:lvl9pPr lvl="8" marR="0" rtl="0" algn="l">
+    <a:lvl9pPr marR="0" lvl="8" algn="l" rtl="0">
       <a:lnSpc>
         <a:spcPct val="100000"/>
       </a:lnSpc>
@@ -675,7 +695,7 @@
         <a:srgbClr val="000000"/>
       </a:buClr>
       <a:buFont typeface="Arial"/>
-      <a:defRPr b="0" i="0" sz="1400" u="none" cap="none" strike="noStrike">
+      <a:defRPr sz="1400" b="0" i="0" u="none" strike="noStrike" cap="none">
         <a:solidFill>
           <a:srgbClr val="000000"/>
         </a:solidFill>
@@ -690,11 +710,11 @@
 </file>
 
 <file path=ppt/notesSlides/notesSlide1.xml><?xml version="1.0" encoding="utf-8"?>
-<p:notes xmlns:a="http://schemas.openxmlformats.org/drawingml/2006/main" xmlns:r="http://schemas.openxmlformats.org/officeDocument/2006/relationships" xmlns:mc="http://schemas.openxmlformats.org/markup-compatibility/2006" xmlns:mv="urn:schemas-microsoft-com:mac:vml" xmlns:p="http://schemas.openxmlformats.org/presentationml/2006/main" xmlns:c="http://schemas.openxmlformats.org/drawingml/2006/chart" xmlns:dgm="http://schemas.openxmlformats.org/drawingml/2006/diagram" xmlns:o="urn:schemas-microsoft-com:office:office" xmlns:v="urn:schemas-microsoft-com:vml" xmlns:pvml="urn:schemas-microsoft-com:office:powerpoint" xmlns:com="http://schemas.openxmlformats.org/drawingml/2006/compatibility" xmlns:p14="http://schemas.microsoft.com/office/powerpoint/2010/main" xmlns:p15="http://schemas.microsoft.com/office/powerpoint/2012/main" xmlns:ahyp="http://schemas.microsoft.com/office/drawing/2018/hyperlinkcolor" showMasterPhAnim="0" showMasterSp="0">
+<p:notes xmlns:a="http://schemas.openxmlformats.org/drawingml/2006/main" xmlns:r="http://schemas.openxmlformats.org/officeDocument/2006/relationships" xmlns:p="http://schemas.openxmlformats.org/presentationml/2006/main" showMasterSp="0" showMasterPhAnim="0">
   <p:cSld>
     <p:spTree>
       <p:nvGrpSpPr>
-        <p:cNvPr id="26" name="Shape 26"/>
+        <p:cNvPr id="1" name="Shape 26"/>
         <p:cNvGrpSpPr/>
         <p:nvPr/>
       </p:nvGrpSpPr>
@@ -709,9 +729,11 @@
       <p:sp>
         <p:nvSpPr>
           <p:cNvPr id="27" name="Google Shape;27;p1:notes"/>
-          <p:cNvSpPr txBox="1"/>
+          <p:cNvSpPr txBox="1">
+            <a:spLocks noGrp="1"/>
+          </p:cNvSpPr>
           <p:nvPr>
-            <p:ph idx="1" type="body"/>
+            <p:ph type="body" idx="1"/>
           </p:nvPr>
         </p:nvSpPr>
         <p:spPr>
@@ -724,12 +746,12 @@
           </a:prstGeom>
         </p:spPr>
         <p:txBody>
-          <a:bodyPr anchorCtr="0" anchor="t" bIns="91425" lIns="91425" spcFirstLastPara="1" rIns="91425" wrap="square" tIns="91425">
+          <a:bodyPr spcFirstLastPara="1" wrap="square" lIns="91425" tIns="91425" rIns="91425" bIns="91425" anchor="t" anchorCtr="0">
             <a:noAutofit/>
           </a:bodyPr>
           <a:lstStyle/>
           <a:p>
-            <a:pPr indent="0" lvl="0" marL="0" rtl="0" algn="l">
+            <a:pPr marL="0" lvl="0" indent="0" algn="l" rtl="0">
               <a:spcBef>
                 <a:spcPts val="0"/>
               </a:spcBef>
@@ -738,9 +760,6 @@
               </a:spcAft>
               <a:buNone/>
             </a:pPr>
-            <a:r>
-              <a:t/>
-            </a:r>
             <a:endParaRPr/>
           </a:p>
         </p:txBody>
@@ -748,20 +767,26 @@
       <p:sp>
         <p:nvSpPr>
           <p:cNvPr id="28" name="Google Shape;28;p1:notes"/>
-          <p:cNvSpPr/>
+          <p:cNvSpPr>
+            <a:spLocks noGrp="1" noRot="1" noChangeAspect="1"/>
+          </p:cNvSpPr>
           <p:nvPr>
-            <p:ph idx="2" type="sldImg"/>
+            <p:ph type="sldImg" idx="2"/>
           </p:nvPr>
         </p:nvSpPr>
         <p:spPr>
           <a:xfrm>
-            <a:off x="1143225" y="685800"/>
-            <a:ext cx="4572225" cy="3429000"/>
+            <a:off x="2216150" y="685800"/>
+            <a:ext cx="2425700" cy="3429000"/>
           </a:xfrm>
           <a:custGeom>
-            <a:rect b="b" l="l" r="r" t="t"/>
+            <a:avLst/>
+            <a:gdLst/>
+            <a:ahLst/>
+            <a:cxnLst/>
+            <a:rect l="l" t="t" r="r" b="b"/>
             <a:pathLst>
-              <a:path extrusionOk="0" h="120000" w="120000">
+              <a:path w="120000" h="120000" extrusionOk="0">
                 <a:moveTo>
                   <a:pt x="0" y="0"/>
                 </a:moveTo>
@@ -789,18 +814,19 @@
 </file>
 
 <file path=ppt/slideLayouts/slideLayout1.xml><?xml version="1.0" encoding="utf-8"?>
-<p:sldLayout xmlns:a="http://schemas.openxmlformats.org/drawingml/2006/main" xmlns:r="http://schemas.openxmlformats.org/officeDocument/2006/relationships" xmlns:mc="http://schemas.openxmlformats.org/markup-compatibility/2006" xmlns:mv="urn:schemas-microsoft-com:mac:vml" xmlns:p="http://schemas.openxmlformats.org/presentationml/2006/main" xmlns:c="http://schemas.openxmlformats.org/drawingml/2006/chart" xmlns:dgm="http://schemas.openxmlformats.org/drawingml/2006/diagram" xmlns:o="urn:schemas-microsoft-com:office:office" xmlns:v="urn:schemas-microsoft-com:vml" xmlns:pvml="urn:schemas-microsoft-com:office:powerpoint" xmlns:com="http://schemas.openxmlformats.org/drawingml/2006/compatibility" xmlns:p14="http://schemas.microsoft.com/office/powerpoint/2010/main" xmlns:p15="http://schemas.microsoft.com/office/powerpoint/2012/main" xmlns:ahyp="http://schemas.microsoft.com/office/drawing/2018/hyperlinkcolor" matchingName="제목 슬라이드">
+<p:sldLayout xmlns:a="http://schemas.openxmlformats.org/drawingml/2006/main" xmlns:r="http://schemas.openxmlformats.org/officeDocument/2006/relationships" xmlns:p="http://schemas.openxmlformats.org/presentationml/2006/main" matchingName="제목 슬라이드">
   <p:cSld name="제목 슬라이드">
     <p:bg>
       <p:bgPr>
         <a:solidFill>
           <a:schemeClr val="lt1"/>
         </a:solidFill>
+        <a:effectLst/>
       </p:bgPr>
     </p:bg>
     <p:spTree>
       <p:nvGrpSpPr>
-        <p:cNvPr id="6" name="Shape 6"/>
+        <p:cNvPr id="1" name="Shape 6"/>
         <p:cNvGrpSpPr/>
         <p:nvPr/>
       </p:nvGrpSpPr>
@@ -822,7 +848,7 @@
           <a:blip r:embed="rId2">
             <a:alphaModFix/>
           </a:blip>
-          <a:srcRect b="0" l="0" r="0" t="0"/>
+          <a:srcRect/>
           <a:stretch/>
         </p:blipFill>
         <p:spPr>
@@ -861,12 +887,12 @@
           </a:ln>
         </p:spPr>
         <p:txBody>
-          <a:bodyPr anchorCtr="0" anchor="ctr" bIns="45700" lIns="91425" spcFirstLastPara="1" rIns="91425" wrap="square" tIns="45700">
+          <a:bodyPr spcFirstLastPara="1" wrap="square" lIns="91425" tIns="45700" rIns="91425" bIns="45700" anchor="ctr" anchorCtr="0">
             <a:noAutofit/>
           </a:bodyPr>
           <a:lstStyle/>
           <a:p>
-            <a:pPr indent="0" lvl="0" marL="0" marR="0" rtl="0" algn="ctr">
+            <a:pPr marL="0" marR="0" lvl="0" indent="0" algn="ctr" rtl="0">
               <a:spcBef>
                 <a:spcPts val="0"/>
               </a:spcBef>
@@ -875,10 +901,7 @@
               </a:spcAft>
               <a:buNone/>
             </a:pPr>
-            <a:r>
-              <a:t/>
-            </a:r>
-            <a:endParaRPr b="0" i="0" sz="7400" u="none" cap="none" strike="noStrike">
+            <a:endParaRPr sz="7400" b="0" i="0" u="none" strike="noStrike" cap="none">
               <a:solidFill>
                 <a:schemeClr val="lt1"/>
               </a:solidFill>
@@ -912,12 +935,12 @@
           </a:ln>
         </p:spPr>
         <p:txBody>
-          <a:bodyPr anchorCtr="0" anchor="ctr" bIns="45700" lIns="91425" spcFirstLastPara="1" rIns="91425" wrap="square" tIns="45700">
+          <a:bodyPr spcFirstLastPara="1" wrap="square" lIns="91425" tIns="45700" rIns="91425" bIns="45700" anchor="ctr" anchorCtr="0">
             <a:noAutofit/>
           </a:bodyPr>
           <a:lstStyle/>
           <a:p>
-            <a:pPr indent="0" lvl="0" marL="0" marR="0" rtl="0" algn="ctr">
+            <a:pPr marL="0" marR="0" lvl="0" indent="0" algn="ctr" rtl="0">
               <a:spcBef>
                 <a:spcPts val="0"/>
               </a:spcBef>
@@ -927,7 +950,7 @@
               <a:buNone/>
             </a:pPr>
             <a:r>
-              <a:rPr b="0" i="0" lang="ko-KR" sz="4400" u="none" cap="none" strike="noStrike">
+              <a:rPr lang="ko-KR" sz="4400" b="0" i="0" u="none" strike="noStrike" cap="none">
                 <a:solidFill>
                   <a:schemeClr val="lt1"/>
                 </a:solidFill>
@@ -936,7 +959,19 @@
                 <a:cs typeface="Arial"/>
                 <a:sym typeface="Arial"/>
               </a:rPr>
-              <a:t>서울대학교 기초교육원</a:t>
+              <a:t>서울대학교 </a:t>
+            </a:r>
+            <a:r>
+              <a:rPr lang="ko-KR" altLang="en-US" sz="4400" b="0" i="0" u="none" strike="noStrike" cap="none" smtClean="0">
+                <a:solidFill>
+                  <a:schemeClr val="lt1"/>
+                </a:solidFill>
+                <a:latin typeface="Arial"/>
+                <a:ea typeface="Arial"/>
+                <a:cs typeface="Arial"/>
+                <a:sym typeface="Arial"/>
+              </a:rPr>
+              <a:t>학부대학</a:t>
             </a:r>
             <a:endParaRPr/>
           </a:p>
@@ -952,7 +987,7 @@
           <a:blip r:embed="rId3">
             <a:alphaModFix/>
           </a:blip>
-          <a:srcRect b="0" l="0" r="0" t="0"/>
+          <a:srcRect/>
           <a:stretch/>
         </p:blipFill>
         <p:spPr>
@@ -978,11 +1013,11 @@
 </file>
 
 <file path=ppt/slideLayouts/slideLayout2.xml><?xml version="1.0" encoding="utf-8"?>
-<p:sldLayout xmlns:a="http://schemas.openxmlformats.org/drawingml/2006/main" xmlns:r="http://schemas.openxmlformats.org/officeDocument/2006/relationships" xmlns:mc="http://schemas.openxmlformats.org/markup-compatibility/2006" xmlns:mv="urn:schemas-microsoft-com:mac:vml" xmlns:p="http://schemas.openxmlformats.org/presentationml/2006/main" xmlns:c="http://schemas.openxmlformats.org/drawingml/2006/chart" xmlns:dgm="http://schemas.openxmlformats.org/drawingml/2006/diagram" xmlns:o="urn:schemas-microsoft-com:office:office" xmlns:v="urn:schemas-microsoft-com:vml" xmlns:pvml="urn:schemas-microsoft-com:office:powerpoint" xmlns:com="http://schemas.openxmlformats.org/drawingml/2006/compatibility" xmlns:p14="http://schemas.microsoft.com/office/powerpoint/2010/main" xmlns:p15="http://schemas.microsoft.com/office/powerpoint/2012/main" xmlns:ahyp="http://schemas.microsoft.com/office/drawing/2018/hyperlinkcolor" matchingName="제목 및 내용" type="obj">
+<p:sldLayout xmlns:a="http://schemas.openxmlformats.org/drawingml/2006/main" xmlns:r="http://schemas.openxmlformats.org/officeDocument/2006/relationships" xmlns:p="http://schemas.openxmlformats.org/presentationml/2006/main" matchingName="제목 및 내용" type="obj">
   <p:cSld name="OBJECT">
     <p:spTree>
       <p:nvGrpSpPr>
-        <p:cNvPr id="11" name="Shape 11"/>
+        <p:cNvPr id="1" name="Shape 11"/>
         <p:cNvGrpSpPr/>
         <p:nvPr/>
       </p:nvGrpSpPr>
@@ -997,7 +1032,9 @@
       <p:sp>
         <p:nvSpPr>
           <p:cNvPr id="12" name="Google Shape;12;p4"/>
-          <p:cNvSpPr txBox="1"/>
+          <p:cNvSpPr txBox="1">
+            <a:spLocks noGrp="1"/>
+          </p:cNvSpPr>
           <p:nvPr>
             <p:ph type="title"/>
           </p:nvPr>
@@ -1016,11 +1053,11 @@
           </a:ln>
         </p:spPr>
         <p:txBody>
-          <a:bodyPr anchorCtr="0" anchor="t" bIns="182950" lIns="365925" spcFirstLastPara="1" rIns="365925" wrap="square" tIns="182950">
+          <a:bodyPr spcFirstLastPara="1" wrap="square" lIns="365925" tIns="182950" rIns="365925" bIns="182950" anchor="t" anchorCtr="0">
             <a:noAutofit/>
           </a:bodyPr>
           <a:lstStyle>
-            <a:lvl1pPr lvl="0" marR="0" rtl="0" algn="ctr">
+            <a:lvl1pPr marR="0" lvl="0" algn="ctr" rtl="0">
               <a:spcBef>
                 <a:spcPts val="0"/>
               </a:spcBef>
@@ -1033,7 +1070,7 @@
               <a:buSzPts val="19600"/>
               <a:buFont typeface="Malgun Gothic"/>
               <a:buNone/>
-              <a:defRPr b="0" i="0" sz="19600" u="none" cap="none" strike="noStrike">
+              <a:defRPr sz="19600" b="0" i="0" u="none" strike="noStrike" cap="none">
                 <a:solidFill>
                   <a:schemeClr val="dk1"/>
                 </a:solidFill>
@@ -1132,15 +1169,19 @@
               <a:defRPr sz="1800"/>
             </a:lvl9pPr>
           </a:lstStyle>
-          <a:p/>
+          <a:p>
+            <a:endParaRPr/>
+          </a:p>
         </p:txBody>
       </p:sp>
       <p:sp>
         <p:nvSpPr>
           <p:cNvPr id="13" name="Google Shape;13;p4"/>
-          <p:cNvSpPr txBox="1"/>
+          <p:cNvSpPr txBox="1">
+            <a:spLocks noGrp="1"/>
+          </p:cNvSpPr>
           <p:nvPr>
-            <p:ph idx="1" type="body"/>
+            <p:ph type="body" idx="1"/>
           </p:nvPr>
         </p:nvSpPr>
         <p:spPr>
@@ -1157,11 +1198,11 @@
           </a:ln>
         </p:spPr>
         <p:txBody>
-          <a:bodyPr anchorCtr="0" anchor="t" bIns="182950" lIns="365925" spcFirstLastPara="1" rIns="365925" wrap="square" tIns="182950">
+          <a:bodyPr spcFirstLastPara="1" wrap="square" lIns="365925" tIns="182950" rIns="365925" bIns="182950" anchor="t" anchorCtr="0">
             <a:noAutofit/>
           </a:bodyPr>
           <a:lstStyle>
-            <a:lvl1pPr indent="-1143000" lvl="0" marL="457200" marR="0" rtl="0" algn="l">
+            <a:lvl1pPr marL="457200" marR="0" lvl="0" indent="-1143000" algn="l" rtl="0">
               <a:spcBef>
                 <a:spcPts val="2880"/>
               </a:spcBef>
@@ -1174,7 +1215,7 @@
               <a:buSzPts val="14400"/>
               <a:buFont typeface="Arial"/>
               <a:buChar char="•"/>
-              <a:defRPr b="0" i="0" sz="14400" u="none" cap="none" strike="noStrike">
+              <a:defRPr sz="14400" b="0" i="0" u="none" strike="noStrike" cap="none">
                 <a:solidFill>
                   <a:schemeClr val="dk1"/>
                 </a:solidFill>
@@ -1184,7 +1225,7 @@
                 <a:sym typeface="Malgun Gothic"/>
               </a:defRPr>
             </a:lvl1pPr>
-            <a:lvl2pPr indent="-1028700" lvl="1" marL="914400" marR="0" rtl="0" algn="l">
+            <a:lvl2pPr marL="914400" marR="0" lvl="1" indent="-1028700" algn="l" rtl="0">
               <a:spcBef>
                 <a:spcPts val="2520"/>
               </a:spcBef>
@@ -1197,7 +1238,7 @@
               <a:buSzPts val="12600"/>
               <a:buFont typeface="Arial"/>
               <a:buChar char="–"/>
-              <a:defRPr b="0" i="0" sz="12600" u="none" cap="none" strike="noStrike">
+              <a:defRPr sz="12600" b="0" i="0" u="none" strike="noStrike" cap="none">
                 <a:solidFill>
                   <a:schemeClr val="dk1"/>
                 </a:solidFill>
@@ -1207,7 +1248,7 @@
                 <a:sym typeface="Malgun Gothic"/>
               </a:defRPr>
             </a:lvl2pPr>
-            <a:lvl3pPr indent="-920750" lvl="2" marL="1371600" marR="0" rtl="0" algn="l">
+            <a:lvl3pPr marL="1371600" marR="0" lvl="2" indent="-920750" algn="l" rtl="0">
               <a:spcBef>
                 <a:spcPts val="2180"/>
               </a:spcBef>
@@ -1220,7 +1261,7 @@
               <a:buSzPts val="10900"/>
               <a:buFont typeface="Arial"/>
               <a:buChar char="•"/>
-              <a:defRPr b="0" i="0" sz="10900" u="none" cap="none" strike="noStrike">
+              <a:defRPr sz="10900" b="0" i="0" u="none" strike="noStrike" cap="none">
                 <a:solidFill>
                   <a:schemeClr val="dk1"/>
                 </a:solidFill>
@@ -1230,7 +1271,7 @@
                 <a:sym typeface="Malgun Gothic"/>
               </a:defRPr>
             </a:lvl3pPr>
-            <a:lvl4pPr indent="-812800" lvl="3" marL="1828800" marR="0" rtl="0" algn="l">
+            <a:lvl4pPr marL="1828800" marR="0" lvl="3" indent="-812800" algn="l" rtl="0">
               <a:spcBef>
                 <a:spcPts val="1840"/>
               </a:spcBef>
@@ -1243,7 +1284,7 @@
               <a:buSzPts val="9200"/>
               <a:buFont typeface="Arial"/>
               <a:buChar char="–"/>
-              <a:defRPr b="0" i="0" sz="9200" u="none" cap="none" strike="noStrike">
+              <a:defRPr sz="9200" b="0" i="0" u="none" strike="noStrike" cap="none">
                 <a:solidFill>
                   <a:schemeClr val="dk1"/>
                 </a:solidFill>
@@ -1253,7 +1294,7 @@
                 <a:sym typeface="Malgun Gothic"/>
               </a:defRPr>
             </a:lvl4pPr>
-            <a:lvl5pPr indent="-812800" lvl="4" marL="2286000" marR="0" rtl="0" algn="l">
+            <a:lvl5pPr marL="2286000" marR="0" lvl="4" indent="-812800" algn="l" rtl="0">
               <a:spcBef>
                 <a:spcPts val="1840"/>
               </a:spcBef>
@@ -1266,7 +1307,7 @@
               <a:buSzPts val="9200"/>
               <a:buFont typeface="Arial"/>
               <a:buChar char="»"/>
-              <a:defRPr b="0" i="0" sz="9200" u="none" cap="none" strike="noStrike">
+              <a:defRPr sz="9200" b="0" i="0" u="none" strike="noStrike" cap="none">
                 <a:solidFill>
                   <a:schemeClr val="dk1"/>
                 </a:solidFill>
@@ -1276,7 +1317,7 @@
                 <a:sym typeface="Malgun Gothic"/>
               </a:defRPr>
             </a:lvl5pPr>
-            <a:lvl6pPr indent="-812800" lvl="5" marL="2743200" marR="0" rtl="0" algn="l">
+            <a:lvl6pPr marL="2743200" marR="0" lvl="5" indent="-812800" algn="l" rtl="0">
               <a:spcBef>
                 <a:spcPts val="1840"/>
               </a:spcBef>
@@ -1289,7 +1330,7 @@
               <a:buSzPts val="9200"/>
               <a:buFont typeface="Arial"/>
               <a:buChar char="•"/>
-              <a:defRPr b="0" i="0" sz="9200" u="none" cap="none" strike="noStrike">
+              <a:defRPr sz="9200" b="0" i="0" u="none" strike="noStrike" cap="none">
                 <a:solidFill>
                   <a:schemeClr val="dk1"/>
                 </a:solidFill>
@@ -1299,7 +1340,7 @@
                 <a:sym typeface="Malgun Gothic"/>
               </a:defRPr>
             </a:lvl6pPr>
-            <a:lvl7pPr indent="-812800" lvl="6" marL="3200400" marR="0" rtl="0" algn="l">
+            <a:lvl7pPr marL="3200400" marR="0" lvl="6" indent="-812800" algn="l" rtl="0">
               <a:spcBef>
                 <a:spcPts val="1840"/>
               </a:spcBef>
@@ -1312,7 +1353,7 @@
               <a:buSzPts val="9200"/>
               <a:buFont typeface="Arial"/>
               <a:buChar char="•"/>
-              <a:defRPr b="0" i="0" sz="9200" u="none" cap="none" strike="noStrike">
+              <a:defRPr sz="9200" b="0" i="0" u="none" strike="noStrike" cap="none">
                 <a:solidFill>
                   <a:schemeClr val="dk1"/>
                 </a:solidFill>
@@ -1322,7 +1363,7 @@
                 <a:sym typeface="Malgun Gothic"/>
               </a:defRPr>
             </a:lvl7pPr>
-            <a:lvl8pPr indent="-812800" lvl="7" marL="3657600" marR="0" rtl="0" algn="l">
+            <a:lvl8pPr marL="3657600" marR="0" lvl="7" indent="-812800" algn="l" rtl="0">
               <a:spcBef>
                 <a:spcPts val="1840"/>
               </a:spcBef>
@@ -1335,7 +1376,7 @@
               <a:buSzPts val="9200"/>
               <a:buFont typeface="Arial"/>
               <a:buChar char="•"/>
-              <a:defRPr b="0" i="0" sz="9200" u="none" cap="none" strike="noStrike">
+              <a:defRPr sz="9200" b="0" i="0" u="none" strike="noStrike" cap="none">
                 <a:solidFill>
                   <a:schemeClr val="dk1"/>
                 </a:solidFill>
@@ -1345,7 +1386,7 @@
                 <a:sym typeface="Malgun Gothic"/>
               </a:defRPr>
             </a:lvl8pPr>
-            <a:lvl9pPr indent="-812800" lvl="8" marL="4114800" marR="0" rtl="0" algn="l">
+            <a:lvl9pPr marL="4114800" marR="0" lvl="8" indent="-812800" algn="l" rtl="0">
               <a:spcBef>
                 <a:spcPts val="1840"/>
               </a:spcBef>
@@ -1358,7 +1399,7 @@
               <a:buSzPts val="9200"/>
               <a:buFont typeface="Arial"/>
               <a:buChar char="•"/>
-              <a:defRPr b="0" i="0" sz="9200" u="none" cap="none" strike="noStrike">
+              <a:defRPr sz="9200" b="0" i="0" u="none" strike="noStrike" cap="none">
                 <a:solidFill>
                   <a:schemeClr val="dk1"/>
                 </a:solidFill>
@@ -1369,15 +1410,19 @@
               </a:defRPr>
             </a:lvl9pPr>
           </a:lstStyle>
-          <a:p/>
+          <a:p>
+            <a:endParaRPr/>
+          </a:p>
         </p:txBody>
       </p:sp>
       <p:sp>
         <p:nvSpPr>
           <p:cNvPr id="14" name="Google Shape;14;p4"/>
-          <p:cNvSpPr txBox="1"/>
+          <p:cNvSpPr txBox="1">
+            <a:spLocks noGrp="1"/>
+          </p:cNvSpPr>
           <p:nvPr>
-            <p:ph idx="10" type="dt"/>
+            <p:ph type="dt" idx="10"/>
           </p:nvPr>
         </p:nvSpPr>
         <p:spPr>
@@ -1394,11 +1439,11 @@
           </a:ln>
         </p:spPr>
         <p:txBody>
-          <a:bodyPr anchorCtr="0" anchor="t" bIns="182950" lIns="365925" spcFirstLastPara="1" rIns="365925" wrap="square" tIns="182950">
+          <a:bodyPr spcFirstLastPara="1" wrap="square" lIns="365925" tIns="182950" rIns="365925" bIns="182950" anchor="t" anchorCtr="0">
             <a:noAutofit/>
           </a:bodyPr>
           <a:lstStyle>
-            <a:lvl1pPr lvl="0" marR="0" rtl="0" algn="l">
+            <a:lvl1pPr marR="0" lvl="0" algn="l" rtl="0">
               <a:spcBef>
                 <a:spcPts val="0"/>
               </a:spcBef>
@@ -1417,7 +1462,7 @@
                 <a:sym typeface="Malgun Gothic"/>
               </a:defRPr>
             </a:lvl1pPr>
-            <a:lvl2pPr lvl="1" marR="0" rtl="0" algn="l">
+            <a:lvl2pPr marR="0" lvl="1" algn="l" rtl="0">
               <a:spcBef>
                 <a:spcPts val="0"/>
               </a:spcBef>
@@ -1426,7 +1471,7 @@
               </a:spcAft>
               <a:buSzPts val="1400"/>
               <a:buNone/>
-              <a:defRPr b="0" i="0" sz="7400" u="none" cap="none" strike="noStrike">
+              <a:defRPr sz="7400" b="0" i="0" u="none" strike="noStrike" cap="none">
                 <a:solidFill>
                   <a:schemeClr val="dk1"/>
                 </a:solidFill>
@@ -1436,7 +1481,7 @@
                 <a:sym typeface="Malgun Gothic"/>
               </a:defRPr>
             </a:lvl2pPr>
-            <a:lvl3pPr lvl="2" marR="0" rtl="0" algn="l">
+            <a:lvl3pPr marR="0" lvl="2" algn="l" rtl="0">
               <a:spcBef>
                 <a:spcPts val="0"/>
               </a:spcBef>
@@ -1445,7 +1490,7 @@
               </a:spcAft>
               <a:buSzPts val="1400"/>
               <a:buNone/>
-              <a:defRPr b="0" i="0" sz="7400" u="none" cap="none" strike="noStrike">
+              <a:defRPr sz="7400" b="0" i="0" u="none" strike="noStrike" cap="none">
                 <a:solidFill>
                   <a:schemeClr val="dk1"/>
                 </a:solidFill>
@@ -1455,7 +1500,7 @@
                 <a:sym typeface="Malgun Gothic"/>
               </a:defRPr>
             </a:lvl3pPr>
-            <a:lvl4pPr lvl="3" marR="0" rtl="0" algn="l">
+            <a:lvl4pPr marR="0" lvl="3" algn="l" rtl="0">
               <a:spcBef>
                 <a:spcPts val="0"/>
               </a:spcBef>
@@ -1464,7 +1509,7 @@
               </a:spcAft>
               <a:buSzPts val="1400"/>
               <a:buNone/>
-              <a:defRPr b="0" i="0" sz="7400" u="none" cap="none" strike="noStrike">
+              <a:defRPr sz="7400" b="0" i="0" u="none" strike="noStrike" cap="none">
                 <a:solidFill>
                   <a:schemeClr val="dk1"/>
                 </a:solidFill>
@@ -1474,7 +1519,7 @@
                 <a:sym typeface="Malgun Gothic"/>
               </a:defRPr>
             </a:lvl4pPr>
-            <a:lvl5pPr lvl="4" marR="0" rtl="0" algn="l">
+            <a:lvl5pPr marR="0" lvl="4" algn="l" rtl="0">
               <a:spcBef>
                 <a:spcPts val="0"/>
               </a:spcBef>
@@ -1483,7 +1528,7 @@
               </a:spcAft>
               <a:buSzPts val="1400"/>
               <a:buNone/>
-              <a:defRPr b="0" i="0" sz="7400" u="none" cap="none" strike="noStrike">
+              <a:defRPr sz="7400" b="0" i="0" u="none" strike="noStrike" cap="none">
                 <a:solidFill>
                   <a:schemeClr val="dk1"/>
                 </a:solidFill>
@@ -1493,7 +1538,7 @@
                 <a:sym typeface="Malgun Gothic"/>
               </a:defRPr>
             </a:lvl5pPr>
-            <a:lvl6pPr lvl="5" marR="0" rtl="0" algn="l">
+            <a:lvl6pPr marR="0" lvl="5" algn="l" rtl="0">
               <a:spcBef>
                 <a:spcPts val="0"/>
               </a:spcBef>
@@ -1502,7 +1547,7 @@
               </a:spcAft>
               <a:buSzPts val="1400"/>
               <a:buNone/>
-              <a:defRPr b="0" i="0" sz="7400" u="none" cap="none" strike="noStrike">
+              <a:defRPr sz="7400" b="0" i="0" u="none" strike="noStrike" cap="none">
                 <a:solidFill>
                   <a:schemeClr val="dk1"/>
                 </a:solidFill>
@@ -1512,7 +1557,7 @@
                 <a:sym typeface="Malgun Gothic"/>
               </a:defRPr>
             </a:lvl6pPr>
-            <a:lvl7pPr lvl="6" marR="0" rtl="0" algn="l">
+            <a:lvl7pPr marR="0" lvl="6" algn="l" rtl="0">
               <a:spcBef>
                 <a:spcPts val="0"/>
               </a:spcBef>
@@ -1521,7 +1566,7 @@
               </a:spcAft>
               <a:buSzPts val="1400"/>
               <a:buNone/>
-              <a:defRPr b="0" i="0" sz="7400" u="none" cap="none" strike="noStrike">
+              <a:defRPr sz="7400" b="0" i="0" u="none" strike="noStrike" cap="none">
                 <a:solidFill>
                   <a:schemeClr val="dk1"/>
                 </a:solidFill>
@@ -1531,7 +1576,7 @@
                 <a:sym typeface="Malgun Gothic"/>
               </a:defRPr>
             </a:lvl7pPr>
-            <a:lvl8pPr lvl="7" marR="0" rtl="0" algn="l">
+            <a:lvl8pPr marR="0" lvl="7" algn="l" rtl="0">
               <a:spcBef>
                 <a:spcPts val="0"/>
               </a:spcBef>
@@ -1540,7 +1585,7 @@
               </a:spcAft>
               <a:buSzPts val="1400"/>
               <a:buNone/>
-              <a:defRPr b="0" i="0" sz="7400" u="none" cap="none" strike="noStrike">
+              <a:defRPr sz="7400" b="0" i="0" u="none" strike="noStrike" cap="none">
                 <a:solidFill>
                   <a:schemeClr val="dk1"/>
                 </a:solidFill>
@@ -1550,7 +1595,7 @@
                 <a:sym typeface="Malgun Gothic"/>
               </a:defRPr>
             </a:lvl8pPr>
-            <a:lvl9pPr lvl="8" marR="0" rtl="0" algn="l">
+            <a:lvl9pPr marR="0" lvl="8" algn="l" rtl="0">
               <a:spcBef>
                 <a:spcPts val="0"/>
               </a:spcBef>
@@ -1559,7 +1604,7 @@
               </a:spcAft>
               <a:buSzPts val="1400"/>
               <a:buNone/>
-              <a:defRPr b="0" i="0" sz="7400" u="none" cap="none" strike="noStrike">
+              <a:defRPr sz="7400" b="0" i="0" u="none" strike="noStrike" cap="none">
                 <a:solidFill>
                   <a:schemeClr val="dk1"/>
                 </a:solidFill>
@@ -1570,15 +1615,19 @@
               </a:defRPr>
             </a:lvl9pPr>
           </a:lstStyle>
-          <a:p/>
+          <a:p>
+            <a:endParaRPr/>
+          </a:p>
         </p:txBody>
       </p:sp>
       <p:sp>
         <p:nvSpPr>
           <p:cNvPr id="15" name="Google Shape;15;p4"/>
-          <p:cNvSpPr txBox="1"/>
+          <p:cNvSpPr txBox="1">
+            <a:spLocks noGrp="1"/>
+          </p:cNvSpPr>
           <p:nvPr>
-            <p:ph idx="11" type="ftr"/>
+            <p:ph type="ftr" idx="11"/>
           </p:nvPr>
         </p:nvSpPr>
         <p:spPr>
@@ -1595,11 +1644,11 @@
           </a:ln>
         </p:spPr>
         <p:txBody>
-          <a:bodyPr anchorCtr="0" anchor="t" bIns="182950" lIns="365925" spcFirstLastPara="1" rIns="365925" wrap="square" tIns="182950">
+          <a:bodyPr spcFirstLastPara="1" wrap="square" lIns="365925" tIns="182950" rIns="365925" bIns="182950" anchor="t" anchorCtr="0">
             <a:noAutofit/>
           </a:bodyPr>
           <a:lstStyle>
-            <a:lvl1pPr lvl="0" marR="0" rtl="0" algn="l">
+            <a:lvl1pPr marR="0" lvl="0" algn="l" rtl="0">
               <a:spcBef>
                 <a:spcPts val="0"/>
               </a:spcBef>
@@ -1618,7 +1667,7 @@
                 <a:sym typeface="Malgun Gothic"/>
               </a:defRPr>
             </a:lvl1pPr>
-            <a:lvl2pPr lvl="1" marR="0" rtl="0" algn="l">
+            <a:lvl2pPr marR="0" lvl="1" algn="l" rtl="0">
               <a:spcBef>
                 <a:spcPts val="0"/>
               </a:spcBef>
@@ -1627,7 +1676,7 @@
               </a:spcAft>
               <a:buSzPts val="1400"/>
               <a:buNone/>
-              <a:defRPr b="0" i="0" sz="7400" u="none" cap="none" strike="noStrike">
+              <a:defRPr sz="7400" b="0" i="0" u="none" strike="noStrike" cap="none">
                 <a:solidFill>
                   <a:schemeClr val="dk1"/>
                 </a:solidFill>
@@ -1637,7 +1686,7 @@
                 <a:sym typeface="Malgun Gothic"/>
               </a:defRPr>
             </a:lvl2pPr>
-            <a:lvl3pPr lvl="2" marR="0" rtl="0" algn="l">
+            <a:lvl3pPr marR="0" lvl="2" algn="l" rtl="0">
               <a:spcBef>
                 <a:spcPts val="0"/>
               </a:spcBef>
@@ -1646,7 +1695,7 @@
               </a:spcAft>
               <a:buSzPts val="1400"/>
               <a:buNone/>
-              <a:defRPr b="0" i="0" sz="7400" u="none" cap="none" strike="noStrike">
+              <a:defRPr sz="7400" b="0" i="0" u="none" strike="noStrike" cap="none">
                 <a:solidFill>
                   <a:schemeClr val="dk1"/>
                 </a:solidFill>
@@ -1656,7 +1705,7 @@
                 <a:sym typeface="Malgun Gothic"/>
               </a:defRPr>
             </a:lvl3pPr>
-            <a:lvl4pPr lvl="3" marR="0" rtl="0" algn="l">
+            <a:lvl4pPr marR="0" lvl="3" algn="l" rtl="0">
               <a:spcBef>
                 <a:spcPts val="0"/>
               </a:spcBef>
@@ -1665,7 +1714,7 @@
               </a:spcAft>
               <a:buSzPts val="1400"/>
               <a:buNone/>
-              <a:defRPr b="0" i="0" sz="7400" u="none" cap="none" strike="noStrike">
+              <a:defRPr sz="7400" b="0" i="0" u="none" strike="noStrike" cap="none">
                 <a:solidFill>
                   <a:schemeClr val="dk1"/>
                 </a:solidFill>
@@ -1675,7 +1724,7 @@
                 <a:sym typeface="Malgun Gothic"/>
               </a:defRPr>
             </a:lvl4pPr>
-            <a:lvl5pPr lvl="4" marR="0" rtl="0" algn="l">
+            <a:lvl5pPr marR="0" lvl="4" algn="l" rtl="0">
               <a:spcBef>
                 <a:spcPts val="0"/>
               </a:spcBef>
@@ -1684,7 +1733,7 @@
               </a:spcAft>
               <a:buSzPts val="1400"/>
               <a:buNone/>
-              <a:defRPr b="0" i="0" sz="7400" u="none" cap="none" strike="noStrike">
+              <a:defRPr sz="7400" b="0" i="0" u="none" strike="noStrike" cap="none">
                 <a:solidFill>
                   <a:schemeClr val="dk1"/>
                 </a:solidFill>
@@ -1694,7 +1743,7 @@
                 <a:sym typeface="Malgun Gothic"/>
               </a:defRPr>
             </a:lvl5pPr>
-            <a:lvl6pPr lvl="5" marR="0" rtl="0" algn="l">
+            <a:lvl6pPr marR="0" lvl="5" algn="l" rtl="0">
               <a:spcBef>
                 <a:spcPts val="0"/>
               </a:spcBef>
@@ -1703,7 +1752,7 @@
               </a:spcAft>
               <a:buSzPts val="1400"/>
               <a:buNone/>
-              <a:defRPr b="0" i="0" sz="7400" u="none" cap="none" strike="noStrike">
+              <a:defRPr sz="7400" b="0" i="0" u="none" strike="noStrike" cap="none">
                 <a:solidFill>
                   <a:schemeClr val="dk1"/>
                 </a:solidFill>
@@ -1713,7 +1762,7 @@
                 <a:sym typeface="Malgun Gothic"/>
               </a:defRPr>
             </a:lvl6pPr>
-            <a:lvl7pPr lvl="6" marR="0" rtl="0" algn="l">
+            <a:lvl7pPr marR="0" lvl="6" algn="l" rtl="0">
               <a:spcBef>
                 <a:spcPts val="0"/>
               </a:spcBef>
@@ -1722,7 +1771,7 @@
               </a:spcAft>
               <a:buSzPts val="1400"/>
               <a:buNone/>
-              <a:defRPr b="0" i="0" sz="7400" u="none" cap="none" strike="noStrike">
+              <a:defRPr sz="7400" b="0" i="0" u="none" strike="noStrike" cap="none">
                 <a:solidFill>
                   <a:schemeClr val="dk1"/>
                 </a:solidFill>
@@ -1732,7 +1781,7 @@
                 <a:sym typeface="Malgun Gothic"/>
               </a:defRPr>
             </a:lvl7pPr>
-            <a:lvl8pPr lvl="7" marR="0" rtl="0" algn="l">
+            <a:lvl8pPr marR="0" lvl="7" algn="l" rtl="0">
               <a:spcBef>
                 <a:spcPts val="0"/>
               </a:spcBef>
@@ -1741,7 +1790,7 @@
               </a:spcAft>
               <a:buSzPts val="1400"/>
               <a:buNone/>
-              <a:defRPr b="0" i="0" sz="7400" u="none" cap="none" strike="noStrike">
+              <a:defRPr sz="7400" b="0" i="0" u="none" strike="noStrike" cap="none">
                 <a:solidFill>
                   <a:schemeClr val="dk1"/>
                 </a:solidFill>
@@ -1751,7 +1800,7 @@
                 <a:sym typeface="Malgun Gothic"/>
               </a:defRPr>
             </a:lvl8pPr>
-            <a:lvl9pPr lvl="8" marR="0" rtl="0" algn="l">
+            <a:lvl9pPr marR="0" lvl="8" algn="l" rtl="0">
               <a:spcBef>
                 <a:spcPts val="0"/>
               </a:spcBef>
@@ -1760,7 +1809,7 @@
               </a:spcAft>
               <a:buSzPts val="1400"/>
               <a:buNone/>
-              <a:defRPr b="0" i="0" sz="7400" u="none" cap="none" strike="noStrike">
+              <a:defRPr sz="7400" b="0" i="0" u="none" strike="noStrike" cap="none">
                 <a:solidFill>
                   <a:schemeClr val="dk1"/>
                 </a:solidFill>
@@ -1771,15 +1820,19 @@
               </a:defRPr>
             </a:lvl9pPr>
           </a:lstStyle>
-          <a:p/>
+          <a:p>
+            <a:endParaRPr/>
+          </a:p>
         </p:txBody>
       </p:sp>
       <p:sp>
         <p:nvSpPr>
           <p:cNvPr id="16" name="Google Shape;16;p4"/>
-          <p:cNvSpPr txBox="1"/>
+          <p:cNvSpPr txBox="1">
+            <a:spLocks noGrp="1"/>
+          </p:cNvSpPr>
           <p:nvPr>
-            <p:ph idx="12" type="sldNum"/>
+            <p:ph type="sldNum" idx="12"/>
           </p:nvPr>
         </p:nvSpPr>
         <p:spPr>
@@ -1796,11 +1849,11 @@
           </a:ln>
         </p:spPr>
         <p:txBody>
-          <a:bodyPr anchorCtr="0" anchor="t" bIns="182950" lIns="365925" spcFirstLastPara="1" rIns="365925" wrap="square" tIns="182950">
+          <a:bodyPr spcFirstLastPara="1" wrap="square" lIns="365925" tIns="182950" rIns="365925" bIns="182950" anchor="t" anchorCtr="0">
             <a:noAutofit/>
           </a:bodyPr>
           <a:lstStyle>
-            <a:lvl1pPr indent="0" lvl="0" marL="0" marR="0" rtl="0" algn="l">
+            <a:lvl1pPr marL="0" marR="0" lvl="0" indent="0" algn="l" rtl="0">
               <a:spcBef>
                 <a:spcPts val="0"/>
               </a:spcBef>
@@ -1815,7 +1868,7 @@
                 <a:sym typeface="Malgun Gothic"/>
               </a:defRPr>
             </a:lvl1pPr>
-            <a:lvl2pPr indent="0" lvl="1" marL="0" marR="0" rtl="0" algn="l">
+            <a:lvl2pPr marL="0" marR="0" lvl="1" indent="0" algn="l" rtl="0">
               <a:spcBef>
                 <a:spcPts val="0"/>
               </a:spcBef>
@@ -1830,7 +1883,7 @@
                 <a:sym typeface="Malgun Gothic"/>
               </a:defRPr>
             </a:lvl2pPr>
-            <a:lvl3pPr indent="0" lvl="2" marL="0" marR="0" rtl="0" algn="l">
+            <a:lvl3pPr marL="0" marR="0" lvl="2" indent="0" algn="l" rtl="0">
               <a:spcBef>
                 <a:spcPts val="0"/>
               </a:spcBef>
@@ -1845,7 +1898,7 @@
                 <a:sym typeface="Malgun Gothic"/>
               </a:defRPr>
             </a:lvl3pPr>
-            <a:lvl4pPr indent="0" lvl="3" marL="0" marR="0" rtl="0" algn="l">
+            <a:lvl4pPr marL="0" marR="0" lvl="3" indent="0" algn="l" rtl="0">
               <a:spcBef>
                 <a:spcPts val="0"/>
               </a:spcBef>
@@ -1860,7 +1913,7 @@
                 <a:sym typeface="Malgun Gothic"/>
               </a:defRPr>
             </a:lvl4pPr>
-            <a:lvl5pPr indent="0" lvl="4" marL="0" marR="0" rtl="0" algn="l">
+            <a:lvl5pPr marL="0" marR="0" lvl="4" indent="0" algn="l" rtl="0">
               <a:spcBef>
                 <a:spcPts val="0"/>
               </a:spcBef>
@@ -1875,7 +1928,7 @@
                 <a:sym typeface="Malgun Gothic"/>
               </a:defRPr>
             </a:lvl5pPr>
-            <a:lvl6pPr indent="0" lvl="5" marL="0" marR="0" rtl="0" algn="l">
+            <a:lvl6pPr marL="0" marR="0" lvl="5" indent="0" algn="l" rtl="0">
               <a:spcBef>
                 <a:spcPts val="0"/>
               </a:spcBef>
@@ -1890,7 +1943,7 @@
                 <a:sym typeface="Malgun Gothic"/>
               </a:defRPr>
             </a:lvl6pPr>
-            <a:lvl7pPr indent="0" lvl="6" marL="0" marR="0" rtl="0" algn="l">
+            <a:lvl7pPr marL="0" marR="0" lvl="6" indent="0" algn="l" rtl="0">
               <a:spcBef>
                 <a:spcPts val="0"/>
               </a:spcBef>
@@ -1905,7 +1958,7 @@
                 <a:sym typeface="Malgun Gothic"/>
               </a:defRPr>
             </a:lvl7pPr>
-            <a:lvl8pPr indent="0" lvl="7" marL="0" marR="0" rtl="0" algn="l">
+            <a:lvl8pPr marL="0" marR="0" lvl="7" indent="0" algn="l" rtl="0">
               <a:spcBef>
                 <a:spcPts val="0"/>
               </a:spcBef>
@@ -1920,7 +1973,7 @@
                 <a:sym typeface="Malgun Gothic"/>
               </a:defRPr>
             </a:lvl8pPr>
-            <a:lvl9pPr indent="0" lvl="8" marL="0" marR="0" rtl="0" algn="l">
+            <a:lvl9pPr marL="0" marR="0" lvl="8" indent="0" algn="l" rtl="0">
               <a:spcBef>
                 <a:spcPts val="0"/>
               </a:spcBef>
@@ -1937,7 +1990,7 @@
             </a:lvl9pPr>
           </a:lstStyle>
           <a:p>
-            <a:pPr indent="0" lvl="0" marL="0" rtl="0" algn="l">
+            <a:pPr marL="0" lvl="0" indent="0" algn="l" rtl="0">
               <a:spcBef>
                 <a:spcPts val="0"/>
               </a:spcBef>
@@ -1963,11 +2016,11 @@
 </file>
 
 <file path=ppt/slideLayouts/slideLayout3.xml><?xml version="1.0" encoding="utf-8"?>
-<p:sldLayout xmlns:a="http://schemas.openxmlformats.org/drawingml/2006/main" xmlns:r="http://schemas.openxmlformats.org/officeDocument/2006/relationships" xmlns:mc="http://schemas.openxmlformats.org/markup-compatibility/2006" xmlns:mv="urn:schemas-microsoft-com:mac:vml" xmlns:p="http://schemas.openxmlformats.org/presentationml/2006/main" xmlns:c="http://schemas.openxmlformats.org/drawingml/2006/chart" xmlns:dgm="http://schemas.openxmlformats.org/drawingml/2006/diagram" xmlns:o="urn:schemas-microsoft-com:office:office" xmlns:v="urn:schemas-microsoft-com:vml" xmlns:pvml="urn:schemas-microsoft-com:office:powerpoint" xmlns:com="http://schemas.openxmlformats.org/drawingml/2006/compatibility" xmlns:p14="http://schemas.microsoft.com/office/powerpoint/2010/main" xmlns:p15="http://schemas.microsoft.com/office/powerpoint/2012/main" xmlns:ahyp="http://schemas.microsoft.com/office/drawing/2018/hyperlinkcolor" matchingName="제목만" type="titleOnly">
+<p:sldLayout xmlns:a="http://schemas.openxmlformats.org/drawingml/2006/main" xmlns:r="http://schemas.openxmlformats.org/officeDocument/2006/relationships" xmlns:p="http://schemas.openxmlformats.org/presentationml/2006/main" matchingName="제목만" type="titleOnly">
   <p:cSld name="TITLE_ONLY">
     <p:spTree>
       <p:nvGrpSpPr>
-        <p:cNvPr id="17" name="Shape 17"/>
+        <p:cNvPr id="1" name="Shape 17"/>
         <p:cNvGrpSpPr/>
         <p:nvPr/>
       </p:nvGrpSpPr>
@@ -1982,7 +2035,9 @@
       <p:sp>
         <p:nvSpPr>
           <p:cNvPr id="18" name="Google Shape;18;p5"/>
-          <p:cNvSpPr txBox="1"/>
+          <p:cNvSpPr txBox="1">
+            <a:spLocks noGrp="1"/>
+          </p:cNvSpPr>
           <p:nvPr>
             <p:ph type="title"/>
           </p:nvPr>
@@ -2001,11 +2056,11 @@
           </a:ln>
         </p:spPr>
         <p:txBody>
-          <a:bodyPr anchorCtr="0" anchor="t" bIns="182950" lIns="365925" spcFirstLastPara="1" rIns="365925" wrap="square" tIns="182950">
+          <a:bodyPr spcFirstLastPara="1" wrap="square" lIns="365925" tIns="182950" rIns="365925" bIns="182950" anchor="t" anchorCtr="0">
             <a:noAutofit/>
           </a:bodyPr>
           <a:lstStyle>
-            <a:lvl1pPr lvl="0" marR="0" rtl="0" algn="ctr">
+            <a:lvl1pPr marR="0" lvl="0" algn="ctr" rtl="0">
               <a:spcBef>
                 <a:spcPts val="0"/>
               </a:spcBef>
@@ -2018,7 +2073,7 @@
               <a:buSzPts val="19600"/>
               <a:buFont typeface="Malgun Gothic"/>
               <a:buNone/>
-              <a:defRPr b="0" i="0" sz="19600" u="none" cap="none" strike="noStrike">
+              <a:defRPr sz="19600" b="0" i="0" u="none" strike="noStrike" cap="none">
                 <a:solidFill>
                   <a:schemeClr val="dk1"/>
                 </a:solidFill>
@@ -2117,15 +2172,19 @@
               <a:defRPr sz="1800"/>
             </a:lvl9pPr>
           </a:lstStyle>
-          <a:p/>
+          <a:p>
+            <a:endParaRPr/>
+          </a:p>
         </p:txBody>
       </p:sp>
       <p:sp>
         <p:nvSpPr>
           <p:cNvPr id="19" name="Google Shape;19;p5"/>
-          <p:cNvSpPr txBox="1"/>
+          <p:cNvSpPr txBox="1">
+            <a:spLocks noGrp="1"/>
+          </p:cNvSpPr>
           <p:nvPr>
-            <p:ph idx="10" type="dt"/>
+            <p:ph type="dt" idx="10"/>
           </p:nvPr>
         </p:nvSpPr>
         <p:spPr>
@@ -2142,11 +2201,11 @@
           </a:ln>
         </p:spPr>
         <p:txBody>
-          <a:bodyPr anchorCtr="0" anchor="t" bIns="182950" lIns="365925" spcFirstLastPara="1" rIns="365925" wrap="square" tIns="182950">
+          <a:bodyPr spcFirstLastPara="1" wrap="square" lIns="365925" tIns="182950" rIns="365925" bIns="182950" anchor="t" anchorCtr="0">
             <a:noAutofit/>
           </a:bodyPr>
           <a:lstStyle>
-            <a:lvl1pPr lvl="0" marR="0" rtl="0" algn="l">
+            <a:lvl1pPr marR="0" lvl="0" algn="l" rtl="0">
               <a:spcBef>
                 <a:spcPts val="0"/>
               </a:spcBef>
@@ -2165,7 +2224,7 @@
                 <a:sym typeface="Malgun Gothic"/>
               </a:defRPr>
             </a:lvl1pPr>
-            <a:lvl2pPr lvl="1" marR="0" rtl="0" algn="l">
+            <a:lvl2pPr marR="0" lvl="1" algn="l" rtl="0">
               <a:spcBef>
                 <a:spcPts val="0"/>
               </a:spcBef>
@@ -2174,7 +2233,7 @@
               </a:spcAft>
               <a:buSzPts val="1400"/>
               <a:buNone/>
-              <a:defRPr b="0" i="0" sz="7400" u="none" cap="none" strike="noStrike">
+              <a:defRPr sz="7400" b="0" i="0" u="none" strike="noStrike" cap="none">
                 <a:solidFill>
                   <a:schemeClr val="dk1"/>
                 </a:solidFill>
@@ -2184,7 +2243,7 @@
                 <a:sym typeface="Malgun Gothic"/>
               </a:defRPr>
             </a:lvl2pPr>
-            <a:lvl3pPr lvl="2" marR="0" rtl="0" algn="l">
+            <a:lvl3pPr marR="0" lvl="2" algn="l" rtl="0">
               <a:spcBef>
                 <a:spcPts val="0"/>
               </a:spcBef>
@@ -2193,7 +2252,7 @@
               </a:spcAft>
               <a:buSzPts val="1400"/>
               <a:buNone/>
-              <a:defRPr b="0" i="0" sz="7400" u="none" cap="none" strike="noStrike">
+              <a:defRPr sz="7400" b="0" i="0" u="none" strike="noStrike" cap="none">
                 <a:solidFill>
                   <a:schemeClr val="dk1"/>
                 </a:solidFill>
@@ -2203,7 +2262,7 @@
                 <a:sym typeface="Malgun Gothic"/>
               </a:defRPr>
             </a:lvl3pPr>
-            <a:lvl4pPr lvl="3" marR="0" rtl="0" algn="l">
+            <a:lvl4pPr marR="0" lvl="3" algn="l" rtl="0">
               <a:spcBef>
                 <a:spcPts val="0"/>
               </a:spcBef>
@@ -2212,7 +2271,7 @@
               </a:spcAft>
               <a:buSzPts val="1400"/>
               <a:buNone/>
-              <a:defRPr b="0" i="0" sz="7400" u="none" cap="none" strike="noStrike">
+              <a:defRPr sz="7400" b="0" i="0" u="none" strike="noStrike" cap="none">
                 <a:solidFill>
                   <a:schemeClr val="dk1"/>
                 </a:solidFill>
@@ -2222,7 +2281,7 @@
                 <a:sym typeface="Malgun Gothic"/>
               </a:defRPr>
             </a:lvl4pPr>
-            <a:lvl5pPr lvl="4" marR="0" rtl="0" algn="l">
+            <a:lvl5pPr marR="0" lvl="4" algn="l" rtl="0">
               <a:spcBef>
                 <a:spcPts val="0"/>
               </a:spcBef>
@@ -2231,7 +2290,7 @@
               </a:spcAft>
               <a:buSzPts val="1400"/>
               <a:buNone/>
-              <a:defRPr b="0" i="0" sz="7400" u="none" cap="none" strike="noStrike">
+              <a:defRPr sz="7400" b="0" i="0" u="none" strike="noStrike" cap="none">
                 <a:solidFill>
                   <a:schemeClr val="dk1"/>
                 </a:solidFill>
@@ -2241,7 +2300,7 @@
                 <a:sym typeface="Malgun Gothic"/>
               </a:defRPr>
             </a:lvl5pPr>
-            <a:lvl6pPr lvl="5" marR="0" rtl="0" algn="l">
+            <a:lvl6pPr marR="0" lvl="5" algn="l" rtl="0">
               <a:spcBef>
                 <a:spcPts val="0"/>
               </a:spcBef>
@@ -2250,7 +2309,7 @@
               </a:spcAft>
               <a:buSzPts val="1400"/>
               <a:buNone/>
-              <a:defRPr b="0" i="0" sz="7400" u="none" cap="none" strike="noStrike">
+              <a:defRPr sz="7400" b="0" i="0" u="none" strike="noStrike" cap="none">
                 <a:solidFill>
                   <a:schemeClr val="dk1"/>
                 </a:solidFill>
@@ -2260,7 +2319,7 @@
                 <a:sym typeface="Malgun Gothic"/>
               </a:defRPr>
             </a:lvl6pPr>
-            <a:lvl7pPr lvl="6" marR="0" rtl="0" algn="l">
+            <a:lvl7pPr marR="0" lvl="6" algn="l" rtl="0">
               <a:spcBef>
                 <a:spcPts val="0"/>
               </a:spcBef>
@@ -2269,7 +2328,7 @@
               </a:spcAft>
               <a:buSzPts val="1400"/>
               <a:buNone/>
-              <a:defRPr b="0" i="0" sz="7400" u="none" cap="none" strike="noStrike">
+              <a:defRPr sz="7400" b="0" i="0" u="none" strike="noStrike" cap="none">
                 <a:solidFill>
                   <a:schemeClr val="dk1"/>
                 </a:solidFill>
@@ -2279,7 +2338,7 @@
                 <a:sym typeface="Malgun Gothic"/>
               </a:defRPr>
             </a:lvl7pPr>
-            <a:lvl8pPr lvl="7" marR="0" rtl="0" algn="l">
+            <a:lvl8pPr marR="0" lvl="7" algn="l" rtl="0">
               <a:spcBef>
                 <a:spcPts val="0"/>
               </a:spcBef>
@@ -2288,7 +2347,7 @@
               </a:spcAft>
               <a:buSzPts val="1400"/>
               <a:buNone/>
-              <a:defRPr b="0" i="0" sz="7400" u="none" cap="none" strike="noStrike">
+              <a:defRPr sz="7400" b="0" i="0" u="none" strike="noStrike" cap="none">
                 <a:solidFill>
                   <a:schemeClr val="dk1"/>
                 </a:solidFill>
@@ -2298,7 +2357,7 @@
                 <a:sym typeface="Malgun Gothic"/>
               </a:defRPr>
             </a:lvl8pPr>
-            <a:lvl9pPr lvl="8" marR="0" rtl="0" algn="l">
+            <a:lvl9pPr marR="0" lvl="8" algn="l" rtl="0">
               <a:spcBef>
                 <a:spcPts val="0"/>
               </a:spcBef>
@@ -2307,7 +2366,7 @@
               </a:spcAft>
               <a:buSzPts val="1400"/>
               <a:buNone/>
-              <a:defRPr b="0" i="0" sz="7400" u="none" cap="none" strike="noStrike">
+              <a:defRPr sz="7400" b="0" i="0" u="none" strike="noStrike" cap="none">
                 <a:solidFill>
                   <a:schemeClr val="dk1"/>
                 </a:solidFill>
@@ -2318,15 +2377,19 @@
               </a:defRPr>
             </a:lvl9pPr>
           </a:lstStyle>
-          <a:p/>
+          <a:p>
+            <a:endParaRPr/>
+          </a:p>
         </p:txBody>
       </p:sp>
       <p:sp>
         <p:nvSpPr>
           <p:cNvPr id="20" name="Google Shape;20;p5"/>
-          <p:cNvSpPr txBox="1"/>
+          <p:cNvSpPr txBox="1">
+            <a:spLocks noGrp="1"/>
+          </p:cNvSpPr>
           <p:nvPr>
-            <p:ph idx="11" type="ftr"/>
+            <p:ph type="ftr" idx="11"/>
           </p:nvPr>
         </p:nvSpPr>
         <p:spPr>
@@ -2343,11 +2406,11 @@
           </a:ln>
         </p:spPr>
         <p:txBody>
-          <a:bodyPr anchorCtr="0" anchor="t" bIns="182950" lIns="365925" spcFirstLastPara="1" rIns="365925" wrap="square" tIns="182950">
+          <a:bodyPr spcFirstLastPara="1" wrap="square" lIns="365925" tIns="182950" rIns="365925" bIns="182950" anchor="t" anchorCtr="0">
             <a:noAutofit/>
           </a:bodyPr>
           <a:lstStyle>
-            <a:lvl1pPr lvl="0" marR="0" rtl="0" algn="l">
+            <a:lvl1pPr marR="0" lvl="0" algn="l" rtl="0">
               <a:spcBef>
                 <a:spcPts val="0"/>
               </a:spcBef>
@@ -2366,7 +2429,7 @@
                 <a:sym typeface="Malgun Gothic"/>
               </a:defRPr>
             </a:lvl1pPr>
-            <a:lvl2pPr lvl="1" marR="0" rtl="0" algn="l">
+            <a:lvl2pPr marR="0" lvl="1" algn="l" rtl="0">
               <a:spcBef>
                 <a:spcPts val="0"/>
               </a:spcBef>
@@ -2375,7 +2438,7 @@
               </a:spcAft>
               <a:buSzPts val="1400"/>
               <a:buNone/>
-              <a:defRPr b="0" i="0" sz="7400" u="none" cap="none" strike="noStrike">
+              <a:defRPr sz="7400" b="0" i="0" u="none" strike="noStrike" cap="none">
                 <a:solidFill>
                   <a:schemeClr val="dk1"/>
                 </a:solidFill>
@@ -2385,7 +2448,7 @@
                 <a:sym typeface="Malgun Gothic"/>
               </a:defRPr>
             </a:lvl2pPr>
-            <a:lvl3pPr lvl="2" marR="0" rtl="0" algn="l">
+            <a:lvl3pPr marR="0" lvl="2" algn="l" rtl="0">
               <a:spcBef>
                 <a:spcPts val="0"/>
               </a:spcBef>
@@ -2394,7 +2457,7 @@
               </a:spcAft>
               <a:buSzPts val="1400"/>
               <a:buNone/>
-              <a:defRPr b="0" i="0" sz="7400" u="none" cap="none" strike="noStrike">
+              <a:defRPr sz="7400" b="0" i="0" u="none" strike="noStrike" cap="none">
                 <a:solidFill>
                   <a:schemeClr val="dk1"/>
                 </a:solidFill>
@@ -2404,7 +2467,7 @@
                 <a:sym typeface="Malgun Gothic"/>
               </a:defRPr>
             </a:lvl3pPr>
-            <a:lvl4pPr lvl="3" marR="0" rtl="0" algn="l">
+            <a:lvl4pPr marR="0" lvl="3" algn="l" rtl="0">
               <a:spcBef>
                 <a:spcPts val="0"/>
               </a:spcBef>
@@ -2413,7 +2476,7 @@
               </a:spcAft>
               <a:buSzPts val="1400"/>
               <a:buNone/>
-              <a:defRPr b="0" i="0" sz="7400" u="none" cap="none" strike="noStrike">
+              <a:defRPr sz="7400" b="0" i="0" u="none" strike="noStrike" cap="none">
                 <a:solidFill>
                   <a:schemeClr val="dk1"/>
                 </a:solidFill>
@@ -2423,7 +2486,7 @@
                 <a:sym typeface="Malgun Gothic"/>
               </a:defRPr>
             </a:lvl4pPr>
-            <a:lvl5pPr lvl="4" marR="0" rtl="0" algn="l">
+            <a:lvl5pPr marR="0" lvl="4" algn="l" rtl="0">
               <a:spcBef>
                 <a:spcPts val="0"/>
               </a:spcBef>
@@ -2432,7 +2495,7 @@
               </a:spcAft>
               <a:buSzPts val="1400"/>
               <a:buNone/>
-              <a:defRPr b="0" i="0" sz="7400" u="none" cap="none" strike="noStrike">
+              <a:defRPr sz="7400" b="0" i="0" u="none" strike="noStrike" cap="none">
                 <a:solidFill>
                   <a:schemeClr val="dk1"/>
                 </a:solidFill>
@@ -2442,7 +2505,7 @@
                 <a:sym typeface="Malgun Gothic"/>
               </a:defRPr>
             </a:lvl5pPr>
-            <a:lvl6pPr lvl="5" marR="0" rtl="0" algn="l">
+            <a:lvl6pPr marR="0" lvl="5" algn="l" rtl="0">
               <a:spcBef>
                 <a:spcPts val="0"/>
               </a:spcBef>
@@ -2451,7 +2514,7 @@
               </a:spcAft>
               <a:buSzPts val="1400"/>
               <a:buNone/>
-              <a:defRPr b="0" i="0" sz="7400" u="none" cap="none" strike="noStrike">
+              <a:defRPr sz="7400" b="0" i="0" u="none" strike="noStrike" cap="none">
                 <a:solidFill>
                   <a:schemeClr val="dk1"/>
                 </a:solidFill>
@@ -2461,7 +2524,7 @@
                 <a:sym typeface="Malgun Gothic"/>
               </a:defRPr>
             </a:lvl6pPr>
-            <a:lvl7pPr lvl="6" marR="0" rtl="0" algn="l">
+            <a:lvl7pPr marR="0" lvl="6" algn="l" rtl="0">
               <a:spcBef>
                 <a:spcPts val="0"/>
               </a:spcBef>
@@ -2470,7 +2533,7 @@
               </a:spcAft>
               <a:buSzPts val="1400"/>
               <a:buNone/>
-              <a:defRPr b="0" i="0" sz="7400" u="none" cap="none" strike="noStrike">
+              <a:defRPr sz="7400" b="0" i="0" u="none" strike="noStrike" cap="none">
                 <a:solidFill>
                   <a:schemeClr val="dk1"/>
                 </a:solidFill>
@@ -2480,7 +2543,7 @@
                 <a:sym typeface="Malgun Gothic"/>
               </a:defRPr>
             </a:lvl7pPr>
-            <a:lvl8pPr lvl="7" marR="0" rtl="0" algn="l">
+            <a:lvl8pPr marR="0" lvl="7" algn="l" rtl="0">
               <a:spcBef>
                 <a:spcPts val="0"/>
               </a:spcBef>
@@ -2489,7 +2552,7 @@
               </a:spcAft>
               <a:buSzPts val="1400"/>
               <a:buNone/>
-              <a:defRPr b="0" i="0" sz="7400" u="none" cap="none" strike="noStrike">
+              <a:defRPr sz="7400" b="0" i="0" u="none" strike="noStrike" cap="none">
                 <a:solidFill>
                   <a:schemeClr val="dk1"/>
                 </a:solidFill>
@@ -2499,7 +2562,7 @@
                 <a:sym typeface="Malgun Gothic"/>
               </a:defRPr>
             </a:lvl8pPr>
-            <a:lvl9pPr lvl="8" marR="0" rtl="0" algn="l">
+            <a:lvl9pPr marR="0" lvl="8" algn="l" rtl="0">
               <a:spcBef>
                 <a:spcPts val="0"/>
               </a:spcBef>
@@ -2508,7 +2571,7 @@
               </a:spcAft>
               <a:buSzPts val="1400"/>
               <a:buNone/>
-              <a:defRPr b="0" i="0" sz="7400" u="none" cap="none" strike="noStrike">
+              <a:defRPr sz="7400" b="0" i="0" u="none" strike="noStrike" cap="none">
                 <a:solidFill>
                   <a:schemeClr val="dk1"/>
                 </a:solidFill>
@@ -2519,15 +2582,19 @@
               </a:defRPr>
             </a:lvl9pPr>
           </a:lstStyle>
-          <a:p/>
+          <a:p>
+            <a:endParaRPr/>
+          </a:p>
         </p:txBody>
       </p:sp>
       <p:sp>
         <p:nvSpPr>
           <p:cNvPr id="21" name="Google Shape;21;p5"/>
-          <p:cNvSpPr txBox="1"/>
+          <p:cNvSpPr txBox="1">
+            <a:spLocks noGrp="1"/>
+          </p:cNvSpPr>
           <p:nvPr>
-            <p:ph idx="12" type="sldNum"/>
+            <p:ph type="sldNum" idx="12"/>
           </p:nvPr>
         </p:nvSpPr>
         <p:spPr>
@@ -2544,11 +2611,11 @@
           </a:ln>
         </p:spPr>
         <p:txBody>
-          <a:bodyPr anchorCtr="0" anchor="t" bIns="182950" lIns="365925" spcFirstLastPara="1" rIns="365925" wrap="square" tIns="182950">
+          <a:bodyPr spcFirstLastPara="1" wrap="square" lIns="365925" tIns="182950" rIns="365925" bIns="182950" anchor="t" anchorCtr="0">
             <a:noAutofit/>
           </a:bodyPr>
           <a:lstStyle>
-            <a:lvl1pPr indent="0" lvl="0" marL="0" marR="0" rtl="0" algn="l">
+            <a:lvl1pPr marL="0" marR="0" lvl="0" indent="0" algn="l" rtl="0">
               <a:spcBef>
                 <a:spcPts val="0"/>
               </a:spcBef>
@@ -2563,7 +2630,7 @@
                 <a:sym typeface="Malgun Gothic"/>
               </a:defRPr>
             </a:lvl1pPr>
-            <a:lvl2pPr indent="0" lvl="1" marL="0" marR="0" rtl="0" algn="l">
+            <a:lvl2pPr marL="0" marR="0" lvl="1" indent="0" algn="l" rtl="0">
               <a:spcBef>
                 <a:spcPts val="0"/>
               </a:spcBef>
@@ -2578,7 +2645,7 @@
                 <a:sym typeface="Malgun Gothic"/>
               </a:defRPr>
             </a:lvl2pPr>
-            <a:lvl3pPr indent="0" lvl="2" marL="0" marR="0" rtl="0" algn="l">
+            <a:lvl3pPr marL="0" marR="0" lvl="2" indent="0" algn="l" rtl="0">
               <a:spcBef>
                 <a:spcPts val="0"/>
               </a:spcBef>
@@ -2593,7 +2660,7 @@
                 <a:sym typeface="Malgun Gothic"/>
               </a:defRPr>
             </a:lvl3pPr>
-            <a:lvl4pPr indent="0" lvl="3" marL="0" marR="0" rtl="0" algn="l">
+            <a:lvl4pPr marL="0" marR="0" lvl="3" indent="0" algn="l" rtl="0">
               <a:spcBef>
                 <a:spcPts val="0"/>
               </a:spcBef>
@@ -2608,7 +2675,7 @@
                 <a:sym typeface="Malgun Gothic"/>
               </a:defRPr>
             </a:lvl4pPr>
-            <a:lvl5pPr indent="0" lvl="4" marL="0" marR="0" rtl="0" algn="l">
+            <a:lvl5pPr marL="0" marR="0" lvl="4" indent="0" algn="l" rtl="0">
               <a:spcBef>
                 <a:spcPts val="0"/>
               </a:spcBef>
@@ -2623,7 +2690,7 @@
                 <a:sym typeface="Malgun Gothic"/>
               </a:defRPr>
             </a:lvl5pPr>
-            <a:lvl6pPr indent="0" lvl="5" marL="0" marR="0" rtl="0" algn="l">
+            <a:lvl6pPr marL="0" marR="0" lvl="5" indent="0" algn="l" rtl="0">
               <a:spcBef>
                 <a:spcPts val="0"/>
               </a:spcBef>
@@ -2638,7 +2705,7 @@
                 <a:sym typeface="Malgun Gothic"/>
               </a:defRPr>
             </a:lvl6pPr>
-            <a:lvl7pPr indent="0" lvl="6" marL="0" marR="0" rtl="0" algn="l">
+            <a:lvl7pPr marL="0" marR="0" lvl="6" indent="0" algn="l" rtl="0">
               <a:spcBef>
                 <a:spcPts val="0"/>
               </a:spcBef>
@@ -2653,7 +2720,7 @@
                 <a:sym typeface="Malgun Gothic"/>
               </a:defRPr>
             </a:lvl7pPr>
-            <a:lvl8pPr indent="0" lvl="7" marL="0" marR="0" rtl="0" algn="l">
+            <a:lvl8pPr marL="0" marR="0" lvl="7" indent="0" algn="l" rtl="0">
               <a:spcBef>
                 <a:spcPts val="0"/>
               </a:spcBef>
@@ -2668,7 +2735,7 @@
                 <a:sym typeface="Malgun Gothic"/>
               </a:defRPr>
             </a:lvl8pPr>
-            <a:lvl9pPr indent="0" lvl="8" marL="0" marR="0" rtl="0" algn="l">
+            <a:lvl9pPr marL="0" marR="0" lvl="8" indent="0" algn="l" rtl="0">
               <a:spcBef>
                 <a:spcPts val="0"/>
               </a:spcBef>
@@ -2685,7 +2752,7 @@
             </a:lvl9pPr>
           </a:lstStyle>
           <a:p>
-            <a:pPr indent="0" lvl="0" marL="0" rtl="0" algn="l">
+            <a:pPr marL="0" lvl="0" indent="0" algn="l" rtl="0">
               <a:spcBef>
                 <a:spcPts val="0"/>
               </a:spcBef>
@@ -2711,11 +2778,11 @@
 </file>
 
 <file path=ppt/slideLayouts/slideLayout4.xml><?xml version="1.0" encoding="utf-8"?>
-<p:sldLayout xmlns:a="http://schemas.openxmlformats.org/drawingml/2006/main" xmlns:r="http://schemas.openxmlformats.org/officeDocument/2006/relationships" xmlns:mc="http://schemas.openxmlformats.org/markup-compatibility/2006" xmlns:mv="urn:schemas-microsoft-com:mac:vml" xmlns:p="http://schemas.openxmlformats.org/presentationml/2006/main" xmlns:c="http://schemas.openxmlformats.org/drawingml/2006/chart" xmlns:dgm="http://schemas.openxmlformats.org/drawingml/2006/diagram" xmlns:o="urn:schemas-microsoft-com:office:office" xmlns:v="urn:schemas-microsoft-com:vml" xmlns:pvml="urn:schemas-microsoft-com:office:powerpoint" xmlns:com="http://schemas.openxmlformats.org/drawingml/2006/compatibility" xmlns:p14="http://schemas.microsoft.com/office/powerpoint/2010/main" xmlns:p15="http://schemas.microsoft.com/office/powerpoint/2012/main" xmlns:ahyp="http://schemas.microsoft.com/office/drawing/2018/hyperlinkcolor" matchingName="빈 화면" type="blank">
+<p:sldLayout xmlns:a="http://schemas.openxmlformats.org/drawingml/2006/main" xmlns:r="http://schemas.openxmlformats.org/officeDocument/2006/relationships" xmlns:p="http://schemas.openxmlformats.org/presentationml/2006/main" matchingName="빈 화면" type="blank">
   <p:cSld name="BLANK">
     <p:spTree>
       <p:nvGrpSpPr>
-        <p:cNvPr id="22" name="Shape 22"/>
+        <p:cNvPr id="1" name="Shape 22"/>
         <p:cNvGrpSpPr/>
         <p:nvPr/>
       </p:nvGrpSpPr>
@@ -2730,9 +2797,11 @@
       <p:sp>
         <p:nvSpPr>
           <p:cNvPr id="23" name="Google Shape;23;p6"/>
-          <p:cNvSpPr txBox="1"/>
+          <p:cNvSpPr txBox="1">
+            <a:spLocks noGrp="1"/>
+          </p:cNvSpPr>
           <p:nvPr>
-            <p:ph idx="10" type="dt"/>
+            <p:ph type="dt" idx="10"/>
           </p:nvPr>
         </p:nvSpPr>
         <p:spPr>
@@ -2749,11 +2818,11 @@
           </a:ln>
         </p:spPr>
         <p:txBody>
-          <a:bodyPr anchorCtr="0" anchor="t" bIns="182950" lIns="365925" spcFirstLastPara="1" rIns="365925" wrap="square" tIns="182950">
+          <a:bodyPr spcFirstLastPara="1" wrap="square" lIns="365925" tIns="182950" rIns="365925" bIns="182950" anchor="t" anchorCtr="0">
             <a:noAutofit/>
           </a:bodyPr>
           <a:lstStyle>
-            <a:lvl1pPr lvl="0" marR="0" rtl="0" algn="l">
+            <a:lvl1pPr marR="0" lvl="0" algn="l" rtl="0">
               <a:spcBef>
                 <a:spcPts val="0"/>
               </a:spcBef>
@@ -2772,7 +2841,7 @@
                 <a:sym typeface="Malgun Gothic"/>
               </a:defRPr>
             </a:lvl1pPr>
-            <a:lvl2pPr lvl="1" marR="0" rtl="0" algn="l">
+            <a:lvl2pPr marR="0" lvl="1" algn="l" rtl="0">
               <a:spcBef>
                 <a:spcPts val="0"/>
               </a:spcBef>
@@ -2781,7 +2850,7 @@
               </a:spcAft>
               <a:buSzPts val="1400"/>
               <a:buNone/>
-              <a:defRPr b="0" i="0" sz="7400" u="none" cap="none" strike="noStrike">
+              <a:defRPr sz="7400" b="0" i="0" u="none" strike="noStrike" cap="none">
                 <a:solidFill>
                   <a:schemeClr val="dk1"/>
                 </a:solidFill>
@@ -2791,7 +2860,7 @@
                 <a:sym typeface="Malgun Gothic"/>
               </a:defRPr>
             </a:lvl2pPr>
-            <a:lvl3pPr lvl="2" marR="0" rtl="0" algn="l">
+            <a:lvl3pPr marR="0" lvl="2" algn="l" rtl="0">
               <a:spcBef>
                 <a:spcPts val="0"/>
               </a:spcBef>
@@ -2800,7 +2869,7 @@
               </a:spcAft>
               <a:buSzPts val="1400"/>
               <a:buNone/>
-              <a:defRPr b="0" i="0" sz="7400" u="none" cap="none" strike="noStrike">
+              <a:defRPr sz="7400" b="0" i="0" u="none" strike="noStrike" cap="none">
                 <a:solidFill>
                   <a:schemeClr val="dk1"/>
                 </a:solidFill>
@@ -2810,7 +2879,7 @@
                 <a:sym typeface="Malgun Gothic"/>
               </a:defRPr>
             </a:lvl3pPr>
-            <a:lvl4pPr lvl="3" marR="0" rtl="0" algn="l">
+            <a:lvl4pPr marR="0" lvl="3" algn="l" rtl="0">
               <a:spcBef>
                 <a:spcPts val="0"/>
               </a:spcBef>
@@ -2819,7 +2888,7 @@
               </a:spcAft>
               <a:buSzPts val="1400"/>
               <a:buNone/>
-              <a:defRPr b="0" i="0" sz="7400" u="none" cap="none" strike="noStrike">
+              <a:defRPr sz="7400" b="0" i="0" u="none" strike="noStrike" cap="none">
                 <a:solidFill>
                   <a:schemeClr val="dk1"/>
                 </a:solidFill>
@@ -2829,7 +2898,7 @@
                 <a:sym typeface="Malgun Gothic"/>
               </a:defRPr>
             </a:lvl4pPr>
-            <a:lvl5pPr lvl="4" marR="0" rtl="0" algn="l">
+            <a:lvl5pPr marR="0" lvl="4" algn="l" rtl="0">
               <a:spcBef>
                 <a:spcPts val="0"/>
               </a:spcBef>
@@ -2838,7 +2907,7 @@
               </a:spcAft>
               <a:buSzPts val="1400"/>
               <a:buNone/>
-              <a:defRPr b="0" i="0" sz="7400" u="none" cap="none" strike="noStrike">
+              <a:defRPr sz="7400" b="0" i="0" u="none" strike="noStrike" cap="none">
                 <a:solidFill>
                   <a:schemeClr val="dk1"/>
                 </a:solidFill>
@@ -2848,7 +2917,7 @@
                 <a:sym typeface="Malgun Gothic"/>
               </a:defRPr>
             </a:lvl5pPr>
-            <a:lvl6pPr lvl="5" marR="0" rtl="0" algn="l">
+            <a:lvl6pPr marR="0" lvl="5" algn="l" rtl="0">
               <a:spcBef>
                 <a:spcPts val="0"/>
               </a:spcBef>
@@ -2857,7 +2926,7 @@
               </a:spcAft>
               <a:buSzPts val="1400"/>
               <a:buNone/>
-              <a:defRPr b="0" i="0" sz="7400" u="none" cap="none" strike="noStrike">
+              <a:defRPr sz="7400" b="0" i="0" u="none" strike="noStrike" cap="none">
                 <a:solidFill>
                   <a:schemeClr val="dk1"/>
                 </a:solidFill>
@@ -2867,7 +2936,7 @@
                 <a:sym typeface="Malgun Gothic"/>
               </a:defRPr>
             </a:lvl6pPr>
-            <a:lvl7pPr lvl="6" marR="0" rtl="0" algn="l">
+            <a:lvl7pPr marR="0" lvl="6" algn="l" rtl="0">
               <a:spcBef>
                 <a:spcPts val="0"/>
               </a:spcBef>
@@ -2876,7 +2945,7 @@
               </a:spcAft>
               <a:buSzPts val="1400"/>
               <a:buNone/>
-              <a:defRPr b="0" i="0" sz="7400" u="none" cap="none" strike="noStrike">
+              <a:defRPr sz="7400" b="0" i="0" u="none" strike="noStrike" cap="none">
                 <a:solidFill>
                   <a:schemeClr val="dk1"/>
                 </a:solidFill>
@@ -2886,7 +2955,7 @@
                 <a:sym typeface="Malgun Gothic"/>
               </a:defRPr>
             </a:lvl7pPr>
-            <a:lvl8pPr lvl="7" marR="0" rtl="0" algn="l">
+            <a:lvl8pPr marR="0" lvl="7" algn="l" rtl="0">
               <a:spcBef>
                 <a:spcPts val="0"/>
               </a:spcBef>
@@ -2895,7 +2964,7 @@
               </a:spcAft>
               <a:buSzPts val="1400"/>
               <a:buNone/>
-              <a:defRPr b="0" i="0" sz="7400" u="none" cap="none" strike="noStrike">
+              <a:defRPr sz="7400" b="0" i="0" u="none" strike="noStrike" cap="none">
                 <a:solidFill>
                   <a:schemeClr val="dk1"/>
                 </a:solidFill>
@@ -2905,7 +2974,7 @@
                 <a:sym typeface="Malgun Gothic"/>
               </a:defRPr>
             </a:lvl8pPr>
-            <a:lvl9pPr lvl="8" marR="0" rtl="0" algn="l">
+            <a:lvl9pPr marR="0" lvl="8" algn="l" rtl="0">
               <a:spcBef>
                 <a:spcPts val="0"/>
               </a:spcBef>
@@ -2914,7 +2983,7 @@
               </a:spcAft>
               <a:buSzPts val="1400"/>
               <a:buNone/>
-              <a:defRPr b="0" i="0" sz="7400" u="none" cap="none" strike="noStrike">
+              <a:defRPr sz="7400" b="0" i="0" u="none" strike="noStrike" cap="none">
                 <a:solidFill>
                   <a:schemeClr val="dk1"/>
                 </a:solidFill>
@@ -2925,15 +2994,19 @@
               </a:defRPr>
             </a:lvl9pPr>
           </a:lstStyle>
-          <a:p/>
+          <a:p>
+            <a:endParaRPr/>
+          </a:p>
         </p:txBody>
       </p:sp>
       <p:sp>
         <p:nvSpPr>
           <p:cNvPr id="24" name="Google Shape;24;p6"/>
-          <p:cNvSpPr txBox="1"/>
+          <p:cNvSpPr txBox="1">
+            <a:spLocks noGrp="1"/>
+          </p:cNvSpPr>
           <p:nvPr>
-            <p:ph idx="11" type="ftr"/>
+            <p:ph type="ftr" idx="11"/>
           </p:nvPr>
         </p:nvSpPr>
         <p:spPr>
@@ -2950,11 +3023,11 @@
           </a:ln>
         </p:spPr>
         <p:txBody>
-          <a:bodyPr anchorCtr="0" anchor="t" bIns="182950" lIns="365925" spcFirstLastPara="1" rIns="365925" wrap="square" tIns="182950">
+          <a:bodyPr spcFirstLastPara="1" wrap="square" lIns="365925" tIns="182950" rIns="365925" bIns="182950" anchor="t" anchorCtr="0">
             <a:noAutofit/>
           </a:bodyPr>
           <a:lstStyle>
-            <a:lvl1pPr lvl="0" marR="0" rtl="0" algn="l">
+            <a:lvl1pPr marR="0" lvl="0" algn="l" rtl="0">
               <a:spcBef>
                 <a:spcPts val="0"/>
               </a:spcBef>
@@ -2973,7 +3046,7 @@
                 <a:sym typeface="Malgun Gothic"/>
               </a:defRPr>
             </a:lvl1pPr>
-            <a:lvl2pPr lvl="1" marR="0" rtl="0" algn="l">
+            <a:lvl2pPr marR="0" lvl="1" algn="l" rtl="0">
               <a:spcBef>
                 <a:spcPts val="0"/>
               </a:spcBef>
@@ -2982,7 +3055,7 @@
               </a:spcAft>
               <a:buSzPts val="1400"/>
               <a:buNone/>
-              <a:defRPr b="0" i="0" sz="7400" u="none" cap="none" strike="noStrike">
+              <a:defRPr sz="7400" b="0" i="0" u="none" strike="noStrike" cap="none">
                 <a:solidFill>
                   <a:schemeClr val="dk1"/>
                 </a:solidFill>
@@ -2992,7 +3065,7 @@
                 <a:sym typeface="Malgun Gothic"/>
               </a:defRPr>
             </a:lvl2pPr>
-            <a:lvl3pPr lvl="2" marR="0" rtl="0" algn="l">
+            <a:lvl3pPr marR="0" lvl="2" algn="l" rtl="0">
               <a:spcBef>
                 <a:spcPts val="0"/>
               </a:spcBef>
@@ -3001,7 +3074,7 @@
               </a:spcAft>
               <a:buSzPts val="1400"/>
               <a:buNone/>
-              <a:defRPr b="0" i="0" sz="7400" u="none" cap="none" strike="noStrike">
+              <a:defRPr sz="7400" b="0" i="0" u="none" strike="noStrike" cap="none">
                 <a:solidFill>
                   <a:schemeClr val="dk1"/>
                 </a:solidFill>
@@ -3011,7 +3084,7 @@
                 <a:sym typeface="Malgun Gothic"/>
               </a:defRPr>
             </a:lvl3pPr>
-            <a:lvl4pPr lvl="3" marR="0" rtl="0" algn="l">
+            <a:lvl4pPr marR="0" lvl="3" algn="l" rtl="0">
               <a:spcBef>
                 <a:spcPts val="0"/>
               </a:spcBef>
@@ -3020,7 +3093,7 @@
               </a:spcAft>
               <a:buSzPts val="1400"/>
               <a:buNone/>
-              <a:defRPr b="0" i="0" sz="7400" u="none" cap="none" strike="noStrike">
+              <a:defRPr sz="7400" b="0" i="0" u="none" strike="noStrike" cap="none">
                 <a:solidFill>
                   <a:schemeClr val="dk1"/>
                 </a:solidFill>
@@ -3030,7 +3103,7 @@
                 <a:sym typeface="Malgun Gothic"/>
               </a:defRPr>
             </a:lvl4pPr>
-            <a:lvl5pPr lvl="4" marR="0" rtl="0" algn="l">
+            <a:lvl5pPr marR="0" lvl="4" algn="l" rtl="0">
               <a:spcBef>
                 <a:spcPts val="0"/>
               </a:spcBef>
@@ -3039,7 +3112,7 @@
               </a:spcAft>
               <a:buSzPts val="1400"/>
               <a:buNone/>
-              <a:defRPr b="0" i="0" sz="7400" u="none" cap="none" strike="noStrike">
+              <a:defRPr sz="7400" b="0" i="0" u="none" strike="noStrike" cap="none">
                 <a:solidFill>
                   <a:schemeClr val="dk1"/>
                 </a:solidFill>
@@ -3049,7 +3122,7 @@
                 <a:sym typeface="Malgun Gothic"/>
               </a:defRPr>
             </a:lvl5pPr>
-            <a:lvl6pPr lvl="5" marR="0" rtl="0" algn="l">
+            <a:lvl6pPr marR="0" lvl="5" algn="l" rtl="0">
               <a:spcBef>
                 <a:spcPts val="0"/>
               </a:spcBef>
@@ -3058,7 +3131,7 @@
               </a:spcAft>
               <a:buSzPts val="1400"/>
               <a:buNone/>
-              <a:defRPr b="0" i="0" sz="7400" u="none" cap="none" strike="noStrike">
+              <a:defRPr sz="7400" b="0" i="0" u="none" strike="noStrike" cap="none">
                 <a:solidFill>
                   <a:schemeClr val="dk1"/>
                 </a:solidFill>
@@ -3068,7 +3141,7 @@
                 <a:sym typeface="Malgun Gothic"/>
               </a:defRPr>
             </a:lvl6pPr>
-            <a:lvl7pPr lvl="6" marR="0" rtl="0" algn="l">
+            <a:lvl7pPr marR="0" lvl="6" algn="l" rtl="0">
               <a:spcBef>
                 <a:spcPts val="0"/>
               </a:spcBef>
@@ -3077,7 +3150,7 @@
               </a:spcAft>
               <a:buSzPts val="1400"/>
               <a:buNone/>
-              <a:defRPr b="0" i="0" sz="7400" u="none" cap="none" strike="noStrike">
+              <a:defRPr sz="7400" b="0" i="0" u="none" strike="noStrike" cap="none">
                 <a:solidFill>
                   <a:schemeClr val="dk1"/>
                 </a:solidFill>
@@ -3087,7 +3160,7 @@
                 <a:sym typeface="Malgun Gothic"/>
               </a:defRPr>
             </a:lvl7pPr>
-            <a:lvl8pPr lvl="7" marR="0" rtl="0" algn="l">
+            <a:lvl8pPr marR="0" lvl="7" algn="l" rtl="0">
               <a:spcBef>
                 <a:spcPts val="0"/>
               </a:spcBef>
@@ -3096,7 +3169,7 @@
               </a:spcAft>
               <a:buSzPts val="1400"/>
               <a:buNone/>
-              <a:defRPr b="0" i="0" sz="7400" u="none" cap="none" strike="noStrike">
+              <a:defRPr sz="7400" b="0" i="0" u="none" strike="noStrike" cap="none">
                 <a:solidFill>
                   <a:schemeClr val="dk1"/>
                 </a:solidFill>
@@ -3106,7 +3179,7 @@
                 <a:sym typeface="Malgun Gothic"/>
               </a:defRPr>
             </a:lvl8pPr>
-            <a:lvl9pPr lvl="8" marR="0" rtl="0" algn="l">
+            <a:lvl9pPr marR="0" lvl="8" algn="l" rtl="0">
               <a:spcBef>
                 <a:spcPts val="0"/>
               </a:spcBef>
@@ -3115,7 +3188,7 @@
               </a:spcAft>
               <a:buSzPts val="1400"/>
               <a:buNone/>
-              <a:defRPr b="0" i="0" sz="7400" u="none" cap="none" strike="noStrike">
+              <a:defRPr sz="7400" b="0" i="0" u="none" strike="noStrike" cap="none">
                 <a:solidFill>
                   <a:schemeClr val="dk1"/>
                 </a:solidFill>
@@ -3126,15 +3199,19 @@
               </a:defRPr>
             </a:lvl9pPr>
           </a:lstStyle>
-          <a:p/>
+          <a:p>
+            <a:endParaRPr/>
+          </a:p>
         </p:txBody>
       </p:sp>
       <p:sp>
         <p:nvSpPr>
           <p:cNvPr id="25" name="Google Shape;25;p6"/>
-          <p:cNvSpPr txBox="1"/>
+          <p:cNvSpPr txBox="1">
+            <a:spLocks noGrp="1"/>
+          </p:cNvSpPr>
           <p:nvPr>
-            <p:ph idx="12" type="sldNum"/>
+            <p:ph type="sldNum" idx="12"/>
           </p:nvPr>
         </p:nvSpPr>
         <p:spPr>
@@ -3151,11 +3228,11 @@
           </a:ln>
         </p:spPr>
         <p:txBody>
-          <a:bodyPr anchorCtr="0" anchor="t" bIns="182950" lIns="365925" spcFirstLastPara="1" rIns="365925" wrap="square" tIns="182950">
+          <a:bodyPr spcFirstLastPara="1" wrap="square" lIns="365925" tIns="182950" rIns="365925" bIns="182950" anchor="t" anchorCtr="0">
             <a:noAutofit/>
           </a:bodyPr>
           <a:lstStyle>
-            <a:lvl1pPr indent="0" lvl="0" marL="0" marR="0" rtl="0" algn="l">
+            <a:lvl1pPr marL="0" marR="0" lvl="0" indent="0" algn="l" rtl="0">
               <a:spcBef>
                 <a:spcPts val="0"/>
               </a:spcBef>
@@ -3170,7 +3247,7 @@
                 <a:sym typeface="Malgun Gothic"/>
               </a:defRPr>
             </a:lvl1pPr>
-            <a:lvl2pPr indent="0" lvl="1" marL="0" marR="0" rtl="0" algn="l">
+            <a:lvl2pPr marL="0" marR="0" lvl="1" indent="0" algn="l" rtl="0">
               <a:spcBef>
                 <a:spcPts val="0"/>
               </a:spcBef>
@@ -3185,7 +3262,7 @@
                 <a:sym typeface="Malgun Gothic"/>
               </a:defRPr>
             </a:lvl2pPr>
-            <a:lvl3pPr indent="0" lvl="2" marL="0" marR="0" rtl="0" algn="l">
+            <a:lvl3pPr marL="0" marR="0" lvl="2" indent="0" algn="l" rtl="0">
               <a:spcBef>
                 <a:spcPts val="0"/>
               </a:spcBef>
@@ -3200,7 +3277,7 @@
                 <a:sym typeface="Malgun Gothic"/>
               </a:defRPr>
             </a:lvl3pPr>
-            <a:lvl4pPr indent="0" lvl="3" marL="0" marR="0" rtl="0" algn="l">
+            <a:lvl4pPr marL="0" marR="0" lvl="3" indent="0" algn="l" rtl="0">
               <a:spcBef>
                 <a:spcPts val="0"/>
               </a:spcBef>
@@ -3215,7 +3292,7 @@
                 <a:sym typeface="Malgun Gothic"/>
               </a:defRPr>
             </a:lvl4pPr>
-            <a:lvl5pPr indent="0" lvl="4" marL="0" marR="0" rtl="0" algn="l">
+            <a:lvl5pPr marL="0" marR="0" lvl="4" indent="0" algn="l" rtl="0">
               <a:spcBef>
                 <a:spcPts val="0"/>
               </a:spcBef>
@@ -3230,7 +3307,7 @@
                 <a:sym typeface="Malgun Gothic"/>
               </a:defRPr>
             </a:lvl5pPr>
-            <a:lvl6pPr indent="0" lvl="5" marL="0" marR="0" rtl="0" algn="l">
+            <a:lvl6pPr marL="0" marR="0" lvl="5" indent="0" algn="l" rtl="0">
               <a:spcBef>
                 <a:spcPts val="0"/>
               </a:spcBef>
@@ -3245,7 +3322,7 @@
                 <a:sym typeface="Malgun Gothic"/>
               </a:defRPr>
             </a:lvl6pPr>
-            <a:lvl7pPr indent="0" lvl="6" marL="0" marR="0" rtl="0" algn="l">
+            <a:lvl7pPr marL="0" marR="0" lvl="6" indent="0" algn="l" rtl="0">
               <a:spcBef>
                 <a:spcPts val="0"/>
               </a:spcBef>
@@ -3260,7 +3337,7 @@
                 <a:sym typeface="Malgun Gothic"/>
               </a:defRPr>
             </a:lvl7pPr>
-            <a:lvl8pPr indent="0" lvl="7" marL="0" marR="0" rtl="0" algn="l">
+            <a:lvl8pPr marL="0" marR="0" lvl="7" indent="0" algn="l" rtl="0">
               <a:spcBef>
                 <a:spcPts val="0"/>
               </a:spcBef>
@@ -3275,7 +3352,7 @@
                 <a:sym typeface="Malgun Gothic"/>
               </a:defRPr>
             </a:lvl8pPr>
-            <a:lvl9pPr indent="0" lvl="8" marL="0" marR="0" rtl="0" algn="l">
+            <a:lvl9pPr marL="0" marR="0" lvl="8" indent="0" algn="l" rtl="0">
               <a:spcBef>
                 <a:spcPts val="0"/>
               </a:spcBef>
@@ -3292,7 +3369,7 @@
             </a:lvl9pPr>
           </a:lstStyle>
           <a:p>
-            <a:pPr indent="0" lvl="0" marL="0" rtl="0" algn="l">
+            <a:pPr marL="0" lvl="0" indent="0" algn="l" rtl="0">
               <a:spcBef>
                 <a:spcPts val="0"/>
               </a:spcBef>
@@ -3318,18 +3395,19 @@
 </file>
 
 <file path=ppt/slideMasters/slideMaster1.xml><?xml version="1.0" encoding="utf-8"?>
-<p:sldMaster xmlns:a="http://schemas.openxmlformats.org/drawingml/2006/main" xmlns:r="http://schemas.openxmlformats.org/officeDocument/2006/relationships" xmlns:mc="http://schemas.openxmlformats.org/markup-compatibility/2006" xmlns:mv="urn:schemas-microsoft-com:mac:vml" xmlns:p="http://schemas.openxmlformats.org/presentationml/2006/main" xmlns:c="http://schemas.openxmlformats.org/drawingml/2006/chart" xmlns:dgm="http://schemas.openxmlformats.org/drawingml/2006/diagram" xmlns:o="urn:schemas-microsoft-com:office:office" xmlns:v="urn:schemas-microsoft-com:vml" xmlns:pvml="urn:schemas-microsoft-com:office:powerpoint" xmlns:com="http://schemas.openxmlformats.org/drawingml/2006/compatibility" xmlns:p14="http://schemas.microsoft.com/office/powerpoint/2010/main" xmlns:p15="http://schemas.microsoft.com/office/powerpoint/2012/main" xmlns:ahyp="http://schemas.microsoft.com/office/drawing/2018/hyperlinkcolor">
+<p:sldMaster xmlns:a="http://schemas.openxmlformats.org/drawingml/2006/main" xmlns:r="http://schemas.openxmlformats.org/officeDocument/2006/relationships" xmlns:p="http://schemas.openxmlformats.org/presentationml/2006/main">
   <p:cSld>
     <p:bg>
       <p:bgPr>
         <a:solidFill>
           <a:schemeClr val="lt1"/>
         </a:solidFill>
+        <a:effectLst/>
       </p:bgPr>
     </p:bg>
     <p:spTree>
       <p:nvGrpSpPr>
-        <p:cNvPr id="5" name="Shape 5"/>
+        <p:cNvPr id="1" name="Shape 5"/>
         <p:cNvGrpSpPr/>
         <p:nvPr/>
       </p:nvGrpSpPr>
@@ -3343,17 +3421,17 @@
       </p:grpSpPr>
     </p:spTree>
   </p:cSld>
-  <p:clrMap accent1="accent1" accent2="accent2" accent3="accent3" accent4="accent4" accent5="accent5" accent6="accent6" bg1="lt1" bg2="dk2" tx1="dk1" tx2="lt2" folHlink="folHlink" hlink="hlink"/>
+  <p:clrMap bg1="lt1" tx1="dk1" bg2="dk2" tx2="lt2" accent1="accent1" accent2="accent2" accent3="accent3" accent4="accent4" accent5="accent5" accent6="accent6" hlink="hlink" folHlink="folHlink"/>
   <p:sldLayoutIdLst>
     <p:sldLayoutId id="2147483649" r:id="rId1"/>
     <p:sldLayoutId id="2147483650" r:id="rId2"/>
     <p:sldLayoutId id="2147483651" r:id="rId3"/>
     <p:sldLayoutId id="2147483652" r:id="rId4"/>
   </p:sldLayoutIdLst>
-  <p:hf dt="0" ftr="0" hdr="0" sldNum="0"/>
+  <p:hf sldNum="0" hdr="0" ftr="0" dt="0"/>
   <p:txStyles>
     <p:titleStyle>
-      <a:defPPr lvl="0" marR="0" rtl="0" algn="l">
+      <a:defPPr marR="0" lvl="0" algn="l" rtl="0">
         <a:lnSpc>
           <a:spcPct val="100000"/>
         </a:lnSpc>
@@ -3364,7 +3442,7 @@
           <a:spcPts val="0"/>
         </a:spcAft>
       </a:defPPr>
-      <a:lvl1pPr lvl="0" marR="0" rtl="0" algn="l">
+      <a:lvl1pPr marR="0" lvl="0" algn="l" rtl="0">
         <a:lnSpc>
           <a:spcPct val="100000"/>
         </a:lnSpc>
@@ -3378,7 +3456,7 @@
           <a:srgbClr val="000000"/>
         </a:buClr>
         <a:buFont typeface="Arial"/>
-        <a:defRPr b="0" i="0" sz="1400" u="none" cap="none" strike="noStrike">
+        <a:defRPr sz="1400" b="0" i="0" u="none" strike="noStrike" cap="none">
           <a:solidFill>
             <a:srgbClr val="000000"/>
           </a:solidFill>
@@ -3388,7 +3466,7 @@
           <a:sym typeface="Arial"/>
         </a:defRPr>
       </a:lvl1pPr>
-      <a:lvl2pPr lvl="1" marR="0" rtl="0" algn="l">
+      <a:lvl2pPr marR="0" lvl="1" algn="l" rtl="0">
         <a:lnSpc>
           <a:spcPct val="100000"/>
         </a:lnSpc>
@@ -3402,7 +3480,7 @@
           <a:srgbClr val="000000"/>
         </a:buClr>
         <a:buFont typeface="Arial"/>
-        <a:defRPr b="0" i="0" sz="1400" u="none" cap="none" strike="noStrike">
+        <a:defRPr sz="1400" b="0" i="0" u="none" strike="noStrike" cap="none">
           <a:solidFill>
             <a:srgbClr val="000000"/>
           </a:solidFill>
@@ -3412,7 +3490,7 @@
           <a:sym typeface="Arial"/>
         </a:defRPr>
       </a:lvl2pPr>
-      <a:lvl3pPr lvl="2" marR="0" rtl="0" algn="l">
+      <a:lvl3pPr marR="0" lvl="2" algn="l" rtl="0">
         <a:lnSpc>
           <a:spcPct val="100000"/>
         </a:lnSpc>
@@ -3426,7 +3504,7 @@
           <a:srgbClr val="000000"/>
         </a:buClr>
         <a:buFont typeface="Arial"/>
-        <a:defRPr b="0" i="0" sz="1400" u="none" cap="none" strike="noStrike">
+        <a:defRPr sz="1400" b="0" i="0" u="none" strike="noStrike" cap="none">
           <a:solidFill>
             <a:srgbClr val="000000"/>
           </a:solidFill>
@@ -3436,7 +3514,7 @@
           <a:sym typeface="Arial"/>
         </a:defRPr>
       </a:lvl3pPr>
-      <a:lvl4pPr lvl="3" marR="0" rtl="0" algn="l">
+      <a:lvl4pPr marR="0" lvl="3" algn="l" rtl="0">
         <a:lnSpc>
           <a:spcPct val="100000"/>
         </a:lnSpc>
@@ -3450,7 +3528,7 @@
           <a:srgbClr val="000000"/>
         </a:buClr>
         <a:buFont typeface="Arial"/>
-        <a:defRPr b="0" i="0" sz="1400" u="none" cap="none" strike="noStrike">
+        <a:defRPr sz="1400" b="0" i="0" u="none" strike="noStrike" cap="none">
           <a:solidFill>
             <a:srgbClr val="000000"/>
           </a:solidFill>
@@ -3460,7 +3538,7 @@
           <a:sym typeface="Arial"/>
         </a:defRPr>
       </a:lvl4pPr>
-      <a:lvl5pPr lvl="4" marR="0" rtl="0" algn="l">
+      <a:lvl5pPr marR="0" lvl="4" algn="l" rtl="0">
         <a:lnSpc>
           <a:spcPct val="100000"/>
         </a:lnSpc>
@@ -3474,7 +3552,7 @@
           <a:srgbClr val="000000"/>
         </a:buClr>
         <a:buFont typeface="Arial"/>
-        <a:defRPr b="0" i="0" sz="1400" u="none" cap="none" strike="noStrike">
+        <a:defRPr sz="1400" b="0" i="0" u="none" strike="noStrike" cap="none">
           <a:solidFill>
             <a:srgbClr val="000000"/>
           </a:solidFill>
@@ -3484,7 +3562,7 @@
           <a:sym typeface="Arial"/>
         </a:defRPr>
       </a:lvl5pPr>
-      <a:lvl6pPr lvl="5" marR="0" rtl="0" algn="l">
+      <a:lvl6pPr marR="0" lvl="5" algn="l" rtl="0">
         <a:lnSpc>
           <a:spcPct val="100000"/>
         </a:lnSpc>
@@ -3498,7 +3576,7 @@
           <a:srgbClr val="000000"/>
         </a:buClr>
         <a:buFont typeface="Arial"/>
-        <a:defRPr b="0" i="0" sz="1400" u="none" cap="none" strike="noStrike">
+        <a:defRPr sz="1400" b="0" i="0" u="none" strike="noStrike" cap="none">
           <a:solidFill>
             <a:srgbClr val="000000"/>
           </a:solidFill>
@@ -3508,7 +3586,7 @@
           <a:sym typeface="Arial"/>
         </a:defRPr>
       </a:lvl6pPr>
-      <a:lvl7pPr lvl="6" marR="0" rtl="0" algn="l">
+      <a:lvl7pPr marR="0" lvl="6" algn="l" rtl="0">
         <a:lnSpc>
           <a:spcPct val="100000"/>
         </a:lnSpc>
@@ -3522,7 +3600,7 @@
           <a:srgbClr val="000000"/>
         </a:buClr>
         <a:buFont typeface="Arial"/>
-        <a:defRPr b="0" i="0" sz="1400" u="none" cap="none" strike="noStrike">
+        <a:defRPr sz="1400" b="0" i="0" u="none" strike="noStrike" cap="none">
           <a:solidFill>
             <a:srgbClr val="000000"/>
           </a:solidFill>
@@ -3532,7 +3610,7 @@
           <a:sym typeface="Arial"/>
         </a:defRPr>
       </a:lvl7pPr>
-      <a:lvl8pPr lvl="7" marR="0" rtl="0" algn="l">
+      <a:lvl8pPr marR="0" lvl="7" algn="l" rtl="0">
         <a:lnSpc>
           <a:spcPct val="100000"/>
         </a:lnSpc>
@@ -3546,7 +3624,7 @@
           <a:srgbClr val="000000"/>
         </a:buClr>
         <a:buFont typeface="Arial"/>
-        <a:defRPr b="0" i="0" sz="1400" u="none" cap="none" strike="noStrike">
+        <a:defRPr sz="1400" b="0" i="0" u="none" strike="noStrike" cap="none">
           <a:solidFill>
             <a:srgbClr val="000000"/>
           </a:solidFill>
@@ -3556,7 +3634,7 @@
           <a:sym typeface="Arial"/>
         </a:defRPr>
       </a:lvl8pPr>
-      <a:lvl9pPr lvl="8" marR="0" rtl="0" algn="l">
+      <a:lvl9pPr marR="0" lvl="8" algn="l" rtl="0">
         <a:lnSpc>
           <a:spcPct val="100000"/>
         </a:lnSpc>
@@ -3570,7 +3648,7 @@
           <a:srgbClr val="000000"/>
         </a:buClr>
         <a:buFont typeface="Arial"/>
-        <a:defRPr b="0" i="0" sz="1400" u="none" cap="none" strike="noStrike">
+        <a:defRPr sz="1400" b="0" i="0" u="none" strike="noStrike" cap="none">
           <a:solidFill>
             <a:srgbClr val="000000"/>
           </a:solidFill>
@@ -3582,7 +3660,7 @@
       </a:lvl9pPr>
     </p:titleStyle>
     <p:bodyStyle>
-      <a:defPPr lvl="0" marR="0" rtl="0" algn="l">
+      <a:defPPr marR="0" lvl="0" algn="l" rtl="0">
         <a:lnSpc>
           <a:spcPct val="100000"/>
         </a:lnSpc>
@@ -3593,7 +3671,7 @@
           <a:spcPts val="0"/>
         </a:spcAft>
       </a:defPPr>
-      <a:lvl1pPr lvl="0" marR="0" rtl="0" algn="l">
+      <a:lvl1pPr marR="0" lvl="0" algn="l" rtl="0">
         <a:lnSpc>
           <a:spcPct val="100000"/>
         </a:lnSpc>
@@ -3607,7 +3685,7 @@
           <a:srgbClr val="000000"/>
         </a:buClr>
         <a:buFont typeface="Arial"/>
-        <a:defRPr b="0" i="0" sz="1400" u="none" cap="none" strike="noStrike">
+        <a:defRPr sz="1400" b="0" i="0" u="none" strike="noStrike" cap="none">
           <a:solidFill>
             <a:srgbClr val="000000"/>
           </a:solidFill>
@@ -3617,7 +3695,7 @@
           <a:sym typeface="Arial"/>
         </a:defRPr>
       </a:lvl1pPr>
-      <a:lvl2pPr lvl="1" marR="0" rtl="0" algn="l">
+      <a:lvl2pPr marR="0" lvl="1" algn="l" rtl="0">
         <a:lnSpc>
           <a:spcPct val="100000"/>
         </a:lnSpc>
@@ -3631,7 +3709,7 @@
           <a:srgbClr val="000000"/>
         </a:buClr>
         <a:buFont typeface="Arial"/>
-        <a:defRPr b="0" i="0" sz="1400" u="none" cap="none" strike="noStrike">
+        <a:defRPr sz="1400" b="0" i="0" u="none" strike="noStrike" cap="none">
           <a:solidFill>
             <a:srgbClr val="000000"/>
           </a:solidFill>
@@ -3641,7 +3719,7 @@
           <a:sym typeface="Arial"/>
         </a:defRPr>
       </a:lvl2pPr>
-      <a:lvl3pPr lvl="2" marR="0" rtl="0" algn="l">
+      <a:lvl3pPr marR="0" lvl="2" algn="l" rtl="0">
         <a:lnSpc>
           <a:spcPct val="100000"/>
         </a:lnSpc>
@@ -3655,7 +3733,7 @@
           <a:srgbClr val="000000"/>
         </a:buClr>
         <a:buFont typeface="Arial"/>
-        <a:defRPr b="0" i="0" sz="1400" u="none" cap="none" strike="noStrike">
+        <a:defRPr sz="1400" b="0" i="0" u="none" strike="noStrike" cap="none">
           <a:solidFill>
             <a:srgbClr val="000000"/>
           </a:solidFill>
@@ -3665,7 +3743,7 @@
           <a:sym typeface="Arial"/>
         </a:defRPr>
       </a:lvl3pPr>
-      <a:lvl4pPr lvl="3" marR="0" rtl="0" algn="l">
+      <a:lvl4pPr marR="0" lvl="3" algn="l" rtl="0">
         <a:lnSpc>
           <a:spcPct val="100000"/>
         </a:lnSpc>
@@ -3679,7 +3757,7 @@
           <a:srgbClr val="000000"/>
         </a:buClr>
         <a:buFont typeface="Arial"/>
-        <a:defRPr b="0" i="0" sz="1400" u="none" cap="none" strike="noStrike">
+        <a:defRPr sz="1400" b="0" i="0" u="none" strike="noStrike" cap="none">
           <a:solidFill>
             <a:srgbClr val="000000"/>
           </a:solidFill>
@@ -3689,7 +3767,7 @@
           <a:sym typeface="Arial"/>
         </a:defRPr>
       </a:lvl4pPr>
-      <a:lvl5pPr lvl="4" marR="0" rtl="0" algn="l">
+      <a:lvl5pPr marR="0" lvl="4" algn="l" rtl="0">
         <a:lnSpc>
           <a:spcPct val="100000"/>
         </a:lnSpc>
@@ -3703,7 +3781,7 @@
           <a:srgbClr val="000000"/>
         </a:buClr>
         <a:buFont typeface="Arial"/>
-        <a:defRPr b="0" i="0" sz="1400" u="none" cap="none" strike="noStrike">
+        <a:defRPr sz="1400" b="0" i="0" u="none" strike="noStrike" cap="none">
           <a:solidFill>
             <a:srgbClr val="000000"/>
           </a:solidFill>
@@ -3713,7 +3791,7 @@
           <a:sym typeface="Arial"/>
         </a:defRPr>
       </a:lvl5pPr>
-      <a:lvl6pPr lvl="5" marR="0" rtl="0" algn="l">
+      <a:lvl6pPr marR="0" lvl="5" algn="l" rtl="0">
         <a:lnSpc>
           <a:spcPct val="100000"/>
         </a:lnSpc>
@@ -3727,7 +3805,7 @@
           <a:srgbClr val="000000"/>
         </a:buClr>
         <a:buFont typeface="Arial"/>
-        <a:defRPr b="0" i="0" sz="1400" u="none" cap="none" strike="noStrike">
+        <a:defRPr sz="1400" b="0" i="0" u="none" strike="noStrike" cap="none">
           <a:solidFill>
             <a:srgbClr val="000000"/>
           </a:solidFill>
@@ -3737,7 +3815,7 @@
           <a:sym typeface="Arial"/>
         </a:defRPr>
       </a:lvl6pPr>
-      <a:lvl7pPr lvl="6" marR="0" rtl="0" algn="l">
+      <a:lvl7pPr marR="0" lvl="6" algn="l" rtl="0">
         <a:lnSpc>
           <a:spcPct val="100000"/>
         </a:lnSpc>
@@ -3751,7 +3829,7 @@
           <a:srgbClr val="000000"/>
         </a:buClr>
         <a:buFont typeface="Arial"/>
-        <a:defRPr b="0" i="0" sz="1400" u="none" cap="none" strike="noStrike">
+        <a:defRPr sz="1400" b="0" i="0" u="none" strike="noStrike" cap="none">
           <a:solidFill>
             <a:srgbClr val="000000"/>
           </a:solidFill>
@@ -3761,7 +3839,7 @@
           <a:sym typeface="Arial"/>
         </a:defRPr>
       </a:lvl7pPr>
-      <a:lvl8pPr lvl="7" marR="0" rtl="0" algn="l">
+      <a:lvl8pPr marR="0" lvl="7" algn="l" rtl="0">
         <a:lnSpc>
           <a:spcPct val="100000"/>
         </a:lnSpc>
@@ -3775,7 +3853,7 @@
           <a:srgbClr val="000000"/>
         </a:buClr>
         <a:buFont typeface="Arial"/>
-        <a:defRPr b="0" i="0" sz="1400" u="none" cap="none" strike="noStrike">
+        <a:defRPr sz="1400" b="0" i="0" u="none" strike="noStrike" cap="none">
           <a:solidFill>
             <a:srgbClr val="000000"/>
           </a:solidFill>
@@ -3785,7 +3863,7 @@
           <a:sym typeface="Arial"/>
         </a:defRPr>
       </a:lvl8pPr>
-      <a:lvl9pPr lvl="8" marR="0" rtl="0" algn="l">
+      <a:lvl9pPr marR="0" lvl="8" algn="l" rtl="0">
         <a:lnSpc>
           <a:spcPct val="100000"/>
         </a:lnSpc>
@@ -3799,7 +3877,7 @@
           <a:srgbClr val="000000"/>
         </a:buClr>
         <a:buFont typeface="Arial"/>
-        <a:defRPr b="0" i="0" sz="1400" u="none" cap="none" strike="noStrike">
+        <a:defRPr sz="1400" b="0" i="0" u="none" strike="noStrike" cap="none">
           <a:solidFill>
             <a:srgbClr val="000000"/>
           </a:solidFill>
@@ -3811,7 +3889,7 @@
       </a:lvl9pPr>
     </p:bodyStyle>
     <p:otherStyle>
-      <a:defPPr lvl="0" marR="0" rtl="0" algn="l">
+      <a:defPPr marR="0" lvl="0" algn="l" rtl="0">
         <a:lnSpc>
           <a:spcPct val="100000"/>
         </a:lnSpc>
@@ -3822,7 +3900,7 @@
           <a:spcPts val="0"/>
         </a:spcAft>
       </a:defPPr>
-      <a:lvl1pPr lvl="0" marR="0" rtl="0" algn="l">
+      <a:lvl1pPr marR="0" lvl="0" algn="l" rtl="0">
         <a:lnSpc>
           <a:spcPct val="100000"/>
         </a:lnSpc>
@@ -3836,7 +3914,7 @@
           <a:srgbClr val="000000"/>
         </a:buClr>
         <a:buFont typeface="Arial"/>
-        <a:defRPr b="0" i="0" sz="1400" u="none" cap="none" strike="noStrike">
+        <a:defRPr sz="1400" b="0" i="0" u="none" strike="noStrike" cap="none">
           <a:solidFill>
             <a:srgbClr val="000000"/>
           </a:solidFill>
@@ -3846,7 +3924,7 @@
           <a:sym typeface="Arial"/>
         </a:defRPr>
       </a:lvl1pPr>
-      <a:lvl2pPr lvl="1" marR="0" rtl="0" algn="l">
+      <a:lvl2pPr marR="0" lvl="1" algn="l" rtl="0">
         <a:lnSpc>
           <a:spcPct val="100000"/>
         </a:lnSpc>
@@ -3860,7 +3938,7 @@
           <a:srgbClr val="000000"/>
         </a:buClr>
         <a:buFont typeface="Arial"/>
-        <a:defRPr b="0" i="0" sz="1400" u="none" cap="none" strike="noStrike">
+        <a:defRPr sz="1400" b="0" i="0" u="none" strike="noStrike" cap="none">
           <a:solidFill>
             <a:srgbClr val="000000"/>
           </a:solidFill>
@@ -3870,7 +3948,7 @@
           <a:sym typeface="Arial"/>
         </a:defRPr>
       </a:lvl2pPr>
-      <a:lvl3pPr lvl="2" marR="0" rtl="0" algn="l">
+      <a:lvl3pPr marR="0" lvl="2" algn="l" rtl="0">
         <a:lnSpc>
           <a:spcPct val="100000"/>
         </a:lnSpc>
@@ -3884,7 +3962,7 @@
           <a:srgbClr val="000000"/>
         </a:buClr>
         <a:buFont typeface="Arial"/>
-        <a:defRPr b="0" i="0" sz="1400" u="none" cap="none" strike="noStrike">
+        <a:defRPr sz="1400" b="0" i="0" u="none" strike="noStrike" cap="none">
           <a:solidFill>
             <a:srgbClr val="000000"/>
           </a:solidFill>
@@ -3894,7 +3972,7 @@
           <a:sym typeface="Arial"/>
         </a:defRPr>
       </a:lvl3pPr>
-      <a:lvl4pPr lvl="3" marR="0" rtl="0" algn="l">
+      <a:lvl4pPr marR="0" lvl="3" algn="l" rtl="0">
         <a:lnSpc>
           <a:spcPct val="100000"/>
         </a:lnSpc>
@@ -3908,7 +3986,7 @@
           <a:srgbClr val="000000"/>
         </a:buClr>
         <a:buFont typeface="Arial"/>
-        <a:defRPr b="0" i="0" sz="1400" u="none" cap="none" strike="noStrike">
+        <a:defRPr sz="1400" b="0" i="0" u="none" strike="noStrike" cap="none">
           <a:solidFill>
             <a:srgbClr val="000000"/>
           </a:solidFill>
@@ -3918,7 +3996,7 @@
           <a:sym typeface="Arial"/>
         </a:defRPr>
       </a:lvl4pPr>
-      <a:lvl5pPr lvl="4" marR="0" rtl="0" algn="l">
+      <a:lvl5pPr marR="0" lvl="4" algn="l" rtl="0">
         <a:lnSpc>
           <a:spcPct val="100000"/>
         </a:lnSpc>
@@ -3932,7 +4010,7 @@
           <a:srgbClr val="000000"/>
         </a:buClr>
         <a:buFont typeface="Arial"/>
-        <a:defRPr b="0" i="0" sz="1400" u="none" cap="none" strike="noStrike">
+        <a:defRPr sz="1400" b="0" i="0" u="none" strike="noStrike" cap="none">
           <a:solidFill>
             <a:srgbClr val="000000"/>
           </a:solidFill>
@@ -3942,7 +4020,7 @@
           <a:sym typeface="Arial"/>
         </a:defRPr>
       </a:lvl5pPr>
-      <a:lvl6pPr lvl="5" marR="0" rtl="0" algn="l">
+      <a:lvl6pPr marR="0" lvl="5" algn="l" rtl="0">
         <a:lnSpc>
           <a:spcPct val="100000"/>
         </a:lnSpc>
@@ -3956,7 +4034,7 @@
           <a:srgbClr val="000000"/>
         </a:buClr>
         <a:buFont typeface="Arial"/>
-        <a:defRPr b="0" i="0" sz="1400" u="none" cap="none" strike="noStrike">
+        <a:defRPr sz="1400" b="0" i="0" u="none" strike="noStrike" cap="none">
           <a:solidFill>
             <a:srgbClr val="000000"/>
           </a:solidFill>
@@ -3966,7 +4044,7 @@
           <a:sym typeface="Arial"/>
         </a:defRPr>
       </a:lvl6pPr>
-      <a:lvl7pPr lvl="6" marR="0" rtl="0" algn="l">
+      <a:lvl7pPr marR="0" lvl="6" algn="l" rtl="0">
         <a:lnSpc>
           <a:spcPct val="100000"/>
         </a:lnSpc>
@@ -3980,7 +4058,7 @@
           <a:srgbClr val="000000"/>
         </a:buClr>
         <a:buFont typeface="Arial"/>
-        <a:defRPr b="0" i="0" sz="1400" u="none" cap="none" strike="noStrike">
+        <a:defRPr sz="1400" b="0" i="0" u="none" strike="noStrike" cap="none">
           <a:solidFill>
             <a:srgbClr val="000000"/>
           </a:solidFill>
@@ -3990,7 +4068,7 @@
           <a:sym typeface="Arial"/>
         </a:defRPr>
       </a:lvl7pPr>
-      <a:lvl8pPr lvl="7" marR="0" rtl="0" algn="l">
+      <a:lvl8pPr marR="0" lvl="7" algn="l" rtl="0">
         <a:lnSpc>
           <a:spcPct val="100000"/>
         </a:lnSpc>
@@ -4004,7 +4082,7 @@
           <a:srgbClr val="000000"/>
         </a:buClr>
         <a:buFont typeface="Arial"/>
-        <a:defRPr b="0" i="0" sz="1400" u="none" cap="none" strike="noStrike">
+        <a:defRPr sz="1400" b="0" i="0" u="none" strike="noStrike" cap="none">
           <a:solidFill>
             <a:srgbClr val="000000"/>
           </a:solidFill>
@@ -4014,7 +4092,7 @@
           <a:sym typeface="Arial"/>
         </a:defRPr>
       </a:lvl8pPr>
-      <a:lvl9pPr lvl="8" marR="0" rtl="0" algn="l">
+      <a:lvl9pPr marR="0" lvl="8" algn="l" rtl="0">
         <a:lnSpc>
           <a:spcPct val="100000"/>
         </a:lnSpc>
@@ -4028,7 +4106,7 @@
           <a:srgbClr val="000000"/>
         </a:buClr>
         <a:buFont typeface="Arial"/>
-        <a:defRPr b="0" i="0" sz="1400" u="none" cap="none" strike="noStrike">
+        <a:defRPr sz="1400" b="0" i="0" u="none" strike="noStrike" cap="none">
           <a:solidFill>
             <a:srgbClr val="000000"/>
           </a:solidFill>
@@ -4044,18 +4122,19 @@
 </file>
 
 <file path=ppt/slides/slide1.xml><?xml version="1.0" encoding="utf-8"?>
-<p:sld xmlns:a="http://schemas.openxmlformats.org/drawingml/2006/main" xmlns:r="http://schemas.openxmlformats.org/officeDocument/2006/relationships" xmlns:mc="http://schemas.openxmlformats.org/markup-compatibility/2006" xmlns:mv="urn:schemas-microsoft-com:mac:vml" xmlns:p="http://schemas.openxmlformats.org/presentationml/2006/main" xmlns:c="http://schemas.openxmlformats.org/drawingml/2006/chart" xmlns:dgm="http://schemas.openxmlformats.org/drawingml/2006/diagram" xmlns:o="urn:schemas-microsoft-com:office:office" xmlns:v="urn:schemas-microsoft-com:vml" xmlns:pvml="urn:schemas-microsoft-com:office:powerpoint" xmlns:com="http://schemas.openxmlformats.org/drawingml/2006/compatibility" xmlns:p14="http://schemas.microsoft.com/office/powerpoint/2010/main" xmlns:p15="http://schemas.microsoft.com/office/powerpoint/2012/main" xmlns:ahyp="http://schemas.microsoft.com/office/drawing/2018/hyperlinkcolor">
+<p:sld xmlns:a="http://schemas.openxmlformats.org/drawingml/2006/main" xmlns:r="http://schemas.openxmlformats.org/officeDocument/2006/relationships" xmlns:p="http://schemas.openxmlformats.org/presentationml/2006/main">
   <p:cSld>
     <p:bg>
       <p:bgPr>
         <a:solidFill>
           <a:schemeClr val="lt1"/>
         </a:solidFill>
+        <a:effectLst/>
       </p:bgPr>
     </p:bg>
     <p:spTree>
       <p:nvGrpSpPr>
-        <p:cNvPr id="29" name="Shape 29"/>
+        <p:cNvPr id="1" name="Shape 29"/>
         <p:cNvGrpSpPr/>
         <p:nvPr/>
       </p:nvGrpSpPr>
@@ -4087,12 +4166,12 @@
           </a:ln>
         </p:spPr>
         <p:txBody>
-          <a:bodyPr anchorCtr="0" anchor="t" bIns="182875" lIns="365750" spcFirstLastPara="1" rIns="365750" wrap="square" tIns="182875">
+          <a:bodyPr spcFirstLastPara="1" wrap="square" lIns="365750" tIns="182875" rIns="365750" bIns="182875" anchor="t" anchorCtr="0">
             <a:spAutoFit/>
           </a:bodyPr>
           <a:lstStyle/>
           <a:p>
-            <a:pPr indent="0" lvl="0" marL="0" marR="0" rtl="0" algn="l">
+            <a:pPr marL="0" marR="0" lvl="0" indent="0" algn="l" rtl="0">
               <a:spcBef>
                 <a:spcPts val="0"/>
               </a:spcBef>
@@ -4102,7 +4181,7 @@
               <a:buNone/>
             </a:pPr>
             <a:r>
-              <a:rPr b="0" i="0" lang="ko-KR" sz="8000" u="none" cap="none" strike="noStrike">
+              <a:rPr lang="ko-KR" sz="8000" b="0" i="0" u="none" strike="noStrike" cap="none">
                 <a:solidFill>
                   <a:srgbClr val="FFC600"/>
                 </a:solidFill>
@@ -4113,7 +4192,7 @@
               </a:rPr>
               <a:t>주제가 들어가는 부분입니다. </a:t>
             </a:r>
-            <a:endParaRPr b="0" i="0" sz="8000" u="none" cap="none" strike="noStrike">
+            <a:endParaRPr sz="8000" b="0" i="0" u="none" strike="noStrike" cap="none">
               <a:solidFill>
                 <a:srgbClr val="FFC600"/>
               </a:solidFill>
@@ -4124,7 +4203,7 @@
             </a:endParaRPr>
           </a:p>
           <a:p>
-            <a:pPr indent="0" lvl="0" marL="0" marR="0" rtl="0" algn="l">
+            <a:pPr marL="0" marR="0" lvl="0" indent="0" algn="l" rtl="0">
               <a:spcBef>
                 <a:spcPts val="0"/>
               </a:spcBef>
@@ -4134,7 +4213,7 @@
               <a:buNone/>
             </a:pPr>
             <a:r>
-              <a:rPr b="0" i="0" lang="ko-KR" sz="6600" u="none" cap="none" strike="noStrike">
+              <a:rPr lang="ko-KR" sz="6600" b="0" i="0" u="none" strike="noStrike" cap="none">
                 <a:solidFill>
                   <a:srgbClr val="FFC600"/>
                 </a:solidFill>
@@ -4145,7 +4224,7 @@
               </a:rPr>
               <a:t>&lt;소주제&gt;</a:t>
             </a:r>
-            <a:endParaRPr b="0" i="0" sz="4800" u="none" cap="none" strike="noStrike">
+            <a:endParaRPr sz="4800" b="0" i="0" u="none" strike="noStrike" cap="none">
               <a:solidFill>
                 <a:srgbClr val="FFC600"/>
               </a:solidFill>
@@ -4177,12 +4256,12 @@
           </a:ln>
         </p:spPr>
         <p:txBody>
-          <a:bodyPr anchorCtr="0" anchor="t" bIns="0" lIns="0" spcFirstLastPara="1" rIns="0" wrap="square" tIns="0">
+          <a:bodyPr spcFirstLastPara="1" wrap="square" lIns="0" tIns="0" rIns="0" bIns="0" anchor="t" anchorCtr="0">
             <a:spAutoFit/>
           </a:bodyPr>
           <a:lstStyle/>
           <a:p>
-            <a:pPr indent="0" lvl="0" marL="0" marR="0" rtl="0" algn="l">
+            <a:pPr marL="0" marR="0" lvl="0" indent="0" algn="l" rtl="0">
               <a:spcBef>
                 <a:spcPts val="0"/>
               </a:spcBef>
@@ -4192,7 +4271,7 @@
               <a:buNone/>
             </a:pPr>
             <a:r>
-              <a:rPr b="0" i="0" lang="ko-KR" sz="3000" u="none" cap="none" strike="noStrike">
+              <a:rPr lang="ko-KR" sz="3000" b="0" i="0" u="none" strike="noStrike" cap="none">
                 <a:solidFill>
                   <a:schemeClr val="lt1"/>
                 </a:solidFill>
@@ -4220,7 +4299,7 @@
           </a:xfrm>
           <a:prstGeom prst="roundRect">
             <a:avLst>
-              <a:gd fmla="val 5630" name="adj"/>
+              <a:gd name="adj" fmla="val 5630"/>
             </a:avLst>
           </a:prstGeom>
           <a:solidFill>
@@ -4231,12 +4310,12 @@
           </a:ln>
         </p:spPr>
         <p:txBody>
-          <a:bodyPr anchorCtr="0" anchor="ctr" bIns="45700" lIns="0" spcFirstLastPara="1" rIns="0" wrap="square" tIns="45700">
+          <a:bodyPr spcFirstLastPara="1" wrap="square" lIns="0" tIns="45700" rIns="0" bIns="45700" anchor="ctr" anchorCtr="0">
             <a:noAutofit/>
           </a:bodyPr>
           <a:lstStyle/>
           <a:p>
-            <a:pPr indent="0" lvl="0" marL="0" marR="0" rtl="0" algn="ctr">
+            <a:pPr marL="0" marR="0" lvl="0" indent="0" algn="ctr" rtl="0">
               <a:spcBef>
                 <a:spcPts val="0"/>
               </a:spcBef>
@@ -4246,7 +4325,7 @@
               <a:buNone/>
             </a:pPr>
             <a:r>
-              <a:rPr b="0" i="0" lang="ko-KR" sz="3000" u="none" cap="none" strike="noStrike">
+              <a:rPr lang="ko-KR" sz="3000" b="0" i="0" u="none" strike="noStrike" cap="none">
                 <a:solidFill>
                   <a:srgbClr val="0F0F70"/>
                 </a:solidFill>
@@ -4297,12 +4376,12 @@
             </a:ln>
           </p:spPr>
           <p:txBody>
-            <a:bodyPr anchorCtr="0" anchor="ctr" bIns="45700" lIns="91425" spcFirstLastPara="1" rIns="91425" wrap="square" tIns="45700">
+            <a:bodyPr spcFirstLastPara="1" wrap="square" lIns="91425" tIns="45700" rIns="91425" bIns="45700" anchor="ctr" anchorCtr="0">
               <a:noAutofit/>
             </a:bodyPr>
             <a:lstStyle/>
             <a:p>
-              <a:pPr indent="0" lvl="0" marL="0" marR="0" rtl="0" algn="ctr">
+              <a:pPr marL="0" marR="0" lvl="0" indent="0" algn="ctr" rtl="0">
                 <a:spcBef>
                   <a:spcPts val="0"/>
                 </a:spcBef>
@@ -4311,10 +4390,7 @@
                 </a:spcAft>
                 <a:buNone/>
               </a:pPr>
-              <a:r>
-                <a:t/>
-              </a:r>
-              <a:endParaRPr b="0" i="0" sz="7400" u="none" cap="none" strike="noStrike">
+              <a:endParaRPr sz="7400" b="0" i="0" u="none" strike="noStrike" cap="none">
                 <a:solidFill>
                   <a:schemeClr val="lt1"/>
                 </a:solidFill>
@@ -4339,7 +4415,7 @@
             </a:xfrm>
             <a:prstGeom prst="roundRect">
               <a:avLst>
-                <a:gd fmla="val 50000" name="adj"/>
+                <a:gd name="adj" fmla="val 50000"/>
               </a:avLst>
             </a:prstGeom>
             <a:solidFill>
@@ -4350,12 +4426,12 @@
             </a:ln>
           </p:spPr>
           <p:txBody>
-            <a:bodyPr anchorCtr="0" anchor="ctr" bIns="199300" lIns="398600" spcFirstLastPara="1" rIns="398600" wrap="square" tIns="199300">
+            <a:bodyPr spcFirstLastPara="1" wrap="square" lIns="398600" tIns="199300" rIns="398600" bIns="199300" anchor="ctr" anchorCtr="0">
               <a:noAutofit/>
             </a:bodyPr>
             <a:lstStyle/>
             <a:p>
-              <a:pPr indent="0" lvl="0" marL="0" marR="0" rtl="0" algn="l">
+              <a:pPr marL="0" marR="0" lvl="0" indent="0" algn="l" rtl="0">
                 <a:spcBef>
                   <a:spcPts val="0"/>
                 </a:spcBef>
@@ -4365,7 +4441,7 @@
                 <a:buNone/>
               </a:pPr>
               <a:r>
-                <a:rPr b="0" i="0" lang="ko-KR" sz="4000" u="none" cap="none" strike="noStrike">
+                <a:rPr lang="ko-KR" sz="4000" b="0" i="0" u="none" strike="noStrike" cap="none">
                   <a:solidFill>
                     <a:srgbClr val="494429"/>
                   </a:solidFill>
@@ -4390,7 +4466,7 @@
         <p:spPr>
           <a:xfrm>
             <a:off x="3935494" y="4524773"/>
-            <a:ext cx="1766509" cy="461665"/>
+            <a:ext cx="2196007" cy="461665"/>
           </a:xfrm>
           <a:prstGeom prst="rect">
             <a:avLst/>
@@ -4401,12 +4477,12 @@
           </a:ln>
         </p:spPr>
         <p:txBody>
-          <a:bodyPr anchorCtr="0" anchor="t" bIns="0" lIns="0" spcFirstLastPara="1" rIns="0" wrap="square" tIns="0">
+          <a:bodyPr spcFirstLastPara="1" wrap="square" lIns="0" tIns="0" rIns="0" bIns="0" anchor="t" anchorCtr="0">
             <a:spAutoFit/>
           </a:bodyPr>
           <a:lstStyle/>
           <a:p>
-            <a:pPr indent="0" lvl="0" marL="0" marR="0" rtl="0" algn="l">
+            <a:pPr marL="0" marR="0" lvl="0" indent="0" algn="l" rtl="0">
               <a:spcBef>
                 <a:spcPts val="0"/>
               </a:spcBef>
@@ -4416,7 +4492,7 @@
               <a:buNone/>
             </a:pPr>
             <a:r>
-              <a:rPr b="0" i="0" lang="ko-KR" sz="3000" u="none" cap="none" strike="noStrike">
+              <a:rPr lang="ko-KR" sz="3000" b="0" i="0" u="none" strike="noStrike" cap="none">
                 <a:solidFill>
                   <a:schemeClr val="lt1"/>
                 </a:solidFill>
@@ -4425,7 +4501,19 @@
                 <a:cs typeface="Arial"/>
                 <a:sym typeface="Arial"/>
               </a:rPr>
-              <a:t>000 교수님</a:t>
+              <a:t>000 </a:t>
+            </a:r>
+            <a:r>
+              <a:rPr lang="ko-KR" altLang="en-US" sz="3000" b="0" i="0" u="none" strike="noStrike" cap="none" smtClean="0">
+                <a:solidFill>
+                  <a:schemeClr val="lt1"/>
+                </a:solidFill>
+                <a:latin typeface="Arial"/>
+                <a:ea typeface="Arial"/>
+                <a:cs typeface="Arial"/>
+                <a:sym typeface="Arial"/>
+              </a:rPr>
+              <a:t>교수님</a:t>
             </a:r>
             <a:endParaRPr/>
           </a:p>
@@ -4444,7 +4532,7 @@
           </a:xfrm>
           <a:prstGeom prst="roundRect">
             <a:avLst>
-              <a:gd fmla="val 5630" name="adj"/>
+              <a:gd name="adj" fmla="val 5630"/>
             </a:avLst>
           </a:prstGeom>
           <a:solidFill>
@@ -4455,12 +4543,12 @@
           </a:ln>
         </p:spPr>
         <p:txBody>
-          <a:bodyPr anchorCtr="0" anchor="ctr" bIns="45700" lIns="0" spcFirstLastPara="1" rIns="0" wrap="square" tIns="45700">
+          <a:bodyPr spcFirstLastPara="1" wrap="square" lIns="0" tIns="45700" rIns="0" bIns="45700" anchor="ctr" anchorCtr="0">
             <a:noAutofit/>
           </a:bodyPr>
           <a:lstStyle/>
           <a:p>
-            <a:pPr indent="0" lvl="0" marL="0" marR="0" rtl="0" algn="ctr">
+            <a:pPr marL="0" marR="0" lvl="0" indent="0" algn="ctr" rtl="0">
               <a:spcBef>
                 <a:spcPts val="0"/>
               </a:spcBef>
@@ -4470,7 +4558,7 @@
               <a:buNone/>
             </a:pPr>
             <a:r>
-              <a:rPr b="0" i="0" lang="ko-KR" sz="3000" u="none" cap="none" strike="noStrike">
+              <a:rPr lang="ko-KR" sz="3000" b="0" i="0" u="none" strike="noStrike" cap="none">
                 <a:solidFill>
                   <a:srgbClr val="0F0F70"/>
                 </a:solidFill>
@@ -4494,7 +4582,7 @@
         <p:spPr>
           <a:xfrm>
             <a:off x="11434014" y="3652225"/>
-            <a:ext cx="1980000" cy="461700"/>
+            <a:ext cx="2697862" cy="461665"/>
           </a:xfrm>
           <a:prstGeom prst="rect">
             <a:avLst/>
@@ -4505,12 +4593,12 @@
           </a:ln>
         </p:spPr>
         <p:txBody>
-          <a:bodyPr anchorCtr="0" anchor="t" bIns="0" lIns="0" spcFirstLastPara="1" rIns="0" wrap="square" tIns="0">
+          <a:bodyPr spcFirstLastPara="1" wrap="square" lIns="0" tIns="0" rIns="0" bIns="0" anchor="t" anchorCtr="0">
             <a:spAutoFit/>
           </a:bodyPr>
           <a:lstStyle/>
           <a:p>
-            <a:pPr indent="0" lvl="0" marL="0" marR="0" rtl="0" algn="l">
+            <a:pPr marL="0" marR="0" lvl="0" indent="0" algn="l" rtl="0">
               <a:spcBef>
                 <a:spcPts val="0"/>
               </a:spcBef>
@@ -4520,7 +4608,7 @@
               <a:buNone/>
             </a:pPr>
             <a:r>
-              <a:rPr b="0" i="0" lang="ko-KR" sz="3000" u="none" cap="none" strike="noStrike">
+              <a:rPr lang="ko-KR" sz="3000" b="0" i="0" u="none" strike="noStrike" cap="none">
                 <a:solidFill>
                   <a:schemeClr val="lt1"/>
                 </a:solidFill>
@@ -4529,7 +4617,55 @@
                 <a:cs typeface="Arial"/>
                 <a:sym typeface="Arial"/>
               </a:rPr>
-              <a:t>00 팀</a:t>
+              <a:t>00 </a:t>
+            </a:r>
+            <a:r>
+              <a:rPr lang="ko-KR" altLang="en-US" sz="3000" b="0" i="0" u="none" strike="noStrike" cap="none" smtClean="0">
+                <a:solidFill>
+                  <a:schemeClr val="lt1"/>
+                </a:solidFill>
+                <a:latin typeface="Arial"/>
+                <a:ea typeface="Arial"/>
+                <a:cs typeface="Arial"/>
+                <a:sym typeface="Arial"/>
+              </a:rPr>
+              <a:t>학과</a:t>
+            </a:r>
+            <a:r>
+              <a:rPr lang="en-US" altLang="ko-KR" sz="3000" b="0" i="0" u="none" strike="noStrike" cap="none" smtClean="0">
+                <a:solidFill>
+                  <a:schemeClr val="lt1"/>
+                </a:solidFill>
+                <a:latin typeface="Arial"/>
+                <a:ea typeface="Arial"/>
+                <a:cs typeface="Arial"/>
+                <a:sym typeface="Arial"/>
+              </a:rPr>
+              <a:t>(</a:t>
+            </a:r>
+            <a:r>
+              <a:rPr lang="ko-KR" altLang="en-US" sz="3000" b="0" i="0" u="none" strike="noStrike" cap="none" smtClean="0">
+                <a:solidFill>
+                  <a:schemeClr val="lt1"/>
+                </a:solidFill>
+                <a:latin typeface="Arial"/>
+                <a:ea typeface="Arial"/>
+                <a:cs typeface="Arial"/>
+                <a:sym typeface="Arial"/>
+              </a:rPr>
+              <a:t>학부</a:t>
+            </a:r>
+            <a:r>
+              <a:rPr lang="en-US" altLang="ko-KR" sz="3000" b="0" i="0" u="none" strike="noStrike" cap="none" smtClean="0">
+                <a:solidFill>
+                  <a:schemeClr val="lt1"/>
+                </a:solidFill>
+                <a:latin typeface="Arial"/>
+                <a:ea typeface="Arial"/>
+                <a:cs typeface="Arial"/>
+                <a:sym typeface="Arial"/>
+              </a:rPr>
+              <a:t>)</a:t>
             </a:r>
             <a:endParaRPr/>
           </a:p>
@@ -4548,7 +4684,7 @@
           </a:xfrm>
           <a:prstGeom prst="roundRect">
             <a:avLst>
-              <a:gd fmla="val 5630" name="adj"/>
+              <a:gd name="adj" fmla="val 5630"/>
             </a:avLst>
           </a:prstGeom>
           <a:solidFill>
@@ -4559,12 +4695,12 @@
           </a:ln>
         </p:spPr>
         <p:txBody>
-          <a:bodyPr anchorCtr="0" anchor="ctr" bIns="45700" lIns="0" spcFirstLastPara="1" rIns="0" wrap="square" tIns="45700">
+          <a:bodyPr spcFirstLastPara="1" wrap="square" lIns="0" tIns="45700" rIns="0" bIns="45700" anchor="ctr" anchorCtr="0">
             <a:noAutofit/>
           </a:bodyPr>
           <a:lstStyle/>
           <a:p>
-            <a:pPr indent="0" lvl="0" marL="0" marR="0" rtl="0" algn="ctr">
+            <a:pPr marL="0" marR="0" lvl="0" indent="0" algn="ctr" rtl="0">
               <a:spcBef>
                 <a:spcPts val="0"/>
               </a:spcBef>
@@ -4574,7 +4710,7 @@
               <a:buNone/>
             </a:pPr>
             <a:r>
-              <a:rPr b="0" i="0" lang="ko-KR" sz="3000" u="none" cap="none" strike="noStrike">
+              <a:rPr lang="ko-KR" altLang="en-US" sz="3000" b="0" i="0" u="none" strike="noStrike" cap="none" smtClean="0">
                 <a:solidFill>
                   <a:srgbClr val="0F0F70"/>
                 </a:solidFill>
@@ -4583,7 +4719,31 @@
                 <a:cs typeface="Arial"/>
                 <a:sym typeface="Arial"/>
               </a:rPr>
-              <a:t>팀 명</a:t>
+              <a:t>학과</a:t>
+            </a:r>
+            <a:r>
+              <a:rPr lang="en-US" altLang="ko-KR" sz="3000" b="0" i="0" u="none" strike="noStrike" cap="none" smtClean="0">
+                <a:solidFill>
+                  <a:srgbClr val="0F0F70"/>
+                </a:solidFill>
+                <a:latin typeface="Arial"/>
+                <a:ea typeface="Arial"/>
+                <a:cs typeface="Arial"/>
+                <a:sym typeface="Arial"/>
+              </a:rPr>
+              <a:t>/</a:t>
+            </a:r>
+            <a:r>
+              <a:rPr lang="ko-KR" altLang="en-US" sz="3000" b="0" i="0" u="none" strike="noStrike" cap="none" smtClean="0">
+                <a:solidFill>
+                  <a:srgbClr val="0F0F70"/>
+                </a:solidFill>
+                <a:latin typeface="Arial"/>
+                <a:ea typeface="Arial"/>
+                <a:cs typeface="Arial"/>
+                <a:sym typeface="Arial"/>
+              </a:rPr>
+              <a:t>학부</a:t>
             </a:r>
             <a:endParaRPr/>
           </a:p>
@@ -4609,12 +4769,12 @@
           </a:ln>
         </p:spPr>
         <p:txBody>
-          <a:bodyPr anchorCtr="0" anchor="t" bIns="0" lIns="0" spcFirstLastPara="1" rIns="0" wrap="square" tIns="0">
+          <a:bodyPr spcFirstLastPara="1" wrap="square" lIns="0" tIns="0" rIns="0" bIns="0" anchor="t" anchorCtr="0">
             <a:spAutoFit/>
           </a:bodyPr>
           <a:lstStyle/>
           <a:p>
-            <a:pPr indent="0" lvl="0" marL="0" marR="0" rtl="0" algn="l">
+            <a:pPr marL="0" marR="0" lvl="0" indent="0" algn="l" rtl="0">
               <a:spcBef>
                 <a:spcPts val="0"/>
               </a:spcBef>
@@ -4624,7 +4784,7 @@
               <a:buNone/>
             </a:pPr>
             <a:r>
-              <a:rPr b="0" i="0" lang="ko-KR" sz="3000" u="none" cap="none" strike="noStrike">
+              <a:rPr lang="ko-KR" sz="3000" b="0" i="0" u="none" strike="noStrike" cap="none" smtClean="0">
                 <a:solidFill>
                   <a:schemeClr val="lt1"/>
                 </a:solidFill>
@@ -4633,9 +4793,9 @@
                 <a:cs typeface="Arial"/>
                 <a:sym typeface="Arial"/>
               </a:rPr>
-              <a:t>00학과  000, 000, 00학과  000, 00학과  000</a:t>
+              <a:t>000</a:t>
             </a:r>
-            <a:endParaRPr b="0" i="0" sz="3000" u="none" cap="none" strike="noStrike">
+            <a:endParaRPr sz="3000" b="0" i="0" u="none" strike="noStrike" cap="none">
               <a:solidFill>
                 <a:schemeClr val="lt1"/>
               </a:solidFill>
@@ -4660,7 +4820,7 @@
           </a:xfrm>
           <a:prstGeom prst="roundRect">
             <a:avLst>
-              <a:gd fmla="val 5630" name="adj"/>
+              <a:gd name="adj" fmla="val 5630"/>
             </a:avLst>
           </a:prstGeom>
           <a:solidFill>
@@ -4671,12 +4831,12 @@
           </a:ln>
         </p:spPr>
         <p:txBody>
-          <a:bodyPr anchorCtr="0" anchor="ctr" bIns="45700" lIns="0" spcFirstLastPara="1" rIns="0" wrap="square" tIns="45700">
+          <a:bodyPr spcFirstLastPara="1" wrap="square" lIns="0" tIns="45700" rIns="0" bIns="45700" anchor="ctr" anchorCtr="0">
             <a:noAutofit/>
           </a:bodyPr>
           <a:lstStyle/>
           <a:p>
-            <a:pPr indent="0" lvl="0" marL="0" marR="0" rtl="0" algn="ctr">
+            <a:pPr marL="0" marR="0" lvl="0" indent="0" algn="ctr" rtl="0">
               <a:spcBef>
                 <a:spcPts val="0"/>
               </a:spcBef>
@@ -4686,7 +4846,7 @@
               <a:buNone/>
             </a:pPr>
             <a:r>
-              <a:rPr b="0" i="0" lang="ko-KR" sz="3000" u="none" cap="none" strike="noStrike">
+              <a:rPr lang="ko-KR" sz="3000" b="0" i="0" u="none" strike="noStrike" cap="none" smtClean="0">
                 <a:solidFill>
                   <a:srgbClr val="0F0F70"/>
                 </a:solidFill>
@@ -4695,9 +4855,21 @@
                 <a:cs typeface="Arial"/>
                 <a:sym typeface="Arial"/>
               </a:rPr>
-              <a:t>학 과 / 이 름</a:t>
+              <a:t>이 </a:t>
             </a:r>
-            <a:endParaRPr b="0" i="0" sz="3000" u="none" cap="none" strike="noStrike">
+            <a:r>
+              <a:rPr lang="ko-KR" sz="3000" b="0" i="0" u="none" strike="noStrike" cap="none">
+                <a:solidFill>
+                  <a:srgbClr val="0F0F70"/>
+                </a:solidFill>
+                <a:latin typeface="Arial"/>
+                <a:ea typeface="Arial"/>
+                <a:cs typeface="Arial"/>
+                <a:sym typeface="Arial"/>
+              </a:rPr>
+              <a:t>름</a:t>
+            </a:r>
+            <a:endParaRPr sz="3000" b="0" i="0" u="none" strike="noStrike" cap="none">
               <a:solidFill>
                 <a:srgbClr val="0F0F70"/>
               </a:solidFill>
@@ -4745,12 +4917,12 @@
             </a:ln>
           </p:spPr>
           <p:txBody>
-            <a:bodyPr anchorCtr="0" anchor="ctr" bIns="45700" lIns="91425" spcFirstLastPara="1" rIns="91425" wrap="square" tIns="45700">
+            <a:bodyPr spcFirstLastPara="1" wrap="square" lIns="91425" tIns="45700" rIns="91425" bIns="45700" anchor="ctr" anchorCtr="0">
               <a:noAutofit/>
             </a:bodyPr>
             <a:lstStyle/>
             <a:p>
-              <a:pPr indent="0" lvl="0" marL="0" marR="0" rtl="0" algn="ctr">
+              <a:pPr marL="0" marR="0" lvl="0" indent="0" algn="ctr" rtl="0">
                 <a:spcBef>
                   <a:spcPts val="0"/>
                 </a:spcBef>
@@ -4759,10 +4931,7 @@
                 </a:spcAft>
                 <a:buNone/>
               </a:pPr>
-              <a:r>
-                <a:t/>
-              </a:r>
-              <a:endParaRPr b="0" i="0" sz="7400" u="none" cap="none" strike="noStrike">
+              <a:endParaRPr sz="7400" b="0" i="0" u="none" strike="noStrike" cap="none">
                 <a:solidFill>
                   <a:schemeClr val="lt1"/>
                 </a:solidFill>
@@ -4787,7 +4956,7 @@
             </a:xfrm>
             <a:prstGeom prst="roundRect">
               <a:avLst>
-                <a:gd fmla="val 50000" name="adj"/>
+                <a:gd name="adj" fmla="val 50000"/>
               </a:avLst>
             </a:prstGeom>
             <a:solidFill>
@@ -4798,12 +4967,12 @@
             </a:ln>
           </p:spPr>
           <p:txBody>
-            <a:bodyPr anchorCtr="0" anchor="ctr" bIns="199300" lIns="398600" spcFirstLastPara="1" rIns="398600" wrap="square" tIns="199300">
+            <a:bodyPr spcFirstLastPara="1" wrap="square" lIns="398600" tIns="199300" rIns="398600" bIns="199300" anchor="ctr" anchorCtr="0">
               <a:noAutofit/>
             </a:bodyPr>
             <a:lstStyle/>
             <a:p>
-              <a:pPr indent="0" lvl="0" marL="0" marR="0" rtl="0" algn="l">
+              <a:pPr marL="0" marR="0" lvl="0" indent="0" algn="l" rtl="0">
                 <a:spcBef>
                   <a:spcPts val="0"/>
                 </a:spcBef>
@@ -4813,7 +4982,7 @@
                 <a:buNone/>
               </a:pPr>
               <a:r>
-                <a:rPr b="0" i="0" lang="ko-KR" sz="4000" u="none" cap="none" strike="noStrike">
+                <a:rPr lang="ko-KR" sz="4000" b="0" i="0" u="none" strike="noStrike" cap="none">
                   <a:solidFill>
                     <a:srgbClr val="494429"/>
                   </a:solidFill>
@@ -4865,12 +5034,12 @@
             </a:ln>
           </p:spPr>
           <p:txBody>
-            <a:bodyPr anchorCtr="0" anchor="ctr" bIns="45700" lIns="91425" spcFirstLastPara="1" rIns="91425" wrap="square" tIns="45700">
+            <a:bodyPr spcFirstLastPara="1" wrap="square" lIns="91425" tIns="45700" rIns="91425" bIns="45700" anchor="ctr" anchorCtr="0">
               <a:noAutofit/>
             </a:bodyPr>
             <a:lstStyle/>
             <a:p>
-              <a:pPr indent="0" lvl="0" marL="0" marR="0" rtl="0" algn="ctr">
+              <a:pPr marL="0" marR="0" lvl="0" indent="0" algn="ctr" rtl="0">
                 <a:spcBef>
                   <a:spcPts val="0"/>
                 </a:spcBef>
@@ -4879,10 +5048,7 @@
                 </a:spcAft>
                 <a:buNone/>
               </a:pPr>
-              <a:r>
-                <a:t/>
-              </a:r>
-              <a:endParaRPr b="0" i="0" sz="7400" u="none" cap="none" strike="noStrike">
+              <a:endParaRPr sz="7400" b="0" i="0" u="none" strike="noStrike" cap="none">
                 <a:solidFill>
                   <a:schemeClr val="lt1"/>
                 </a:solidFill>
@@ -4907,7 +5073,7 @@
             </a:xfrm>
             <a:prstGeom prst="roundRect">
               <a:avLst>
-                <a:gd fmla="val 50000" name="adj"/>
+                <a:gd name="adj" fmla="val 50000"/>
               </a:avLst>
             </a:prstGeom>
             <a:solidFill>
@@ -4918,12 +5084,12 @@
             </a:ln>
           </p:spPr>
           <p:txBody>
-            <a:bodyPr anchorCtr="0" anchor="ctr" bIns="199300" lIns="398600" spcFirstLastPara="1" rIns="398600" wrap="square" tIns="199300">
+            <a:bodyPr spcFirstLastPara="1" wrap="square" lIns="398600" tIns="199300" rIns="398600" bIns="199300" anchor="ctr" anchorCtr="0">
               <a:noAutofit/>
             </a:bodyPr>
             <a:lstStyle/>
             <a:p>
-              <a:pPr indent="0" lvl="0" marL="0" marR="0" rtl="0" algn="l">
+              <a:pPr marL="0" marR="0" lvl="0" indent="0" algn="l" rtl="0">
                 <a:spcBef>
                   <a:spcPts val="0"/>
                 </a:spcBef>
@@ -4933,7 +5099,7 @@
                 <a:buNone/>
               </a:pPr>
               <a:r>
-                <a:rPr b="0" i="0" lang="ko-KR" sz="4000" u="none" cap="none" strike="noStrike">
+                <a:rPr lang="ko-KR" sz="4000" b="0" i="0" u="none" strike="noStrike" cap="none">
                   <a:solidFill>
                     <a:srgbClr val="0C0C0C"/>
                   </a:solidFill>
@@ -4969,12 +5135,12 @@
           </a:ln>
         </p:spPr>
         <p:txBody>
-          <a:bodyPr anchorCtr="0" anchor="t" bIns="182875" lIns="365750" spcFirstLastPara="1" rIns="365750" wrap="square" tIns="182875">
+          <a:bodyPr spcFirstLastPara="1" wrap="square" lIns="365750" tIns="182875" rIns="365750" bIns="182875" anchor="t" anchorCtr="0">
             <a:spAutoFit/>
           </a:bodyPr>
           <a:lstStyle/>
           <a:p>
-            <a:pPr indent="0" lvl="0" marL="0" marR="0" rtl="0" algn="l">
+            <a:pPr marL="0" marR="0" lvl="0" indent="0" algn="l" rtl="0">
               <a:spcBef>
                 <a:spcPts val="0"/>
               </a:spcBef>
@@ -4984,7 +5150,7 @@
               <a:buNone/>
             </a:pPr>
             <a:r>
-              <a:rPr b="0" i="0" lang="ko-KR" sz="3200" u="none" cap="none" strike="noStrike">
+              <a:rPr lang="ko-KR" sz="3200" b="0" i="0" u="none" strike="noStrike" cap="none">
                 <a:solidFill>
                   <a:srgbClr val="3F3F3F"/>
                 </a:solidFill>
@@ -4998,7 +5164,7 @@
             <a:endParaRPr/>
           </a:p>
           <a:p>
-            <a:pPr indent="0" lvl="0" marL="0" marR="0" rtl="0" algn="l">
+            <a:pPr marL="0" marR="0" lvl="0" indent="0" algn="l" rtl="0">
               <a:spcBef>
                 <a:spcPts val="0"/>
               </a:spcBef>
@@ -5007,9 +5173,6 @@
               </a:spcAft>
               <a:buNone/>
             </a:pPr>
-            <a:r>
-              <a:t/>
-            </a:r>
             <a:endParaRPr sz="3200">
               <a:solidFill>
                 <a:srgbClr val="3F3F3F"/>
@@ -5021,7 +5184,7 @@
             </a:endParaRPr>
           </a:p>
           <a:p>
-            <a:pPr indent="0" lvl="0" marL="0" marR="0" rtl="0" algn="l">
+            <a:pPr marL="0" marR="0" lvl="0" indent="0" algn="l" rtl="0">
               <a:spcBef>
                 <a:spcPts val="0"/>
               </a:spcBef>
@@ -5045,7 +5208,7 @@
             <a:endParaRPr/>
           </a:p>
           <a:p>
-            <a:pPr indent="0" lvl="0" marL="0" marR="0" rtl="0" algn="l">
+            <a:pPr marL="0" marR="0" lvl="0" indent="0" algn="l" rtl="0">
               <a:spcBef>
                 <a:spcPts val="0"/>
               </a:spcBef>
@@ -5077,7 +5240,7 @@
             </a:endParaRPr>
           </a:p>
           <a:p>
-            <a:pPr indent="0" lvl="0" marL="0" marR="0" rtl="0" algn="l">
+            <a:pPr marL="0" marR="0" lvl="0" indent="0" algn="l" rtl="0">
               <a:spcBef>
                 <a:spcPts val="0"/>
               </a:spcBef>
@@ -5086,9 +5249,6 @@
               </a:spcAft>
               <a:buNone/>
             </a:pPr>
-            <a:r>
-              <a:t/>
-            </a:r>
             <a:endParaRPr sz="3200">
               <a:solidFill>
                 <a:srgbClr val="3F3F3F"/>
@@ -5100,7 +5260,7 @@
             </a:endParaRPr>
           </a:p>
           <a:p>
-            <a:pPr indent="0" lvl="0" marL="0" marR="0" rtl="0" algn="l">
+            <a:pPr marL="0" marR="0" lvl="0" indent="0" algn="l" rtl="0">
               <a:spcBef>
                 <a:spcPts val="0"/>
               </a:spcBef>
@@ -5124,7 +5284,7 @@
             <a:endParaRPr/>
           </a:p>
           <a:p>
-            <a:pPr indent="0" lvl="0" marL="0" marR="0" rtl="0" algn="l">
+            <a:pPr marL="0" marR="0" lvl="0" indent="0" algn="l" rtl="0">
               <a:spcBef>
                 <a:spcPts val="0"/>
               </a:spcBef>
@@ -5148,7 +5308,7 @@
             <a:endParaRPr/>
           </a:p>
           <a:p>
-            <a:pPr indent="0" lvl="0" marL="0" marR="0" rtl="0" algn="l">
+            <a:pPr marL="0" marR="0" lvl="0" indent="0" algn="l" rtl="0">
               <a:spcBef>
                 <a:spcPts val="0"/>
               </a:spcBef>
@@ -5217,12 +5377,12 @@
             </a:ln>
           </p:spPr>
           <p:txBody>
-            <a:bodyPr anchorCtr="0" anchor="ctr" bIns="45700" lIns="91425" spcFirstLastPara="1" rIns="91425" wrap="square" tIns="45700">
+            <a:bodyPr spcFirstLastPara="1" wrap="square" lIns="91425" tIns="45700" rIns="91425" bIns="45700" anchor="ctr" anchorCtr="0">
               <a:noAutofit/>
             </a:bodyPr>
             <a:lstStyle/>
             <a:p>
-              <a:pPr indent="0" lvl="0" marL="0" marR="0" rtl="0" algn="ctr">
+              <a:pPr marL="0" marR="0" lvl="0" indent="0" algn="ctr" rtl="0">
                 <a:spcBef>
                   <a:spcPts val="0"/>
                 </a:spcBef>
@@ -5231,9 +5391,6 @@
                 </a:spcAft>
                 <a:buNone/>
               </a:pPr>
-              <a:r>
-                <a:t/>
-              </a:r>
               <a:endParaRPr sz="7400">
                 <a:solidFill>
                   <a:schemeClr val="lt1"/>
@@ -5259,7 +5416,7 @@
             </a:xfrm>
             <a:prstGeom prst="roundRect">
               <a:avLst>
-                <a:gd fmla="val 50000" name="adj"/>
+                <a:gd name="adj" fmla="val 50000"/>
               </a:avLst>
             </a:prstGeom>
             <a:solidFill>
@@ -5270,12 +5427,12 @@
             </a:ln>
           </p:spPr>
           <p:txBody>
-            <a:bodyPr anchorCtr="0" anchor="ctr" bIns="199300" lIns="398600" spcFirstLastPara="1" rIns="398600" wrap="square" tIns="199300">
+            <a:bodyPr spcFirstLastPara="1" wrap="square" lIns="398600" tIns="199300" rIns="398600" bIns="199300" anchor="ctr" anchorCtr="0">
               <a:noAutofit/>
             </a:bodyPr>
             <a:lstStyle/>
             <a:p>
-              <a:pPr indent="0" lvl="0" marL="0" marR="0" rtl="0" algn="l">
+              <a:pPr marL="0" marR="0" lvl="0" indent="0" algn="l" rtl="0">
                 <a:spcBef>
                   <a:spcPts val="0"/>
                 </a:spcBef>
@@ -5313,9 +5470,13 @@
             <a:ext cx="720078" cy="763503"/>
           </a:xfrm>
           <a:custGeom>
-            <a:rect b="b" l="l" r="r" t="t"/>
+            <a:avLst/>
+            <a:gdLst/>
+            <a:ahLst/>
+            <a:cxnLst/>
+            <a:rect l="l" t="t" r="r" b="b"/>
             <a:pathLst>
-              <a:path extrusionOk="0" h="176" w="144">
+              <a:path w="144" h="176" extrusionOk="0">
                 <a:moveTo>
                   <a:pt x="76" y="120"/>
                 </a:moveTo>
@@ -5689,12 +5850,12 @@
           </a:ln>
         </p:spPr>
         <p:txBody>
-          <a:bodyPr anchorCtr="0" anchor="t" bIns="45700" lIns="91425" spcFirstLastPara="1" rIns="91425" wrap="square" tIns="45700">
+          <a:bodyPr spcFirstLastPara="1" wrap="square" lIns="91425" tIns="45700" rIns="91425" bIns="45700" anchor="t" anchorCtr="0">
             <a:noAutofit/>
           </a:bodyPr>
           <a:lstStyle/>
           <a:p>
-            <a:pPr indent="0" lvl="0" marL="0" marR="0" rtl="0" algn="l">
+            <a:pPr marL="0" marR="0" lvl="0" indent="0" algn="l" rtl="0">
               <a:spcBef>
                 <a:spcPts val="0"/>
               </a:spcBef>
@@ -5703,9 +5864,6 @@
               </a:spcAft>
               <a:buNone/>
             </a:pPr>
-            <a:r>
-              <a:t/>
-            </a:r>
             <a:endParaRPr sz="7400">
               <a:solidFill>
                 <a:schemeClr val="dk1"/>
@@ -5730,9 +5888,13 @@
             <a:ext cx="509668" cy="675578"/>
           </a:xfrm>
           <a:custGeom>
-            <a:rect b="b" l="l" r="r" t="t"/>
+            <a:avLst/>
+            <a:gdLst/>
+            <a:ahLst/>
+            <a:cxnLst/>
+            <a:rect l="l" t="t" r="r" b="b"/>
             <a:pathLst>
-              <a:path extrusionOk="0" h="256" w="176">
+              <a:path w="176" h="256" extrusionOk="0">
                 <a:moveTo>
                   <a:pt x="120" y="256"/>
                 </a:moveTo>
@@ -6036,23 +6198,23 @@
           <a:solidFill>
             <a:srgbClr val="494429"/>
           </a:solidFill>
-          <a:ln cap="flat" cmpd="sng" w="9525">
+          <a:ln w="9525" cap="flat" cmpd="sng">
             <a:solidFill>
               <a:srgbClr val="494429"/>
             </a:solidFill>
             <a:prstDash val="solid"/>
             <a:round/>
-            <a:headEnd len="sm" w="sm" type="none"/>
-            <a:tailEnd len="sm" w="sm" type="none"/>
+            <a:headEnd type="none" w="sm" len="sm"/>
+            <a:tailEnd type="none" w="sm" len="sm"/>
           </a:ln>
         </p:spPr>
         <p:txBody>
-          <a:bodyPr anchorCtr="0" anchor="t" bIns="45700" lIns="91425" spcFirstLastPara="1" rIns="91425" wrap="square" tIns="45700">
+          <a:bodyPr spcFirstLastPara="1" wrap="square" lIns="91425" tIns="45700" rIns="91425" bIns="45700" anchor="t" anchorCtr="0">
             <a:noAutofit/>
           </a:bodyPr>
           <a:lstStyle/>
           <a:p>
-            <a:pPr indent="0" lvl="0" marL="0" marR="0" rtl="0" algn="l">
+            <a:pPr marL="0" marR="0" lvl="0" indent="0" algn="l" rtl="0">
               <a:spcBef>
                 <a:spcPts val="0"/>
               </a:spcBef>
@@ -6061,9 +6223,6 @@
               </a:spcAft>
               <a:buNone/>
             </a:pPr>
-            <a:r>
-              <a:t/>
-            </a:r>
             <a:endParaRPr sz="7400">
               <a:solidFill>
                 <a:srgbClr val="494429"/>
@@ -6102,9 +6261,13 @@
               <a:ext cx="360363" cy="360363"/>
             </a:xfrm>
             <a:custGeom>
-              <a:rect b="b" l="l" r="r" t="t"/>
+              <a:avLst/>
+              <a:gdLst/>
+              <a:ahLst/>
+              <a:cxnLst/>
+              <a:rect l="l" t="t" r="r" b="b"/>
               <a:pathLst>
-                <a:path extrusionOk="0" h="123" w="123">
+                <a:path w="123" h="123" extrusionOk="0">
                   <a:moveTo>
                     <a:pt x="112" y="40"/>
                   </a:moveTo>
@@ -6494,7 +6657,7 @@
             <a:solidFill>
               <a:srgbClr val="0C0C0C"/>
             </a:solidFill>
-            <a:ln cap="flat" cmpd="sng" w="9525">
+            <a:ln w="9525" cap="flat" cmpd="sng">
               <a:solidFill>
                 <a:srgbClr val="0C0C0C">
                   <a:alpha val="43921"/>
@@ -6502,17 +6665,17 @@
               </a:solidFill>
               <a:prstDash val="solid"/>
               <a:round/>
-              <a:headEnd len="sm" w="sm" type="none"/>
-              <a:tailEnd len="sm" w="sm" type="none"/>
+              <a:headEnd type="none" w="sm" len="sm"/>
+              <a:tailEnd type="none" w="sm" len="sm"/>
             </a:ln>
           </p:spPr>
           <p:txBody>
-            <a:bodyPr anchorCtr="0" anchor="t" bIns="45700" lIns="91425" spcFirstLastPara="1" rIns="91425" wrap="square" tIns="45700">
+            <a:bodyPr spcFirstLastPara="1" wrap="square" lIns="91425" tIns="45700" rIns="91425" bIns="45700" anchor="t" anchorCtr="0">
               <a:noAutofit/>
             </a:bodyPr>
             <a:lstStyle/>
             <a:p>
-              <a:pPr indent="0" lvl="0" marL="0" marR="0" rtl="0" algn="l">
+              <a:pPr marL="0" marR="0" lvl="0" indent="0" algn="l" rtl="0">
                 <a:spcBef>
                   <a:spcPts val="0"/>
                 </a:spcBef>
@@ -6521,9 +6684,6 @@
                 </a:spcAft>
                 <a:buNone/>
               </a:pPr>
-              <a:r>
-                <a:t/>
-              </a:r>
               <a:endParaRPr sz="7400">
                 <a:solidFill>
                   <a:schemeClr val="dk1"/>
@@ -6548,9 +6708,13 @@
               <a:ext cx="33338" cy="31750"/>
             </a:xfrm>
             <a:custGeom>
-              <a:rect b="b" l="l" r="r" t="t"/>
+              <a:avLst/>
+              <a:gdLst/>
+              <a:ahLst/>
+              <a:cxnLst/>
+              <a:rect l="l" t="t" r="r" b="b"/>
               <a:pathLst>
-                <a:path extrusionOk="0" h="11" w="11">
+                <a:path w="11" h="11" extrusionOk="0">
                   <a:moveTo>
                     <a:pt x="6" y="0"/>
                   </a:moveTo>
@@ -6613,7 +6777,7 @@
             <a:solidFill>
               <a:srgbClr val="0C0C0C"/>
             </a:solidFill>
-            <a:ln cap="flat" cmpd="sng" w="9525">
+            <a:ln w="9525" cap="flat" cmpd="sng">
               <a:solidFill>
                 <a:srgbClr val="0C0C0C">
                   <a:alpha val="43921"/>
@@ -6621,17 +6785,17 @@
               </a:solidFill>
               <a:prstDash val="solid"/>
               <a:round/>
-              <a:headEnd len="sm" w="sm" type="none"/>
-              <a:tailEnd len="sm" w="sm" type="none"/>
+              <a:headEnd type="none" w="sm" len="sm"/>
+              <a:tailEnd type="none" w="sm" len="sm"/>
             </a:ln>
           </p:spPr>
           <p:txBody>
-            <a:bodyPr anchorCtr="0" anchor="t" bIns="45700" lIns="91425" spcFirstLastPara="1" rIns="91425" wrap="square" tIns="45700">
+            <a:bodyPr spcFirstLastPara="1" wrap="square" lIns="91425" tIns="45700" rIns="91425" bIns="45700" anchor="t" anchorCtr="0">
               <a:noAutofit/>
             </a:bodyPr>
             <a:lstStyle/>
             <a:p>
-              <a:pPr indent="0" lvl="0" marL="0" marR="0" rtl="0" algn="l">
+              <a:pPr marL="0" marR="0" lvl="0" indent="0" algn="l" rtl="0">
                 <a:spcBef>
                   <a:spcPts val="0"/>
                 </a:spcBef>
@@ -6640,9 +6804,6 @@
                 </a:spcAft>
                 <a:buNone/>
               </a:pPr>
-              <a:r>
-                <a:t/>
-              </a:r>
               <a:endParaRPr sz="7400">
                 <a:solidFill>
                   <a:schemeClr val="dk1"/>
@@ -6668,9 +6829,13 @@
             <a:ext cx="728807" cy="699671"/>
           </a:xfrm>
           <a:custGeom>
-            <a:rect b="b" l="l" r="r" t="t"/>
+            <a:avLst/>
+            <a:gdLst/>
+            <a:ahLst/>
+            <a:cxnLst/>
+            <a:rect l="l" t="t" r="r" b="b"/>
             <a:pathLst>
-              <a:path extrusionOk="0" h="176" w="176">
+              <a:path w="176" h="176" extrusionOk="0">
                 <a:moveTo>
                   <a:pt x="100" y="72"/>
                 </a:moveTo>
@@ -7061,23 +7226,23 @@
           <a:solidFill>
             <a:srgbClr val="3F3F3F"/>
           </a:solidFill>
-          <a:ln cap="flat" cmpd="sng" w="9525">
+          <a:ln w="9525" cap="flat" cmpd="sng">
             <a:solidFill>
               <a:srgbClr val="3F3F3F"/>
             </a:solidFill>
             <a:prstDash val="solid"/>
             <a:round/>
-            <a:headEnd len="sm" w="sm" type="none"/>
-            <a:tailEnd len="sm" w="sm" type="none"/>
+            <a:headEnd type="none" w="sm" len="sm"/>
+            <a:tailEnd type="none" w="sm" len="sm"/>
           </a:ln>
         </p:spPr>
         <p:txBody>
-          <a:bodyPr anchorCtr="0" anchor="t" bIns="45700" lIns="91425" spcFirstLastPara="1" rIns="91425" wrap="square" tIns="45700">
+          <a:bodyPr spcFirstLastPara="1" wrap="square" lIns="91425" tIns="45700" rIns="91425" bIns="45700" anchor="t" anchorCtr="0">
             <a:noAutofit/>
           </a:bodyPr>
           <a:lstStyle/>
           <a:p>
-            <a:pPr indent="0" lvl="0" marL="0" marR="0" rtl="0" algn="l">
+            <a:pPr marL="0" marR="0" lvl="0" indent="0" algn="l" rtl="0">
               <a:spcBef>
                 <a:spcPts val="0"/>
               </a:spcBef>
@@ -7086,9 +7251,6 @@
               </a:spcAft>
               <a:buNone/>
             </a:pPr>
-            <a:r>
-              <a:t/>
-            </a:r>
             <a:endParaRPr sz="7400">
               <a:solidFill>
                 <a:schemeClr val="dk1"/>
@@ -7110,7 +7272,288 @@
 </file>
 
 <file path=ppt/theme/theme1.xml><?xml version="1.0" encoding="utf-8"?>
-<a:theme xmlns:a="http://schemas.openxmlformats.org/drawingml/2006/main" xmlns:r="http://schemas.openxmlformats.org/officeDocument/2006/relationships">
+<a:theme xmlns:a="http://schemas.openxmlformats.org/drawingml/2006/main" name="Office 테마">
+  <a:themeElements>
+    <a:clrScheme name="Office">
+      <a:dk1>
+        <a:srgbClr val="000000"/>
+      </a:dk1>
+      <a:lt1>
+        <a:srgbClr val="FFFFFF"/>
+      </a:lt1>
+      <a:dk2>
+        <a:srgbClr val="1F497D"/>
+      </a:dk2>
+      <a:lt2>
+        <a:srgbClr val="EEECE1"/>
+      </a:lt2>
+      <a:accent1>
+        <a:srgbClr val="4F81BD"/>
+      </a:accent1>
+      <a:accent2>
+        <a:srgbClr val="C0504D"/>
+      </a:accent2>
+      <a:accent3>
+        <a:srgbClr val="9BBB59"/>
+      </a:accent3>
+      <a:accent4>
+        <a:srgbClr val="8064A2"/>
+      </a:accent4>
+      <a:accent5>
+        <a:srgbClr val="4BACC6"/>
+      </a:accent5>
+      <a:accent6>
+        <a:srgbClr val="F79646"/>
+      </a:accent6>
+      <a:hlink>
+        <a:srgbClr val="0000FF"/>
+      </a:hlink>
+      <a:folHlink>
+        <a:srgbClr val="800080"/>
+      </a:folHlink>
+    </a:clrScheme>
+    <a:fontScheme name="Office">
+      <a:majorFont>
+        <a:latin typeface="Arial"/>
+        <a:ea typeface=""/>
+        <a:cs typeface=""/>
+        <a:font script="Jpan" typeface="ＭＳ Ｐゴシック"/>
+        <a:font script="Hang" typeface="맑은 고딕"/>
+        <a:font script="Hans" typeface="宋体"/>
+        <a:font script="Hant" typeface="新細明體"/>
+        <a:font script="Arab" typeface="Times New Roman"/>
+        <a:font script="Hebr" typeface="Times New Roman"/>
+        <a:font script="Thai" typeface="Angsana New"/>
+        <a:font script="Ethi" typeface="Nyala"/>
+        <a:font script="Beng" typeface="Vrinda"/>
+        <a:font script="Gujr" typeface="Shruti"/>
+        <a:font script="Khmr" typeface="MoolBoran"/>
+        <a:font script="Knda" typeface="Tunga"/>
+        <a:font script="Guru" typeface="Raavi"/>
+        <a:font script="Cans" typeface="Euphemia"/>
+        <a:font script="Cher" typeface="Plantagenet Cherokee"/>
+        <a:font script="Yiii" typeface="Microsoft Yi Baiti"/>
+        <a:font script="Tibt" typeface="Microsoft Himalaya"/>
+        <a:font script="Thaa" typeface="MV Boli"/>
+        <a:font script="Deva" typeface="Mangal"/>
+        <a:font script="Telu" typeface="Gautami"/>
+        <a:font script="Taml" typeface="Latha"/>
+        <a:font script="Syrc" typeface="Estrangelo Edessa"/>
+        <a:font script="Orya" typeface="Kalinga"/>
+        <a:font script="Mlym" typeface="Kartika"/>
+        <a:font script="Laoo" typeface="DokChampa"/>
+        <a:font script="Sinh" typeface="Iskoola Pota"/>
+        <a:font script="Mong" typeface="Mongolian Baiti"/>
+        <a:font script="Viet" typeface="Times New Roman"/>
+        <a:font script="Uigh" typeface="Microsoft Uighur"/>
+        <a:font script="Geor" typeface="Sylfaen"/>
+      </a:majorFont>
+      <a:minorFont>
+        <a:latin typeface="Arial"/>
+        <a:ea typeface=""/>
+        <a:cs typeface=""/>
+        <a:font script="Jpan" typeface="ＭＳ Ｐゴシック"/>
+        <a:font script="Hang" typeface="맑은 고딕"/>
+        <a:font script="Hans" typeface="宋体"/>
+        <a:font script="Hant" typeface="新細明體"/>
+        <a:font script="Arab" typeface="Arial"/>
+        <a:font script="Hebr" typeface="Arial"/>
+        <a:font script="Thai" typeface="Cordia New"/>
+        <a:font script="Ethi" typeface="Nyala"/>
+        <a:font script="Beng" typeface="Vrinda"/>
+        <a:font script="Gujr" typeface="Shruti"/>
+        <a:font script="Khmr" typeface="DaunPenh"/>
+        <a:font script="Knda" typeface="Tunga"/>
+        <a:font script="Guru" typeface="Raavi"/>
+        <a:font script="Cans" typeface="Euphemia"/>
+        <a:font script="Cher" typeface="Plantagenet Cherokee"/>
+        <a:font script="Yiii" typeface="Microsoft Yi Baiti"/>
+        <a:font script="Tibt" typeface="Microsoft Himalaya"/>
+        <a:font script="Thaa" typeface="MV Boli"/>
+        <a:font script="Deva" typeface="Mangal"/>
+        <a:font script="Telu" typeface="Gautami"/>
+        <a:font script="Taml" typeface="Latha"/>
+        <a:font script="Syrc" typeface="Estrangelo Edessa"/>
+        <a:font script="Orya" typeface="Kalinga"/>
+        <a:font script="Mlym" typeface="Kartika"/>
+        <a:font script="Laoo" typeface="DokChampa"/>
+        <a:font script="Sinh" typeface="Iskoola Pota"/>
+        <a:font script="Mong" typeface="Mongolian Baiti"/>
+        <a:font script="Viet" typeface="Arial"/>
+        <a:font script="Uigh" typeface="Microsoft Uighur"/>
+        <a:font script="Geor" typeface="Sylfaen"/>
+      </a:minorFont>
+    </a:fontScheme>
+    <a:fmtScheme name="Office">
+      <a:fillStyleLst>
+        <a:solidFill>
+          <a:schemeClr val="phClr"/>
+        </a:solidFill>
+        <a:gradFill rotWithShape="1">
+          <a:gsLst>
+            <a:gs pos="0">
+              <a:schemeClr val="phClr">
+                <a:tint val="50000"/>
+                <a:satMod val="300000"/>
+              </a:schemeClr>
+            </a:gs>
+            <a:gs pos="35000">
+              <a:schemeClr val="phClr">
+                <a:tint val="37000"/>
+                <a:satMod val="300000"/>
+              </a:schemeClr>
+            </a:gs>
+            <a:gs pos="100000">
+              <a:schemeClr val="phClr">
+                <a:tint val="15000"/>
+                <a:satMod val="350000"/>
+              </a:schemeClr>
+            </a:gs>
+          </a:gsLst>
+          <a:lin ang="16200000" scaled="1"/>
+        </a:gradFill>
+        <a:gradFill rotWithShape="1">
+          <a:gsLst>
+            <a:gs pos="0">
+              <a:schemeClr val="phClr">
+                <a:tint val="100000"/>
+                <a:shade val="100000"/>
+                <a:satMod val="130000"/>
+              </a:schemeClr>
+            </a:gs>
+            <a:gs pos="100000">
+              <a:schemeClr val="phClr">
+                <a:tint val="50000"/>
+                <a:shade val="100000"/>
+                <a:satMod val="350000"/>
+              </a:schemeClr>
+            </a:gs>
+          </a:gsLst>
+          <a:lin ang="16200000" scaled="0"/>
+        </a:gradFill>
+      </a:fillStyleLst>
+      <a:lnStyleLst>
+        <a:ln w="9525" cap="flat" cmpd="sng" algn="ctr">
+          <a:solidFill>
+            <a:schemeClr val="phClr">
+              <a:shade val="95000"/>
+              <a:satMod val="105000"/>
+            </a:schemeClr>
+          </a:solidFill>
+          <a:prstDash val="solid"/>
+        </a:ln>
+        <a:ln w="25400" cap="flat" cmpd="sng" algn="ctr">
+          <a:solidFill>
+            <a:schemeClr val="phClr"/>
+          </a:solidFill>
+          <a:prstDash val="solid"/>
+        </a:ln>
+        <a:ln w="38100" cap="flat" cmpd="sng" algn="ctr">
+          <a:solidFill>
+            <a:schemeClr val="phClr"/>
+          </a:solidFill>
+          <a:prstDash val="solid"/>
+        </a:ln>
+      </a:lnStyleLst>
+      <a:effectStyleLst>
+        <a:effectStyle>
+          <a:effectLst>
+            <a:outerShdw blurRad="40000" dist="20000" dir="5400000" rotWithShape="0">
+              <a:srgbClr val="000000">
+                <a:alpha val="38000"/>
+              </a:srgbClr>
+            </a:outerShdw>
+          </a:effectLst>
+        </a:effectStyle>
+        <a:effectStyle>
+          <a:effectLst>
+            <a:outerShdw blurRad="40000" dist="23000" dir="5400000" rotWithShape="0">
+              <a:srgbClr val="000000">
+                <a:alpha val="35000"/>
+              </a:srgbClr>
+            </a:outerShdw>
+          </a:effectLst>
+        </a:effectStyle>
+        <a:effectStyle>
+          <a:effectLst>
+            <a:outerShdw blurRad="40000" dist="23000" dir="5400000" rotWithShape="0">
+              <a:srgbClr val="000000">
+                <a:alpha val="35000"/>
+              </a:srgbClr>
+            </a:outerShdw>
+          </a:effectLst>
+          <a:scene3d>
+            <a:camera prst="orthographicFront">
+              <a:rot lat="0" lon="0" rev="0"/>
+            </a:camera>
+            <a:lightRig rig="threePt" dir="t">
+              <a:rot lat="0" lon="0" rev="1200000"/>
+            </a:lightRig>
+          </a:scene3d>
+          <a:sp3d>
+            <a:bevelT w="63500" h="25400"/>
+          </a:sp3d>
+        </a:effectStyle>
+      </a:effectStyleLst>
+      <a:bgFillStyleLst>
+        <a:solidFill>
+          <a:schemeClr val="phClr"/>
+        </a:solidFill>
+        <a:gradFill rotWithShape="1">
+          <a:gsLst>
+            <a:gs pos="0">
+              <a:schemeClr val="phClr">
+                <a:tint val="40000"/>
+                <a:satMod val="350000"/>
+              </a:schemeClr>
+            </a:gs>
+            <a:gs pos="40000">
+              <a:schemeClr val="phClr">
+                <a:tint val="45000"/>
+                <a:shade val="99000"/>
+                <a:satMod val="350000"/>
+              </a:schemeClr>
+            </a:gs>
+            <a:gs pos="100000">
+              <a:schemeClr val="phClr">
+                <a:shade val="20000"/>
+                <a:satMod val="255000"/>
+              </a:schemeClr>
+            </a:gs>
+          </a:gsLst>
+          <a:path path="circle">
+            <a:fillToRect l="50000" t="-80000" r="50000" b="180000"/>
+          </a:path>
+        </a:gradFill>
+        <a:gradFill rotWithShape="1">
+          <a:gsLst>
+            <a:gs pos="0">
+              <a:schemeClr val="phClr">
+                <a:tint val="80000"/>
+                <a:satMod val="300000"/>
+              </a:schemeClr>
+            </a:gs>
+            <a:gs pos="100000">
+              <a:schemeClr val="phClr">
+                <a:shade val="30000"/>
+                <a:satMod val="200000"/>
+              </a:schemeClr>
+            </a:gs>
+          </a:gsLst>
+          <a:path path="circle">
+            <a:fillToRect l="50000" t="50000" r="50000" b="50000"/>
+          </a:path>
+        </a:gradFill>
+      </a:bgFillStyleLst>
+    </a:fmtScheme>
+  </a:themeElements>
+  <a:objectDefaults/>
+  <a:extraClrSchemeLst/>
+</a:theme>
+</file>
+
+<file path=ppt/theme/theme2.xml><?xml version="1.0" encoding="utf-8"?>
+<a:theme xmlns:a="http://schemas.openxmlformats.org/drawingml/2006/main">
   <a:themeElements>
     <a:clrScheme name="Default">
       <a:dk1>
@@ -7385,284 +7828,7 @@
       </a:bgFillStyleLst>
     </a:fmtScheme>
   </a:themeElements>
-</a:theme>
-</file>
-
-<file path=ppt/theme/theme2.xml><?xml version="1.0" encoding="utf-8"?>
-<a:theme xmlns:a="http://schemas.openxmlformats.org/drawingml/2006/main" xmlns:r="http://schemas.openxmlformats.org/officeDocument/2006/relationships" name="Office 테마">
-  <a:themeElements>
-    <a:clrScheme name="Office">
-      <a:dk1>
-        <a:srgbClr val="000000"/>
-      </a:dk1>
-      <a:lt1>
-        <a:srgbClr val="FFFFFF"/>
-      </a:lt1>
-      <a:dk2>
-        <a:srgbClr val="1F497D"/>
-      </a:dk2>
-      <a:lt2>
-        <a:srgbClr val="EEECE1"/>
-      </a:lt2>
-      <a:accent1>
-        <a:srgbClr val="4F81BD"/>
-      </a:accent1>
-      <a:accent2>
-        <a:srgbClr val="C0504D"/>
-      </a:accent2>
-      <a:accent3>
-        <a:srgbClr val="9BBB59"/>
-      </a:accent3>
-      <a:accent4>
-        <a:srgbClr val="8064A2"/>
-      </a:accent4>
-      <a:accent5>
-        <a:srgbClr val="4BACC6"/>
-      </a:accent5>
-      <a:accent6>
-        <a:srgbClr val="F79646"/>
-      </a:accent6>
-      <a:hlink>
-        <a:srgbClr val="0000FF"/>
-      </a:hlink>
-      <a:folHlink>
-        <a:srgbClr val="800080"/>
-      </a:folHlink>
-    </a:clrScheme>
-    <a:fontScheme name="Office">
-      <a:majorFont>
-        <a:latin typeface="Arial"/>
-        <a:ea typeface=""/>
-        <a:cs typeface=""/>
-        <a:font script="Jpan" typeface="ＭＳ Ｐゴシック"/>
-        <a:font script="Hang" typeface="맑은 고딕"/>
-        <a:font script="Hans" typeface="宋体"/>
-        <a:font script="Hant" typeface="新細明體"/>
-        <a:font script="Arab" typeface="Times New Roman"/>
-        <a:font script="Hebr" typeface="Times New Roman"/>
-        <a:font script="Thai" typeface="Angsana New"/>
-        <a:font script="Ethi" typeface="Nyala"/>
-        <a:font script="Beng" typeface="Vrinda"/>
-        <a:font script="Gujr" typeface="Shruti"/>
-        <a:font script="Khmr" typeface="MoolBoran"/>
-        <a:font script="Knda" typeface="Tunga"/>
-        <a:font script="Guru" typeface="Raavi"/>
-        <a:font script="Cans" typeface="Euphemia"/>
-        <a:font script="Cher" typeface="Plantagenet Cherokee"/>
-        <a:font script="Yiii" typeface="Microsoft Yi Baiti"/>
-        <a:font script="Tibt" typeface="Microsoft Himalaya"/>
-        <a:font script="Thaa" typeface="MV Boli"/>
-        <a:font script="Deva" typeface="Mangal"/>
-        <a:font script="Telu" typeface="Gautami"/>
-        <a:font script="Taml" typeface="Latha"/>
-        <a:font script="Syrc" typeface="Estrangelo Edessa"/>
-        <a:font script="Orya" typeface="Kalinga"/>
-        <a:font script="Mlym" typeface="Kartika"/>
-        <a:font script="Laoo" typeface="DokChampa"/>
-        <a:font script="Sinh" typeface="Iskoola Pota"/>
-        <a:font script="Mong" typeface="Mongolian Baiti"/>
-        <a:font script="Viet" typeface="Times New Roman"/>
-        <a:font script="Uigh" typeface="Microsoft Uighur"/>
-        <a:font script="Geor" typeface="Sylfaen"/>
-      </a:majorFont>
-      <a:minorFont>
-        <a:latin typeface="Arial"/>
-        <a:ea typeface=""/>
-        <a:cs typeface=""/>
-        <a:font script="Jpan" typeface="ＭＳ Ｐゴシック"/>
-        <a:font script="Hang" typeface="맑은 고딕"/>
-        <a:font script="Hans" typeface="宋体"/>
-        <a:font script="Hant" typeface="新細明體"/>
-        <a:font script="Arab" typeface="Arial"/>
-        <a:font script="Hebr" typeface="Arial"/>
-        <a:font script="Thai" typeface="Cordia New"/>
-        <a:font script="Ethi" typeface="Nyala"/>
-        <a:font script="Beng" typeface="Vrinda"/>
-        <a:font script="Gujr" typeface="Shruti"/>
-        <a:font script="Khmr" typeface="DaunPenh"/>
-        <a:font script="Knda" typeface="Tunga"/>
-        <a:font script="Guru" typeface="Raavi"/>
-        <a:font script="Cans" typeface="Euphemia"/>
-        <a:font script="Cher" typeface="Plantagenet Cherokee"/>
-        <a:font script="Yiii" typeface="Microsoft Yi Baiti"/>
-        <a:font script="Tibt" typeface="Microsoft Himalaya"/>
-        <a:font script="Thaa" typeface="MV Boli"/>
-        <a:font script="Deva" typeface="Mangal"/>
-        <a:font script="Telu" typeface="Gautami"/>
-        <a:font script="Taml" typeface="Latha"/>
-        <a:font script="Syrc" typeface="Estrangelo Edessa"/>
-        <a:font script="Orya" typeface="Kalinga"/>
-        <a:font script="Mlym" typeface="Kartika"/>
-        <a:font script="Laoo" typeface="DokChampa"/>
-        <a:font script="Sinh" typeface="Iskoola Pota"/>
-        <a:font script="Mong" typeface="Mongolian Baiti"/>
-        <a:font script="Viet" typeface="Arial"/>
-        <a:font script="Uigh" typeface="Microsoft Uighur"/>
-        <a:font script="Geor" typeface="Sylfaen"/>
-      </a:minorFont>
-    </a:fontScheme>
-    <a:fmtScheme name="Office">
-      <a:fillStyleLst>
-        <a:solidFill>
-          <a:schemeClr val="phClr"/>
-        </a:solidFill>
-        <a:gradFill rotWithShape="1">
-          <a:gsLst>
-            <a:gs pos="0">
-              <a:schemeClr val="phClr">
-                <a:tint val="50000"/>
-                <a:satMod val="300000"/>
-              </a:schemeClr>
-            </a:gs>
-            <a:gs pos="35000">
-              <a:schemeClr val="phClr">
-                <a:tint val="37000"/>
-                <a:satMod val="300000"/>
-              </a:schemeClr>
-            </a:gs>
-            <a:gs pos="100000">
-              <a:schemeClr val="phClr">
-                <a:tint val="15000"/>
-                <a:satMod val="350000"/>
-              </a:schemeClr>
-            </a:gs>
-          </a:gsLst>
-          <a:lin ang="16200000" scaled="1"/>
-        </a:gradFill>
-        <a:gradFill rotWithShape="1">
-          <a:gsLst>
-            <a:gs pos="0">
-              <a:schemeClr val="phClr">
-                <a:tint val="100000"/>
-                <a:shade val="100000"/>
-                <a:satMod val="130000"/>
-              </a:schemeClr>
-            </a:gs>
-            <a:gs pos="100000">
-              <a:schemeClr val="phClr">
-                <a:tint val="50000"/>
-                <a:shade val="100000"/>
-                <a:satMod val="350000"/>
-              </a:schemeClr>
-            </a:gs>
-          </a:gsLst>
-          <a:lin ang="16200000" scaled="0"/>
-        </a:gradFill>
-      </a:fillStyleLst>
-      <a:lnStyleLst>
-        <a:ln w="9525" cap="flat" cmpd="sng" algn="ctr">
-          <a:solidFill>
-            <a:schemeClr val="phClr">
-              <a:shade val="95000"/>
-              <a:satMod val="105000"/>
-            </a:schemeClr>
-          </a:solidFill>
-          <a:prstDash val="solid"/>
-        </a:ln>
-        <a:ln w="25400" cap="flat" cmpd="sng" algn="ctr">
-          <a:solidFill>
-            <a:schemeClr val="phClr"/>
-          </a:solidFill>
-          <a:prstDash val="solid"/>
-        </a:ln>
-        <a:ln w="38100" cap="flat" cmpd="sng" algn="ctr">
-          <a:solidFill>
-            <a:schemeClr val="phClr"/>
-          </a:solidFill>
-          <a:prstDash val="solid"/>
-        </a:ln>
-      </a:lnStyleLst>
-      <a:effectStyleLst>
-        <a:effectStyle>
-          <a:effectLst>
-            <a:outerShdw blurRad="40000" dist="20000" dir="5400000" rotWithShape="0">
-              <a:srgbClr val="000000">
-                <a:alpha val="38000"/>
-              </a:srgbClr>
-            </a:outerShdw>
-          </a:effectLst>
-        </a:effectStyle>
-        <a:effectStyle>
-          <a:effectLst>
-            <a:outerShdw blurRad="40000" dist="23000" dir="5400000" rotWithShape="0">
-              <a:srgbClr val="000000">
-                <a:alpha val="35000"/>
-              </a:srgbClr>
-            </a:outerShdw>
-          </a:effectLst>
-        </a:effectStyle>
-        <a:effectStyle>
-          <a:effectLst>
-            <a:outerShdw blurRad="40000" dist="23000" dir="5400000" rotWithShape="0">
-              <a:srgbClr val="000000">
-                <a:alpha val="35000"/>
-              </a:srgbClr>
-            </a:outerShdw>
-          </a:effectLst>
-          <a:scene3d>
-            <a:camera prst="orthographicFront">
-              <a:rot lat="0" lon="0" rev="0"/>
-            </a:camera>
-            <a:lightRig rig="threePt" dir="t">
-              <a:rot lat="0" lon="0" rev="1200000"/>
-            </a:lightRig>
-          </a:scene3d>
-          <a:sp3d>
-            <a:bevelT w="63500" h="25400"/>
-          </a:sp3d>
-        </a:effectStyle>
-      </a:effectStyleLst>
-      <a:bgFillStyleLst>
-        <a:solidFill>
-          <a:schemeClr val="phClr"/>
-        </a:solidFill>
-        <a:gradFill rotWithShape="1">
-          <a:gsLst>
-            <a:gs pos="0">
-              <a:schemeClr val="phClr">
-                <a:tint val="40000"/>
-                <a:satMod val="350000"/>
-              </a:schemeClr>
-            </a:gs>
-            <a:gs pos="40000">
-              <a:schemeClr val="phClr">
-                <a:tint val="45000"/>
-                <a:shade val="99000"/>
-                <a:satMod val="350000"/>
-              </a:schemeClr>
-            </a:gs>
-            <a:gs pos="100000">
-              <a:schemeClr val="phClr">
-                <a:shade val="20000"/>
-                <a:satMod val="255000"/>
-              </a:schemeClr>
-            </a:gs>
-          </a:gsLst>
-          <a:path path="circle">
-            <a:fillToRect l="50000" t="-80000" r="50000" b="180000"/>
-          </a:path>
-        </a:gradFill>
-        <a:gradFill rotWithShape="1">
-          <a:gsLst>
-            <a:gs pos="0">
-              <a:schemeClr val="phClr">
-                <a:tint val="80000"/>
-                <a:satMod val="300000"/>
-              </a:schemeClr>
-            </a:gs>
-            <a:gs pos="100000">
-              <a:schemeClr val="phClr">
-                <a:shade val="30000"/>
-                <a:satMod val="200000"/>
-              </a:schemeClr>
-            </a:gs>
-          </a:gsLst>
-          <a:path path="circle">
-            <a:fillToRect l="50000" t="50000" r="50000" b="50000"/>
-          </a:path>
-        </a:gradFill>
-      </a:bgFillStyleLst>
-    </a:fmtScheme>
-  </a:themeElements>
+  <a:objectDefaults/>
+  <a:extraClrSchemeLst/>
 </a:theme>
 </file>
--- a/_sources/발표포스터양식.pptx
+++ b/_sources/발표포스터양식.pptx
@@ -243,7 +243,7 @@
   </p:defaultTextStyle>
   <p:extLst>
     <p:ext uri="{EFAFB233-063F-42B5-8137-9DF3F51BA10A}">
-      <p15:sldGuideLst xmlns:ahyp="http://schemas.microsoft.com/office/drawing/2018/hyperlinkcolor" xmlns:p15="http://schemas.microsoft.com/office/powerpoint/2012/main" xmlns:p14="http://schemas.microsoft.com/office/powerpoint/2010/main" xmlns:com="http://schemas.openxmlformats.org/drawingml/2006/compatibility" xmlns:pvml="urn:schemas-microsoft-com:office:powerpoint" xmlns:v="urn:schemas-microsoft-com:vml" xmlns:o="urn:schemas-microsoft-com:office:office" xmlns:dgm="http://schemas.openxmlformats.org/drawingml/2006/diagram" xmlns:c="http://schemas.openxmlformats.org/drawingml/2006/chart" xmlns:mv="urn:schemas-microsoft-com:mac:vml" xmlns:mc="http://schemas.openxmlformats.org/markup-compatibility/2006" xmlns="">
+      <p15:sldGuideLst xmlns="" xmlns:mc="http://schemas.openxmlformats.org/markup-compatibility/2006" xmlns:mv="urn:schemas-microsoft-com:mac:vml" xmlns:c="http://schemas.openxmlformats.org/drawingml/2006/chart" xmlns:dgm="http://schemas.openxmlformats.org/drawingml/2006/diagram" xmlns:o="urn:schemas-microsoft-com:office:office" xmlns:v="urn:schemas-microsoft-com:vml" xmlns:pvml="urn:schemas-microsoft-com:office:powerpoint" xmlns:com="http://schemas.openxmlformats.org/drawingml/2006/compatibility" xmlns:p14="http://schemas.microsoft.com/office/powerpoint/2010/main" xmlns:p15="http://schemas.microsoft.com/office/powerpoint/2012/main" xmlns:ahyp="http://schemas.microsoft.com/office/drawing/2018/hyperlinkcolor">
         <p15:guide id="1" orient="horz" pos="13481">
           <p15:clr>
             <a:srgbClr val="A4A3A4"/>
@@ -257,7 +257,7 @@
       </p15:sldGuideLst>
     </p:ext>
     <p:ext uri="GoogleSlidesCustomDataVersion2">
-      <go:slidesCustomData xmlns:go="http://customooxmlschemas.google.com/" xmlns:ahyp="http://schemas.microsoft.com/office/drawing/2018/hyperlinkcolor" xmlns:p15="http://schemas.microsoft.com/office/powerpoint/2012/main" xmlns:p14="http://schemas.microsoft.com/office/powerpoint/2010/main" xmlns:com="http://schemas.openxmlformats.org/drawingml/2006/compatibility" xmlns:pvml="urn:schemas-microsoft-com:office:powerpoint" xmlns:v="urn:schemas-microsoft-com:vml" xmlns:o="urn:schemas-microsoft-com:office:office" xmlns:dgm="http://schemas.openxmlformats.org/drawingml/2006/diagram" xmlns:c="http://schemas.openxmlformats.org/drawingml/2006/chart" xmlns:mv="urn:schemas-microsoft-com:mac:vml" xmlns:mc="http://schemas.openxmlformats.org/markup-compatibility/2006" xmlns="" r:id="rId7" roundtripDataSignature="AMtx7mijgEuDw13MyALY9B6PDbMHPCRTZQ=="/>
+      <go:slidesCustomData xmlns="" xmlns:mc="http://schemas.openxmlformats.org/markup-compatibility/2006" xmlns:mv="urn:schemas-microsoft-com:mac:vml" xmlns:c="http://schemas.openxmlformats.org/drawingml/2006/chart" xmlns:dgm="http://schemas.openxmlformats.org/drawingml/2006/diagram" xmlns:o="urn:schemas-microsoft-com:office:office" xmlns:v="urn:schemas-microsoft-com:vml" xmlns:pvml="urn:schemas-microsoft-com:office:powerpoint" xmlns:com="http://schemas.openxmlformats.org/drawingml/2006/compatibility" xmlns:p14="http://schemas.microsoft.com/office/powerpoint/2010/main" xmlns:p15="http://schemas.microsoft.com/office/powerpoint/2012/main" xmlns:ahyp="http://schemas.microsoft.com/office/drawing/2018/hyperlinkcolor" xmlns:go="http://customooxmlschemas.google.com/" r:id="rId7" roundtripDataSignature="AMtx7mijgEuDw13MyALY9B6PDbMHPCRTZQ=="/>
     </p:ext>
   </p:extLst>
 </p:presentation>
@@ -4466,7 +4466,7 @@
         <p:spPr>
           <a:xfrm>
             <a:off x="3935494" y="4524773"/>
-            <a:ext cx="2196007" cy="461665"/>
+            <a:ext cx="2751056" cy="461665"/>
           </a:xfrm>
           <a:prstGeom prst="rect">
             <a:avLst/>
@@ -4492,7 +4492,23 @@
               <a:buNone/>
             </a:pPr>
             <a:r>
-              <a:rPr lang="ko-KR" sz="3000" b="0" i="0" u="none" strike="noStrike" cap="none">
+              <a:rPr lang="ko-KR" altLang="en-US" sz="3000" smtClean="0">
+                <a:solidFill>
+                  <a:schemeClr val="lt1"/>
+                </a:solidFill>
+              </a:rPr>
+              <a:t>변해</a:t>
+            </a:r>
+            <a:r>
+              <a:rPr lang="ko-KR" altLang="en-US" sz="3000">
+                <a:solidFill>
+                  <a:schemeClr val="lt1"/>
+                </a:solidFill>
+              </a:rPr>
+              <a:t>선</a:t>
+            </a:r>
+            <a:r>
+              <a:rPr lang="ko-KR" sz="3000" b="0" i="0" u="none" strike="noStrike" cap="none" smtClean="0">
                 <a:solidFill>
                   <a:schemeClr val="lt1"/>
                 </a:solidFill>
@@ -4501,7 +4517,7 @@
                 <a:cs typeface="Arial"/>
                 <a:sym typeface="Arial"/>
               </a:rPr>
-              <a:t>000 </a:t>
+              <a:t> </a:t>
             </a:r>
             <a:r>
               <a:rPr lang="ko-KR" altLang="en-US" sz="3000" b="0" i="0" u="none" strike="noStrike" cap="none" smtClean="0">
